--- a/wla-summer-challenge-launch.pptx
+++ b/wla-summer-challenge-launch.pptx
@@ -3277,8 +3277,8 @@
         </p:nvSpPr>
         <p:spPr>
           <a:xfrm>
-            <a:off x="4206240" y="914400"/>
-            <a:ext cx="3749039" cy="365760"/>
+            <a:off x="3108960" y="822960"/>
+            <a:ext cx="5943600" cy="502920"/>
           </a:xfrm>
           <a:prstGeom prst="roundRect">
             <a:avLst>
@@ -3313,7 +3313,7 @@
           <a:p>
             <a:pPr algn="ctr"/>
             <a:r>
-              <a:rPr sz="1100" b="1" spc="260">
+              <a:rPr sz="1500" b="1" spc="260">
                 <a:solidFill>
                   <a:srgbClr val="F4EBDC"/>
                 </a:solidFill>
@@ -3332,7 +3332,7 @@
         </p:nvSpPr>
         <p:spPr>
           <a:xfrm>
-            <a:off x="640080" y="2103120"/>
+            <a:off x="640080" y="1920240"/>
             <a:ext cx="10881360" cy="3200400"/>
           </a:xfrm>
           <a:prstGeom prst="rect">
@@ -3399,8 +3399,8 @@
         </p:nvSpPr>
         <p:spPr>
           <a:xfrm>
-            <a:off x="1371600" y="4937760"/>
-            <a:ext cx="9418320" cy="548640"/>
+            <a:off x="822960" y="4846320"/>
+            <a:ext cx="10515600" cy="640080"/>
           </a:xfrm>
           <a:prstGeom prst="rect">
             <a:avLst/>
@@ -3419,7 +3419,7 @@
               </a:lnSpc>
             </a:pPr>
             <a:r>
-              <a:rPr sz="2200" b="0" i="1">
+              <a:rPr sz="3000" b="0" i="1">
                 <a:solidFill>
                   <a:srgbClr val="0E2746"/>
                 </a:solidFill>
@@ -3438,8 +3438,8 @@
         </p:nvSpPr>
         <p:spPr>
           <a:xfrm>
-            <a:off x="1371600" y="5532120"/>
-            <a:ext cx="9418320" cy="365760"/>
+            <a:off x="822960" y="5577840"/>
+            <a:ext cx="10515600" cy="457200"/>
           </a:xfrm>
           <a:prstGeom prst="rect">
             <a:avLst/>
@@ -3458,7 +3458,7 @@
               </a:lnSpc>
             </a:pPr>
             <a:r>
-              <a:rPr sz="1300" b="1" i="0" spc="200">
+              <a:rPr sz="1800" b="1" i="0" spc="200">
                 <a:solidFill>
                   <a:srgbClr val="5A6478"/>
                 </a:solidFill>
@@ -3690,27 +3690,27 @@
         </p:nvSpPr>
         <p:spPr>
           <a:xfrm>
-            <a:off x="548640" y="6446520"/>
-            <a:ext cx="7315200" cy="274320"/>
-          </a:xfrm>
-          <a:prstGeom prst="rect">
-            <a:avLst/>
-          </a:prstGeom>
-          <a:noFill/>
-        </p:spPr>
-        <p:txBody>
-          <a:bodyPr wrap="square" lIns="0" rIns="0" tIns="0" bIns="0" anchor="t">
-            <a:spAutoFit/>
-          </a:bodyPr>
-          <a:lstStyle/>
-          <a:p>
-            <a:pPr algn="l">
-              <a:lnSpc>
-                <a:spcPct val="120000"/>
-              </a:lnSpc>
-            </a:pPr>
-            <a:r>
-              <a:rPr sz="1000" b="0" i="1">
+            <a:off x="548640" y="6355080"/>
+            <a:ext cx="7315200" cy="365760"/>
+          </a:xfrm>
+          <a:prstGeom prst="rect">
+            <a:avLst/>
+          </a:prstGeom>
+          <a:noFill/>
+        </p:spPr>
+        <p:txBody>
+          <a:bodyPr wrap="square" lIns="0" rIns="0" tIns="0" bIns="0" anchor="t">
+            <a:spAutoFit/>
+          </a:bodyPr>
+          <a:lstStyle/>
+          <a:p>
+            <a:pPr algn="l">
+              <a:lnSpc>
+                <a:spcPct val="120000"/>
+              </a:lnSpc>
+            </a:pPr>
+            <a:r>
+              <a:rPr sz="1300" b="0" i="1">
                 <a:solidFill>
                   <a:srgbClr val="5A6478"/>
                 </a:solidFill>
@@ -3729,8 +3729,8 @@
         </p:nvSpPr>
         <p:spPr>
           <a:xfrm>
-            <a:off x="7315200" y="6446520"/>
-            <a:ext cx="4389120" cy="274320"/>
+            <a:off x="6858000" y="6355080"/>
+            <a:ext cx="4846320" cy="365760"/>
           </a:xfrm>
           <a:prstGeom prst="rect">
             <a:avLst/>
@@ -3749,7 +3749,7 @@
               </a:lnSpc>
             </a:pPr>
             <a:r>
-              <a:rPr sz="900" b="1" i="0" spc="200">
+              <a:rPr sz="1200" b="1" i="0" spc="200">
                 <a:solidFill>
                   <a:srgbClr val="5A6478"/>
                 </a:solidFill>
@@ -3933,27 +3933,27 @@
         </p:nvSpPr>
         <p:spPr>
           <a:xfrm>
-            <a:off x="548640" y="6446520"/>
-            <a:ext cx="7315200" cy="274320"/>
-          </a:xfrm>
-          <a:prstGeom prst="rect">
-            <a:avLst/>
-          </a:prstGeom>
-          <a:noFill/>
-        </p:spPr>
-        <p:txBody>
-          <a:bodyPr wrap="square" lIns="0" rIns="0" tIns="0" bIns="0" anchor="t">
-            <a:spAutoFit/>
-          </a:bodyPr>
-          <a:lstStyle/>
-          <a:p>
-            <a:pPr algn="l">
-              <a:lnSpc>
-                <a:spcPct val="120000"/>
-              </a:lnSpc>
-            </a:pPr>
-            <a:r>
-              <a:rPr sz="1000" b="0" i="1">
+            <a:off x="548640" y="6355080"/>
+            <a:ext cx="7315200" cy="365760"/>
+          </a:xfrm>
+          <a:prstGeom prst="rect">
+            <a:avLst/>
+          </a:prstGeom>
+          <a:noFill/>
+        </p:spPr>
+        <p:txBody>
+          <a:bodyPr wrap="square" lIns="0" rIns="0" tIns="0" bIns="0" anchor="t">
+            <a:spAutoFit/>
+          </a:bodyPr>
+          <a:lstStyle/>
+          <a:p>
+            <a:pPr algn="l">
+              <a:lnSpc>
+                <a:spcPct val="120000"/>
+              </a:lnSpc>
+            </a:pPr>
+            <a:r>
+              <a:rPr sz="1300" b="0" i="1">
                 <a:solidFill>
                   <a:srgbClr val="5A6478"/>
                 </a:solidFill>
@@ -3972,8 +3972,8 @@
         </p:nvSpPr>
         <p:spPr>
           <a:xfrm>
-            <a:off x="7315200" y="6446520"/>
-            <a:ext cx="4389120" cy="274320"/>
+            <a:off x="6858000" y="6355080"/>
+            <a:ext cx="4846320" cy="365760"/>
           </a:xfrm>
           <a:prstGeom prst="rect">
             <a:avLst/>
@@ -3992,7 +3992,7 @@
               </a:lnSpc>
             </a:pPr>
             <a:r>
-              <a:rPr sz="900" b="1" i="0" spc="200">
+              <a:rPr sz="1200" b="1" i="0" spc="200">
                 <a:solidFill>
                   <a:srgbClr val="5A6478"/>
                 </a:solidFill>
@@ -4073,27 +4073,27 @@
         </p:nvSpPr>
         <p:spPr>
           <a:xfrm>
-            <a:off x="822960" y="822960"/>
-            <a:ext cx="10515600" cy="365760"/>
-          </a:xfrm>
-          <a:prstGeom prst="rect">
-            <a:avLst/>
-          </a:prstGeom>
-          <a:noFill/>
-        </p:spPr>
-        <p:txBody>
-          <a:bodyPr wrap="square" lIns="0" rIns="0" tIns="0" bIns="0" anchor="t">
-            <a:spAutoFit/>
-          </a:bodyPr>
-          <a:lstStyle/>
-          <a:p>
-            <a:pPr algn="l">
-              <a:lnSpc>
-                <a:spcPct val="120000"/>
-              </a:lnSpc>
-            </a:pPr>
-            <a:r>
-              <a:rPr sz="1200" b="1" i="0" spc="240">
+            <a:off x="822960" y="777240"/>
+            <a:ext cx="10515600" cy="502920"/>
+          </a:xfrm>
+          <a:prstGeom prst="rect">
+            <a:avLst/>
+          </a:prstGeom>
+          <a:noFill/>
+        </p:spPr>
+        <p:txBody>
+          <a:bodyPr wrap="square" lIns="0" rIns="0" tIns="0" bIns="0" anchor="t">
+            <a:spAutoFit/>
+          </a:bodyPr>
+          <a:lstStyle/>
+          <a:p>
+            <a:pPr algn="l">
+              <a:lnSpc>
+                <a:spcPct val="120000"/>
+              </a:lnSpc>
+            </a:pPr>
+            <a:r>
+              <a:rPr sz="1800" b="1" i="0" spc="220">
                 <a:solidFill>
                   <a:srgbClr val="D97757"/>
                 </a:solidFill>
@@ -4112,7 +4112,7 @@
         </p:nvSpPr>
         <p:spPr>
           <a:xfrm>
-            <a:off x="822960" y="1325880"/>
+            <a:off x="822960" y="1554480"/>
             <a:ext cx="10515600" cy="2286000"/>
           </a:xfrm>
           <a:prstGeom prst="rect">
@@ -4501,27 +4501,27 @@
         </p:nvSpPr>
         <p:spPr>
           <a:xfrm>
-            <a:off x="548640" y="6446520"/>
-            <a:ext cx="7315200" cy="274320"/>
-          </a:xfrm>
-          <a:prstGeom prst="rect">
-            <a:avLst/>
-          </a:prstGeom>
-          <a:noFill/>
-        </p:spPr>
-        <p:txBody>
-          <a:bodyPr wrap="square" lIns="0" rIns="0" tIns="0" bIns="0" anchor="t">
-            <a:spAutoFit/>
-          </a:bodyPr>
-          <a:lstStyle/>
-          <a:p>
-            <a:pPr algn="l">
-              <a:lnSpc>
-                <a:spcPct val="120000"/>
-              </a:lnSpc>
-            </a:pPr>
-            <a:r>
-              <a:rPr sz="1000" b="0" i="1">
+            <a:off x="548640" y="6355080"/>
+            <a:ext cx="7315200" cy="365760"/>
+          </a:xfrm>
+          <a:prstGeom prst="rect">
+            <a:avLst/>
+          </a:prstGeom>
+          <a:noFill/>
+        </p:spPr>
+        <p:txBody>
+          <a:bodyPr wrap="square" lIns="0" rIns="0" tIns="0" bIns="0" anchor="t">
+            <a:spAutoFit/>
+          </a:bodyPr>
+          <a:lstStyle/>
+          <a:p>
+            <a:pPr algn="l">
+              <a:lnSpc>
+                <a:spcPct val="120000"/>
+              </a:lnSpc>
+            </a:pPr>
+            <a:r>
+              <a:rPr sz="1300" b="0" i="1">
                 <a:solidFill>
                   <a:srgbClr val="5A6478"/>
                 </a:solidFill>
@@ -4540,8 +4540,8 @@
         </p:nvSpPr>
         <p:spPr>
           <a:xfrm>
-            <a:off x="7315200" y="6446520"/>
-            <a:ext cx="4389120" cy="274320"/>
+            <a:off x="6858000" y="6355080"/>
+            <a:ext cx="4846320" cy="365760"/>
           </a:xfrm>
           <a:prstGeom prst="rect">
             <a:avLst/>
@@ -4560,7 +4560,7 @@
               </a:lnSpc>
             </a:pPr>
             <a:r>
-              <a:rPr sz="900" b="1" i="0" spc="200">
+              <a:rPr sz="1200" b="1" i="0" spc="200">
                 <a:solidFill>
                   <a:srgbClr val="5A6478"/>
                 </a:solidFill>
@@ -4641,27 +4641,27 @@
         </p:nvSpPr>
         <p:spPr>
           <a:xfrm>
-            <a:off x="822960" y="822960"/>
-            <a:ext cx="10515600" cy="365760"/>
-          </a:xfrm>
-          <a:prstGeom prst="rect">
-            <a:avLst/>
-          </a:prstGeom>
-          <a:noFill/>
-        </p:spPr>
-        <p:txBody>
-          <a:bodyPr wrap="square" lIns="0" rIns="0" tIns="0" bIns="0" anchor="t">
-            <a:spAutoFit/>
-          </a:bodyPr>
-          <a:lstStyle/>
-          <a:p>
-            <a:pPr algn="l">
-              <a:lnSpc>
-                <a:spcPct val="120000"/>
-              </a:lnSpc>
-            </a:pPr>
-            <a:r>
-              <a:rPr sz="1200" b="1" i="0" spc="240">
+            <a:off x="822960" y="777240"/>
+            <a:ext cx="10515600" cy="502920"/>
+          </a:xfrm>
+          <a:prstGeom prst="rect">
+            <a:avLst/>
+          </a:prstGeom>
+          <a:noFill/>
+        </p:spPr>
+        <p:txBody>
+          <a:bodyPr wrap="square" lIns="0" rIns="0" tIns="0" bIns="0" anchor="t">
+            <a:spAutoFit/>
+          </a:bodyPr>
+          <a:lstStyle/>
+          <a:p>
+            <a:pPr algn="l">
+              <a:lnSpc>
+                <a:spcPct val="120000"/>
+              </a:lnSpc>
+            </a:pPr>
+            <a:r>
+              <a:rPr sz="1800" b="1" i="0" spc="220">
                 <a:solidFill>
                   <a:srgbClr val="D97757"/>
                 </a:solidFill>
@@ -4680,7 +4680,7 @@
         </p:nvSpPr>
         <p:spPr>
           <a:xfrm>
-            <a:off x="822960" y="1325880"/>
+            <a:off x="822960" y="1554480"/>
             <a:ext cx="10515600" cy="2286000"/>
           </a:xfrm>
           <a:prstGeom prst="rect">
@@ -5217,27 +5217,27 @@
         </p:nvSpPr>
         <p:spPr>
           <a:xfrm>
-            <a:off x="548640" y="6446520"/>
-            <a:ext cx="7315200" cy="274320"/>
-          </a:xfrm>
-          <a:prstGeom prst="rect">
-            <a:avLst/>
-          </a:prstGeom>
-          <a:noFill/>
-        </p:spPr>
-        <p:txBody>
-          <a:bodyPr wrap="square" lIns="0" rIns="0" tIns="0" bIns="0" anchor="t">
-            <a:spAutoFit/>
-          </a:bodyPr>
-          <a:lstStyle/>
-          <a:p>
-            <a:pPr algn="l">
-              <a:lnSpc>
-                <a:spcPct val="120000"/>
-              </a:lnSpc>
-            </a:pPr>
-            <a:r>
-              <a:rPr sz="1000" b="0" i="1">
+            <a:off x="548640" y="6355080"/>
+            <a:ext cx="7315200" cy="365760"/>
+          </a:xfrm>
+          <a:prstGeom prst="rect">
+            <a:avLst/>
+          </a:prstGeom>
+          <a:noFill/>
+        </p:spPr>
+        <p:txBody>
+          <a:bodyPr wrap="square" lIns="0" rIns="0" tIns="0" bIns="0" anchor="t">
+            <a:spAutoFit/>
+          </a:bodyPr>
+          <a:lstStyle/>
+          <a:p>
+            <a:pPr algn="l">
+              <a:lnSpc>
+                <a:spcPct val="120000"/>
+              </a:lnSpc>
+            </a:pPr>
+            <a:r>
+              <a:rPr sz="1300" b="0" i="1">
                 <a:solidFill>
                   <a:srgbClr val="5A6478"/>
                 </a:solidFill>
@@ -5256,8 +5256,8 @@
         </p:nvSpPr>
         <p:spPr>
           <a:xfrm>
-            <a:off x="7315200" y="6446520"/>
-            <a:ext cx="4389120" cy="274320"/>
+            <a:off x="6858000" y="6355080"/>
+            <a:ext cx="4846320" cy="365760"/>
           </a:xfrm>
           <a:prstGeom prst="rect">
             <a:avLst/>
@@ -5276,7 +5276,7 @@
               </a:lnSpc>
             </a:pPr>
             <a:r>
-              <a:rPr sz="900" b="1" i="0" spc="200">
+              <a:rPr sz="1200" b="1" i="0" spc="200">
                 <a:solidFill>
                   <a:srgbClr val="5A6478"/>
                 </a:solidFill>
@@ -5357,27 +5357,27 @@
         </p:nvSpPr>
         <p:spPr>
           <a:xfrm>
-            <a:off x="822960" y="1828800"/>
-            <a:ext cx="10515600" cy="365760"/>
-          </a:xfrm>
-          <a:prstGeom prst="rect">
-            <a:avLst/>
-          </a:prstGeom>
-          <a:noFill/>
-        </p:spPr>
-        <p:txBody>
-          <a:bodyPr wrap="square" lIns="0" rIns="0" tIns="0" bIns="0" anchor="t">
-            <a:spAutoFit/>
-          </a:bodyPr>
-          <a:lstStyle/>
-          <a:p>
-            <a:pPr algn="l">
-              <a:lnSpc>
-                <a:spcPct val="120000"/>
-              </a:lnSpc>
-            </a:pPr>
-            <a:r>
-              <a:rPr sz="1200" b="1" i="0" spc="240">
+            <a:off x="822960" y="777240"/>
+            <a:ext cx="10515600" cy="502920"/>
+          </a:xfrm>
+          <a:prstGeom prst="rect">
+            <a:avLst/>
+          </a:prstGeom>
+          <a:noFill/>
+        </p:spPr>
+        <p:txBody>
+          <a:bodyPr wrap="square" lIns="0" rIns="0" tIns="0" bIns="0" anchor="t">
+            <a:spAutoFit/>
+          </a:bodyPr>
+          <a:lstStyle/>
+          <a:p>
+            <a:pPr algn="l">
+              <a:lnSpc>
+                <a:spcPct val="120000"/>
+              </a:lnSpc>
+            </a:pPr>
+            <a:r>
+              <a:rPr sz="1800" b="1" i="0" spc="220">
                 <a:solidFill>
                   <a:srgbClr val="D97757"/>
                 </a:solidFill>
@@ -5396,7 +5396,7 @@
         </p:nvSpPr>
         <p:spPr>
           <a:xfrm>
-            <a:off x="822960" y="2331720"/>
+            <a:off x="822960" y="1554480"/>
             <a:ext cx="10515600" cy="2286000"/>
           </a:xfrm>
           <a:prstGeom prst="rect">
@@ -5444,7 +5444,7 @@
         </p:nvSpPr>
         <p:spPr>
           <a:xfrm>
-            <a:off x="822960" y="4206240"/>
+            <a:off x="822960" y="3429000"/>
             <a:ext cx="10515600" cy="3200400"/>
           </a:xfrm>
           <a:prstGeom prst="rect">
@@ -5483,27 +5483,27 @@
         </p:nvSpPr>
         <p:spPr>
           <a:xfrm>
-            <a:off x="548640" y="6446520"/>
-            <a:ext cx="7315200" cy="274320"/>
-          </a:xfrm>
-          <a:prstGeom prst="rect">
-            <a:avLst/>
-          </a:prstGeom>
-          <a:noFill/>
-        </p:spPr>
-        <p:txBody>
-          <a:bodyPr wrap="square" lIns="0" rIns="0" tIns="0" bIns="0" anchor="t">
-            <a:spAutoFit/>
-          </a:bodyPr>
-          <a:lstStyle/>
-          <a:p>
-            <a:pPr algn="l">
-              <a:lnSpc>
-                <a:spcPct val="120000"/>
-              </a:lnSpc>
-            </a:pPr>
-            <a:r>
-              <a:rPr sz="1000" b="0" i="1">
+            <a:off x="548640" y="6355080"/>
+            <a:ext cx="7315200" cy="365760"/>
+          </a:xfrm>
+          <a:prstGeom prst="rect">
+            <a:avLst/>
+          </a:prstGeom>
+          <a:noFill/>
+        </p:spPr>
+        <p:txBody>
+          <a:bodyPr wrap="square" lIns="0" rIns="0" tIns="0" bIns="0" anchor="t">
+            <a:spAutoFit/>
+          </a:bodyPr>
+          <a:lstStyle/>
+          <a:p>
+            <a:pPr algn="l">
+              <a:lnSpc>
+                <a:spcPct val="120000"/>
+              </a:lnSpc>
+            </a:pPr>
+            <a:r>
+              <a:rPr sz="1300" b="0" i="1">
                 <a:solidFill>
                   <a:srgbClr val="5A6478"/>
                 </a:solidFill>
@@ -5522,8 +5522,8 @@
         </p:nvSpPr>
         <p:spPr>
           <a:xfrm>
-            <a:off x="7315200" y="6446520"/>
-            <a:ext cx="4389120" cy="274320"/>
+            <a:off x="6858000" y="6355080"/>
+            <a:ext cx="4846320" cy="365760"/>
           </a:xfrm>
           <a:prstGeom prst="rect">
             <a:avLst/>
@@ -5542,7 +5542,7 @@
               </a:lnSpc>
             </a:pPr>
             <a:r>
-              <a:rPr sz="900" b="1" i="0" spc="200">
+              <a:rPr sz="1200" b="1" i="0" spc="200">
                 <a:solidFill>
                   <a:srgbClr val="5A6478"/>
                 </a:solidFill>
@@ -5714,27 +5714,27 @@
         </p:nvSpPr>
         <p:spPr>
           <a:xfrm>
-            <a:off x="548640" y="6446520"/>
-            <a:ext cx="7315200" cy="274320"/>
-          </a:xfrm>
-          <a:prstGeom prst="rect">
-            <a:avLst/>
-          </a:prstGeom>
-          <a:noFill/>
-        </p:spPr>
-        <p:txBody>
-          <a:bodyPr wrap="square" lIns="0" rIns="0" tIns="0" bIns="0" anchor="t">
-            <a:spAutoFit/>
-          </a:bodyPr>
-          <a:lstStyle/>
-          <a:p>
-            <a:pPr algn="l">
-              <a:lnSpc>
-                <a:spcPct val="120000"/>
-              </a:lnSpc>
-            </a:pPr>
-            <a:r>
-              <a:rPr sz="1000" b="0" i="1">
+            <a:off x="548640" y="6355080"/>
+            <a:ext cx="7315200" cy="365760"/>
+          </a:xfrm>
+          <a:prstGeom prst="rect">
+            <a:avLst/>
+          </a:prstGeom>
+          <a:noFill/>
+        </p:spPr>
+        <p:txBody>
+          <a:bodyPr wrap="square" lIns="0" rIns="0" tIns="0" bIns="0" anchor="t">
+            <a:spAutoFit/>
+          </a:bodyPr>
+          <a:lstStyle/>
+          <a:p>
+            <a:pPr algn="l">
+              <a:lnSpc>
+                <a:spcPct val="120000"/>
+              </a:lnSpc>
+            </a:pPr>
+            <a:r>
+              <a:rPr sz="1300" b="0" i="1">
                 <a:solidFill>
                   <a:srgbClr val="FFFFFF"/>
                 </a:solidFill>
@@ -5753,8 +5753,8 @@
         </p:nvSpPr>
         <p:spPr>
           <a:xfrm>
-            <a:off x="7315200" y="6446520"/>
-            <a:ext cx="4389120" cy="274320"/>
+            <a:off x="6858000" y="6355080"/>
+            <a:ext cx="4846320" cy="365760"/>
           </a:xfrm>
           <a:prstGeom prst="rect">
             <a:avLst/>
@@ -5773,7 +5773,7 @@
               </a:lnSpc>
             </a:pPr>
             <a:r>
-              <a:rPr sz="900" b="1" i="0" spc="200">
+              <a:rPr sz="1200" b="1" i="0" spc="200">
                 <a:solidFill>
                   <a:srgbClr val="FFFFFF"/>
                 </a:solidFill>
@@ -5927,27 +5927,27 @@
         </p:nvSpPr>
         <p:spPr>
           <a:xfrm>
-            <a:off x="548640" y="6446520"/>
-            <a:ext cx="7315200" cy="274320"/>
-          </a:xfrm>
-          <a:prstGeom prst="rect">
-            <a:avLst/>
-          </a:prstGeom>
-          <a:noFill/>
-        </p:spPr>
-        <p:txBody>
-          <a:bodyPr wrap="square" lIns="0" rIns="0" tIns="0" bIns="0" anchor="t">
-            <a:spAutoFit/>
-          </a:bodyPr>
-          <a:lstStyle/>
-          <a:p>
-            <a:pPr algn="l">
-              <a:lnSpc>
-                <a:spcPct val="120000"/>
-              </a:lnSpc>
-            </a:pPr>
-            <a:r>
-              <a:rPr sz="1000" b="0" i="1">
+            <a:off x="548640" y="6355080"/>
+            <a:ext cx="7315200" cy="365760"/>
+          </a:xfrm>
+          <a:prstGeom prst="rect">
+            <a:avLst/>
+          </a:prstGeom>
+          <a:noFill/>
+        </p:spPr>
+        <p:txBody>
+          <a:bodyPr wrap="square" lIns="0" rIns="0" tIns="0" bIns="0" anchor="t">
+            <a:spAutoFit/>
+          </a:bodyPr>
+          <a:lstStyle/>
+          <a:p>
+            <a:pPr algn="l">
+              <a:lnSpc>
+                <a:spcPct val="120000"/>
+              </a:lnSpc>
+            </a:pPr>
+            <a:r>
+              <a:rPr sz="1300" b="0" i="1">
                 <a:solidFill>
                   <a:srgbClr val="5A6478"/>
                 </a:solidFill>
@@ -5966,8 +5966,8 @@
         </p:nvSpPr>
         <p:spPr>
           <a:xfrm>
-            <a:off x="7315200" y="6446520"/>
-            <a:ext cx="4389120" cy="274320"/>
+            <a:off x="6858000" y="6355080"/>
+            <a:ext cx="4846320" cy="365760"/>
           </a:xfrm>
           <a:prstGeom prst="rect">
             <a:avLst/>
@@ -5986,7 +5986,7 @@
               </a:lnSpc>
             </a:pPr>
             <a:r>
-              <a:rPr sz="900" b="1" i="0" spc="200">
+              <a:rPr sz="1200" b="1" i="0" spc="200">
                 <a:solidFill>
                   <a:srgbClr val="5A6478"/>
                 </a:solidFill>
@@ -6103,7 +6103,7 @@
           <a:p>
             <a:pPr algn="ctr"/>
             <a:r>
-              <a:rPr sz="1100" b="1" spc="300">
+              <a:rPr sz="1500" b="1" spc="300">
                 <a:solidFill>
                   <a:srgbClr val="D97757"/>
                 </a:solidFill>
@@ -6225,27 +6225,27 @@
         </p:nvSpPr>
         <p:spPr>
           <a:xfrm>
-            <a:off x="548640" y="6446520"/>
-            <a:ext cx="7315200" cy="274320"/>
-          </a:xfrm>
-          <a:prstGeom prst="rect">
-            <a:avLst/>
-          </a:prstGeom>
-          <a:noFill/>
-        </p:spPr>
-        <p:txBody>
-          <a:bodyPr wrap="square" lIns="0" rIns="0" tIns="0" bIns="0" anchor="t">
-            <a:spAutoFit/>
-          </a:bodyPr>
-          <a:lstStyle/>
-          <a:p>
-            <a:pPr algn="l">
-              <a:lnSpc>
-                <a:spcPct val="120000"/>
-              </a:lnSpc>
-            </a:pPr>
-            <a:r>
-              <a:rPr sz="1000" b="0" i="1">
+            <a:off x="548640" y="6355080"/>
+            <a:ext cx="7315200" cy="365760"/>
+          </a:xfrm>
+          <a:prstGeom prst="rect">
+            <a:avLst/>
+          </a:prstGeom>
+          <a:noFill/>
+        </p:spPr>
+        <p:txBody>
+          <a:bodyPr wrap="square" lIns="0" rIns="0" tIns="0" bIns="0" anchor="t">
+            <a:spAutoFit/>
+          </a:bodyPr>
+          <a:lstStyle/>
+          <a:p>
+            <a:pPr algn="l">
+              <a:lnSpc>
+                <a:spcPct val="120000"/>
+              </a:lnSpc>
+            </a:pPr>
+            <a:r>
+              <a:rPr sz="1300" b="0" i="1">
                 <a:solidFill>
                   <a:srgbClr val="5A6478"/>
                 </a:solidFill>
@@ -6264,8 +6264,8 @@
         </p:nvSpPr>
         <p:spPr>
           <a:xfrm>
-            <a:off x="7315200" y="6446520"/>
-            <a:ext cx="4389120" cy="274320"/>
+            <a:off x="6858000" y="6355080"/>
+            <a:ext cx="4846320" cy="365760"/>
           </a:xfrm>
           <a:prstGeom prst="rect">
             <a:avLst/>
@@ -6284,7 +6284,7 @@
               </a:lnSpc>
             </a:pPr>
             <a:r>
-              <a:rPr sz="900" b="1" i="0" spc="200">
+              <a:rPr sz="1200" b="1" i="0" spc="200">
                 <a:solidFill>
                   <a:srgbClr val="5A6478"/>
                 </a:solidFill>
@@ -6365,27 +6365,27 @@
         </p:nvSpPr>
         <p:spPr>
           <a:xfrm>
-            <a:off x="822960" y="822960"/>
-            <a:ext cx="10515600" cy="365760"/>
-          </a:xfrm>
-          <a:prstGeom prst="rect">
-            <a:avLst/>
-          </a:prstGeom>
-          <a:noFill/>
-        </p:spPr>
-        <p:txBody>
-          <a:bodyPr wrap="square" lIns="0" rIns="0" tIns="0" bIns="0" anchor="t">
-            <a:spAutoFit/>
-          </a:bodyPr>
-          <a:lstStyle/>
-          <a:p>
-            <a:pPr algn="l">
-              <a:lnSpc>
-                <a:spcPct val="120000"/>
-              </a:lnSpc>
-            </a:pPr>
-            <a:r>
-              <a:rPr sz="1200" b="1" i="0" spc="240">
+            <a:off x="822960" y="777240"/>
+            <a:ext cx="10515600" cy="502920"/>
+          </a:xfrm>
+          <a:prstGeom prst="rect">
+            <a:avLst/>
+          </a:prstGeom>
+          <a:noFill/>
+        </p:spPr>
+        <p:txBody>
+          <a:bodyPr wrap="square" lIns="0" rIns="0" tIns="0" bIns="0" anchor="t">
+            <a:spAutoFit/>
+          </a:bodyPr>
+          <a:lstStyle/>
+          <a:p>
+            <a:pPr algn="l">
+              <a:lnSpc>
+                <a:spcPct val="120000"/>
+              </a:lnSpc>
+            </a:pPr>
+            <a:r>
+              <a:rPr sz="1800" b="1" i="0" spc="220">
                 <a:solidFill>
                   <a:srgbClr val="D97757"/>
                 </a:solidFill>
@@ -6404,7 +6404,7 @@
         </p:nvSpPr>
         <p:spPr>
           <a:xfrm>
-            <a:off x="822960" y="1325880"/>
+            <a:off x="822960" y="1554480"/>
             <a:ext cx="10515600" cy="2286000"/>
           </a:xfrm>
           <a:prstGeom prst="rect">
@@ -6793,27 +6793,27 @@
         </p:nvSpPr>
         <p:spPr>
           <a:xfrm>
-            <a:off x="548640" y="6446520"/>
-            <a:ext cx="7315200" cy="274320"/>
-          </a:xfrm>
-          <a:prstGeom prst="rect">
-            <a:avLst/>
-          </a:prstGeom>
-          <a:noFill/>
-        </p:spPr>
-        <p:txBody>
-          <a:bodyPr wrap="square" lIns="0" rIns="0" tIns="0" bIns="0" anchor="t">
-            <a:spAutoFit/>
-          </a:bodyPr>
-          <a:lstStyle/>
-          <a:p>
-            <a:pPr algn="l">
-              <a:lnSpc>
-                <a:spcPct val="120000"/>
-              </a:lnSpc>
-            </a:pPr>
-            <a:r>
-              <a:rPr sz="1000" b="0" i="1">
+            <a:off x="548640" y="6355080"/>
+            <a:ext cx="7315200" cy="365760"/>
+          </a:xfrm>
+          <a:prstGeom prst="rect">
+            <a:avLst/>
+          </a:prstGeom>
+          <a:noFill/>
+        </p:spPr>
+        <p:txBody>
+          <a:bodyPr wrap="square" lIns="0" rIns="0" tIns="0" bIns="0" anchor="t">
+            <a:spAutoFit/>
+          </a:bodyPr>
+          <a:lstStyle/>
+          <a:p>
+            <a:pPr algn="l">
+              <a:lnSpc>
+                <a:spcPct val="120000"/>
+              </a:lnSpc>
+            </a:pPr>
+            <a:r>
+              <a:rPr sz="1300" b="0" i="1">
                 <a:solidFill>
                   <a:srgbClr val="5A6478"/>
                 </a:solidFill>
@@ -6832,8 +6832,8 @@
         </p:nvSpPr>
         <p:spPr>
           <a:xfrm>
-            <a:off x="7315200" y="6446520"/>
-            <a:ext cx="4389120" cy="274320"/>
+            <a:off x="6858000" y="6355080"/>
+            <a:ext cx="4846320" cy="365760"/>
           </a:xfrm>
           <a:prstGeom prst="rect">
             <a:avLst/>
@@ -6852,7 +6852,7 @@
               </a:lnSpc>
             </a:pPr>
             <a:r>
-              <a:rPr sz="900" b="1" i="0" spc="200">
+              <a:rPr sz="1200" b="1" i="0" spc="200">
                 <a:solidFill>
                   <a:srgbClr val="5A6478"/>
                 </a:solidFill>
@@ -6933,27 +6933,27 @@
         </p:nvSpPr>
         <p:spPr>
           <a:xfrm>
-            <a:off x="822960" y="1280160"/>
-            <a:ext cx="10515600" cy="365760"/>
-          </a:xfrm>
-          <a:prstGeom prst="rect">
-            <a:avLst/>
-          </a:prstGeom>
-          <a:noFill/>
-        </p:spPr>
-        <p:txBody>
-          <a:bodyPr wrap="square" lIns="0" rIns="0" tIns="0" bIns="0" anchor="t">
-            <a:spAutoFit/>
-          </a:bodyPr>
-          <a:lstStyle/>
-          <a:p>
-            <a:pPr algn="l">
-              <a:lnSpc>
-                <a:spcPct val="120000"/>
-              </a:lnSpc>
-            </a:pPr>
-            <a:r>
-              <a:rPr sz="1200" b="1" i="0" spc="240">
+            <a:off x="822960" y="777240"/>
+            <a:ext cx="10515600" cy="502920"/>
+          </a:xfrm>
+          <a:prstGeom prst="rect">
+            <a:avLst/>
+          </a:prstGeom>
+          <a:noFill/>
+        </p:spPr>
+        <p:txBody>
+          <a:bodyPr wrap="square" lIns="0" rIns="0" tIns="0" bIns="0" anchor="t">
+            <a:spAutoFit/>
+          </a:bodyPr>
+          <a:lstStyle/>
+          <a:p>
+            <a:pPr algn="l">
+              <a:lnSpc>
+                <a:spcPct val="120000"/>
+              </a:lnSpc>
+            </a:pPr>
+            <a:r>
+              <a:rPr sz="1800" b="1" i="0" spc="220">
                 <a:solidFill>
                   <a:srgbClr val="D97757"/>
                 </a:solidFill>
@@ -6972,7 +6972,7 @@
         </p:nvSpPr>
         <p:spPr>
           <a:xfrm>
-            <a:off x="822960" y="1783080"/>
+            <a:off x="822960" y="1554480"/>
             <a:ext cx="10515600" cy="2286000"/>
           </a:xfrm>
           <a:prstGeom prst="rect">
@@ -7352,27 +7352,27 @@
         </p:nvSpPr>
         <p:spPr>
           <a:xfrm>
-            <a:off x="548640" y="6446520"/>
-            <a:ext cx="7315200" cy="274320"/>
-          </a:xfrm>
-          <a:prstGeom prst="rect">
-            <a:avLst/>
-          </a:prstGeom>
-          <a:noFill/>
-        </p:spPr>
-        <p:txBody>
-          <a:bodyPr wrap="square" lIns="0" rIns="0" tIns="0" bIns="0" anchor="t">
-            <a:spAutoFit/>
-          </a:bodyPr>
-          <a:lstStyle/>
-          <a:p>
-            <a:pPr algn="l">
-              <a:lnSpc>
-                <a:spcPct val="120000"/>
-              </a:lnSpc>
-            </a:pPr>
-            <a:r>
-              <a:rPr sz="1000" b="0" i="1">
+            <a:off x="548640" y="6355080"/>
+            <a:ext cx="7315200" cy="365760"/>
+          </a:xfrm>
+          <a:prstGeom prst="rect">
+            <a:avLst/>
+          </a:prstGeom>
+          <a:noFill/>
+        </p:spPr>
+        <p:txBody>
+          <a:bodyPr wrap="square" lIns="0" rIns="0" tIns="0" bIns="0" anchor="t">
+            <a:spAutoFit/>
+          </a:bodyPr>
+          <a:lstStyle/>
+          <a:p>
+            <a:pPr algn="l">
+              <a:lnSpc>
+                <a:spcPct val="120000"/>
+              </a:lnSpc>
+            </a:pPr>
+            <a:r>
+              <a:rPr sz="1300" b="0" i="1">
                 <a:solidFill>
                   <a:srgbClr val="5A6478"/>
                 </a:solidFill>
@@ -7391,8 +7391,8 @@
         </p:nvSpPr>
         <p:spPr>
           <a:xfrm>
-            <a:off x="7315200" y="6446520"/>
-            <a:ext cx="4389120" cy="274320"/>
+            <a:off x="6858000" y="6355080"/>
+            <a:ext cx="4846320" cy="365760"/>
           </a:xfrm>
           <a:prstGeom prst="rect">
             <a:avLst/>
@@ -7411,7 +7411,7 @@
               </a:lnSpc>
             </a:pPr>
             <a:r>
-              <a:rPr sz="900" b="1" i="0" spc="200">
+              <a:rPr sz="1200" b="1" i="0" spc="200">
                 <a:solidFill>
                   <a:srgbClr val="5A6478"/>
                 </a:solidFill>
@@ -7492,27 +7492,27 @@
         </p:nvSpPr>
         <p:spPr>
           <a:xfrm>
-            <a:off x="822960" y="2011680"/>
-            <a:ext cx="10515600" cy="365760"/>
-          </a:xfrm>
-          <a:prstGeom prst="rect">
-            <a:avLst/>
-          </a:prstGeom>
-          <a:noFill/>
-        </p:spPr>
-        <p:txBody>
-          <a:bodyPr wrap="square" lIns="0" rIns="0" tIns="0" bIns="0" anchor="t">
-            <a:spAutoFit/>
-          </a:bodyPr>
-          <a:lstStyle/>
-          <a:p>
-            <a:pPr algn="l">
-              <a:lnSpc>
-                <a:spcPct val="120000"/>
-              </a:lnSpc>
-            </a:pPr>
-            <a:r>
-              <a:rPr sz="1200" b="1" i="0" spc="240">
+            <a:off x="822960" y="777240"/>
+            <a:ext cx="10515600" cy="502920"/>
+          </a:xfrm>
+          <a:prstGeom prst="rect">
+            <a:avLst/>
+          </a:prstGeom>
+          <a:noFill/>
+        </p:spPr>
+        <p:txBody>
+          <a:bodyPr wrap="square" lIns="0" rIns="0" tIns="0" bIns="0" anchor="t">
+            <a:spAutoFit/>
+          </a:bodyPr>
+          <a:lstStyle/>
+          <a:p>
+            <a:pPr algn="l">
+              <a:lnSpc>
+                <a:spcPct val="120000"/>
+              </a:lnSpc>
+            </a:pPr>
+            <a:r>
+              <a:rPr sz="1800" b="1" i="0" spc="220">
                 <a:solidFill>
                   <a:srgbClr val="D97757"/>
                 </a:solidFill>
@@ -7531,7 +7531,7 @@
         </p:nvSpPr>
         <p:spPr>
           <a:xfrm>
-            <a:off x="822960" y="2514600"/>
+            <a:off x="822960" y="1554480"/>
             <a:ext cx="10515600" cy="2286000"/>
           </a:xfrm>
           <a:prstGeom prst="rect">
@@ -7588,7 +7588,7 @@
         </p:nvSpPr>
         <p:spPr>
           <a:xfrm>
-            <a:off x="822960" y="4389120"/>
+            <a:off x="822960" y="3429000"/>
             <a:ext cx="10515600" cy="3200400"/>
           </a:xfrm>
           <a:prstGeom prst="rect">
@@ -7665,27 +7665,27 @@
         </p:nvSpPr>
         <p:spPr>
           <a:xfrm>
-            <a:off x="548640" y="6446520"/>
-            <a:ext cx="7315200" cy="274320"/>
-          </a:xfrm>
-          <a:prstGeom prst="rect">
-            <a:avLst/>
-          </a:prstGeom>
-          <a:noFill/>
-        </p:spPr>
-        <p:txBody>
-          <a:bodyPr wrap="square" lIns="0" rIns="0" tIns="0" bIns="0" anchor="t">
-            <a:spAutoFit/>
-          </a:bodyPr>
-          <a:lstStyle/>
-          <a:p>
-            <a:pPr algn="l">
-              <a:lnSpc>
-                <a:spcPct val="120000"/>
-              </a:lnSpc>
-            </a:pPr>
-            <a:r>
-              <a:rPr sz="1000" b="0" i="1">
+            <a:off x="548640" y="6355080"/>
+            <a:ext cx="7315200" cy="365760"/>
+          </a:xfrm>
+          <a:prstGeom prst="rect">
+            <a:avLst/>
+          </a:prstGeom>
+          <a:noFill/>
+        </p:spPr>
+        <p:txBody>
+          <a:bodyPr wrap="square" lIns="0" rIns="0" tIns="0" bIns="0" anchor="t">
+            <a:spAutoFit/>
+          </a:bodyPr>
+          <a:lstStyle/>
+          <a:p>
+            <a:pPr algn="l">
+              <a:lnSpc>
+                <a:spcPct val="120000"/>
+              </a:lnSpc>
+            </a:pPr>
+            <a:r>
+              <a:rPr sz="1300" b="0" i="1">
                 <a:solidFill>
                   <a:srgbClr val="5A6478"/>
                 </a:solidFill>
@@ -7704,8 +7704,8 @@
         </p:nvSpPr>
         <p:spPr>
           <a:xfrm>
-            <a:off x="7315200" y="6446520"/>
-            <a:ext cx="4389120" cy="274320"/>
+            <a:off x="6858000" y="6355080"/>
+            <a:ext cx="4846320" cy="365760"/>
           </a:xfrm>
           <a:prstGeom prst="rect">
             <a:avLst/>
@@ -7724,7 +7724,7 @@
               </a:lnSpc>
             </a:pPr>
             <a:r>
-              <a:rPr sz="900" b="1" i="0" spc="200">
+              <a:rPr sz="1200" b="1" i="0" spc="200">
                 <a:solidFill>
                   <a:srgbClr val="5A6478"/>
                 </a:solidFill>
@@ -7841,7 +7841,7 @@
           <a:p>
             <a:pPr algn="ctr"/>
             <a:r>
-              <a:rPr sz="1100" b="1" spc="320">
+              <a:rPr sz="1500" b="1" spc="320">
                 <a:solidFill>
                   <a:srgbClr val="FFFFFF"/>
                 </a:solidFill>
@@ -7954,27 +7954,27 @@
         </p:nvSpPr>
         <p:spPr>
           <a:xfrm>
-            <a:off x="548640" y="6446520"/>
-            <a:ext cx="7315200" cy="274320"/>
-          </a:xfrm>
-          <a:prstGeom prst="rect">
-            <a:avLst/>
-          </a:prstGeom>
-          <a:noFill/>
-        </p:spPr>
-        <p:txBody>
-          <a:bodyPr wrap="square" lIns="0" rIns="0" tIns="0" bIns="0" anchor="t">
-            <a:spAutoFit/>
-          </a:bodyPr>
-          <a:lstStyle/>
-          <a:p>
-            <a:pPr algn="l">
-              <a:lnSpc>
-                <a:spcPct val="120000"/>
-              </a:lnSpc>
-            </a:pPr>
-            <a:r>
-              <a:rPr sz="1000" b="0" i="1">
+            <a:off x="548640" y="6355080"/>
+            <a:ext cx="7315200" cy="365760"/>
+          </a:xfrm>
+          <a:prstGeom prst="rect">
+            <a:avLst/>
+          </a:prstGeom>
+          <a:noFill/>
+        </p:spPr>
+        <p:txBody>
+          <a:bodyPr wrap="square" lIns="0" rIns="0" tIns="0" bIns="0" anchor="t">
+            <a:spAutoFit/>
+          </a:bodyPr>
+          <a:lstStyle/>
+          <a:p>
+            <a:pPr algn="l">
+              <a:lnSpc>
+                <a:spcPct val="120000"/>
+              </a:lnSpc>
+            </a:pPr>
+            <a:r>
+              <a:rPr sz="1300" b="0" i="1">
                 <a:solidFill>
                   <a:srgbClr val="FFFFFF"/>
                 </a:solidFill>
@@ -7993,8 +7993,8 @@
         </p:nvSpPr>
         <p:spPr>
           <a:xfrm>
-            <a:off x="7315200" y="6446520"/>
-            <a:ext cx="4389120" cy="274320"/>
+            <a:off x="6858000" y="6355080"/>
+            <a:ext cx="4846320" cy="365760"/>
           </a:xfrm>
           <a:prstGeom prst="rect">
             <a:avLst/>
@@ -8013,7 +8013,7 @@
               </a:lnSpc>
             </a:pPr>
             <a:r>
-              <a:rPr sz="900" b="1" i="0" spc="200">
+              <a:rPr sz="1200" b="1" i="0" spc="200">
                 <a:solidFill>
                   <a:srgbClr val="FFFFFF"/>
                 </a:solidFill>
@@ -8094,27 +8094,27 @@
         </p:nvSpPr>
         <p:spPr>
           <a:xfrm>
-            <a:off x="822960" y="914400"/>
-            <a:ext cx="10515600" cy="365760"/>
-          </a:xfrm>
-          <a:prstGeom prst="rect">
-            <a:avLst/>
-          </a:prstGeom>
-          <a:noFill/>
-        </p:spPr>
-        <p:txBody>
-          <a:bodyPr wrap="square" lIns="0" rIns="0" tIns="0" bIns="0" anchor="t">
-            <a:spAutoFit/>
-          </a:bodyPr>
-          <a:lstStyle/>
-          <a:p>
-            <a:pPr algn="l">
-              <a:lnSpc>
-                <a:spcPct val="120000"/>
-              </a:lnSpc>
-            </a:pPr>
-            <a:r>
-              <a:rPr sz="1200" b="1" i="0" spc="240">
+            <a:off x="822960" y="777240"/>
+            <a:ext cx="10515600" cy="502920"/>
+          </a:xfrm>
+          <a:prstGeom prst="rect">
+            <a:avLst/>
+          </a:prstGeom>
+          <a:noFill/>
+        </p:spPr>
+        <p:txBody>
+          <a:bodyPr wrap="square" lIns="0" rIns="0" tIns="0" bIns="0" anchor="t">
+            <a:spAutoFit/>
+          </a:bodyPr>
+          <a:lstStyle/>
+          <a:p>
+            <a:pPr algn="l">
+              <a:lnSpc>
+                <a:spcPct val="120000"/>
+              </a:lnSpc>
+            </a:pPr>
+            <a:r>
+              <a:rPr sz="1800" b="1" i="0" spc="220">
                 <a:solidFill>
                   <a:srgbClr val="D97757"/>
                 </a:solidFill>
@@ -8133,7 +8133,7 @@
         </p:nvSpPr>
         <p:spPr>
           <a:xfrm>
-            <a:off x="822960" y="1417320"/>
+            <a:off x="822960" y="1554480"/>
             <a:ext cx="10515600" cy="2286000"/>
           </a:xfrm>
           <a:prstGeom prst="rect">
@@ -8727,27 +8727,27 @@
         </p:nvSpPr>
         <p:spPr>
           <a:xfrm>
-            <a:off x="548640" y="6446520"/>
-            <a:ext cx="7315200" cy="274320"/>
-          </a:xfrm>
-          <a:prstGeom prst="rect">
-            <a:avLst/>
-          </a:prstGeom>
-          <a:noFill/>
-        </p:spPr>
-        <p:txBody>
-          <a:bodyPr wrap="square" lIns="0" rIns="0" tIns="0" bIns="0" anchor="t">
-            <a:spAutoFit/>
-          </a:bodyPr>
-          <a:lstStyle/>
-          <a:p>
-            <a:pPr algn="l">
-              <a:lnSpc>
-                <a:spcPct val="120000"/>
-              </a:lnSpc>
-            </a:pPr>
-            <a:r>
-              <a:rPr sz="1000" b="0" i="1">
+            <a:off x="548640" y="6355080"/>
+            <a:ext cx="7315200" cy="365760"/>
+          </a:xfrm>
+          <a:prstGeom prst="rect">
+            <a:avLst/>
+          </a:prstGeom>
+          <a:noFill/>
+        </p:spPr>
+        <p:txBody>
+          <a:bodyPr wrap="square" lIns="0" rIns="0" tIns="0" bIns="0" anchor="t">
+            <a:spAutoFit/>
+          </a:bodyPr>
+          <a:lstStyle/>
+          <a:p>
+            <a:pPr algn="l">
+              <a:lnSpc>
+                <a:spcPct val="120000"/>
+              </a:lnSpc>
+            </a:pPr>
+            <a:r>
+              <a:rPr sz="1300" b="0" i="1">
                 <a:solidFill>
                   <a:srgbClr val="5A6478"/>
                 </a:solidFill>
@@ -8766,8 +8766,8 @@
         </p:nvSpPr>
         <p:spPr>
           <a:xfrm>
-            <a:off x="7315200" y="6446520"/>
-            <a:ext cx="4389120" cy="274320"/>
+            <a:off x="6858000" y="6355080"/>
+            <a:ext cx="4846320" cy="365760"/>
           </a:xfrm>
           <a:prstGeom prst="rect">
             <a:avLst/>
@@ -8786,7 +8786,7 @@
               </a:lnSpc>
             </a:pPr>
             <a:r>
-              <a:rPr sz="900" b="1" i="0" spc="200">
+              <a:rPr sz="1200" b="1" i="0" spc="200">
                 <a:solidFill>
                   <a:srgbClr val="5A6478"/>
                 </a:solidFill>
@@ -8867,27 +8867,27 @@
         </p:nvSpPr>
         <p:spPr>
           <a:xfrm>
-            <a:off x="822960" y="822960"/>
-            <a:ext cx="10515600" cy="365760"/>
-          </a:xfrm>
-          <a:prstGeom prst="rect">
-            <a:avLst/>
-          </a:prstGeom>
-          <a:noFill/>
-        </p:spPr>
-        <p:txBody>
-          <a:bodyPr wrap="square" lIns="0" rIns="0" tIns="0" bIns="0" anchor="t">
-            <a:spAutoFit/>
-          </a:bodyPr>
-          <a:lstStyle/>
-          <a:p>
-            <a:pPr algn="l">
-              <a:lnSpc>
-                <a:spcPct val="120000"/>
-              </a:lnSpc>
-            </a:pPr>
-            <a:r>
-              <a:rPr sz="1200" b="1" i="0" spc="240">
+            <a:off x="822960" y="777240"/>
+            <a:ext cx="10515600" cy="502920"/>
+          </a:xfrm>
+          <a:prstGeom prst="rect">
+            <a:avLst/>
+          </a:prstGeom>
+          <a:noFill/>
+        </p:spPr>
+        <p:txBody>
+          <a:bodyPr wrap="square" lIns="0" rIns="0" tIns="0" bIns="0" anchor="t">
+            <a:spAutoFit/>
+          </a:bodyPr>
+          <a:lstStyle/>
+          <a:p>
+            <a:pPr algn="l">
+              <a:lnSpc>
+                <a:spcPct val="120000"/>
+              </a:lnSpc>
+            </a:pPr>
+            <a:r>
+              <a:rPr sz="1800" b="1" i="0" spc="220">
                 <a:solidFill>
                   <a:srgbClr val="D97757"/>
                 </a:solidFill>
@@ -8906,7 +8906,7 @@
         </p:nvSpPr>
         <p:spPr>
           <a:xfrm>
-            <a:off x="822960" y="1325880"/>
+            <a:off x="822960" y="1554480"/>
             <a:ext cx="10515600" cy="2286000"/>
           </a:xfrm>
           <a:prstGeom prst="rect">
@@ -9452,27 +9452,27 @@
         </p:nvSpPr>
         <p:spPr>
           <a:xfrm>
-            <a:off x="548640" y="6446520"/>
-            <a:ext cx="7315200" cy="274320"/>
-          </a:xfrm>
-          <a:prstGeom prst="rect">
-            <a:avLst/>
-          </a:prstGeom>
-          <a:noFill/>
-        </p:spPr>
-        <p:txBody>
-          <a:bodyPr wrap="square" lIns="0" rIns="0" tIns="0" bIns="0" anchor="t">
-            <a:spAutoFit/>
-          </a:bodyPr>
-          <a:lstStyle/>
-          <a:p>
-            <a:pPr algn="l">
-              <a:lnSpc>
-                <a:spcPct val="120000"/>
-              </a:lnSpc>
-            </a:pPr>
-            <a:r>
-              <a:rPr sz="1000" b="0" i="1">
+            <a:off x="548640" y="6355080"/>
+            <a:ext cx="7315200" cy="365760"/>
+          </a:xfrm>
+          <a:prstGeom prst="rect">
+            <a:avLst/>
+          </a:prstGeom>
+          <a:noFill/>
+        </p:spPr>
+        <p:txBody>
+          <a:bodyPr wrap="square" lIns="0" rIns="0" tIns="0" bIns="0" anchor="t">
+            <a:spAutoFit/>
+          </a:bodyPr>
+          <a:lstStyle/>
+          <a:p>
+            <a:pPr algn="l">
+              <a:lnSpc>
+                <a:spcPct val="120000"/>
+              </a:lnSpc>
+            </a:pPr>
+            <a:r>
+              <a:rPr sz="1300" b="0" i="1">
                 <a:solidFill>
                   <a:srgbClr val="5A6478"/>
                 </a:solidFill>
@@ -9491,8 +9491,8 @@
         </p:nvSpPr>
         <p:spPr>
           <a:xfrm>
-            <a:off x="7315200" y="6446520"/>
-            <a:ext cx="4389120" cy="274320"/>
+            <a:off x="6858000" y="6355080"/>
+            <a:ext cx="4846320" cy="365760"/>
           </a:xfrm>
           <a:prstGeom prst="rect">
             <a:avLst/>
@@ -9511,7 +9511,7 @@
               </a:lnSpc>
             </a:pPr>
             <a:r>
-              <a:rPr sz="900" b="1" i="0" spc="200">
+              <a:rPr sz="1200" b="1" i="0" spc="200">
                 <a:solidFill>
                   <a:srgbClr val="5A6478"/>
                 </a:solidFill>
@@ -9628,7 +9628,7 @@
           <a:p>
             <a:pPr algn="ctr"/>
             <a:r>
-              <a:rPr sz="1100" b="1" spc="260">
+              <a:rPr sz="1500" b="1" spc="260">
                 <a:solidFill>
                   <a:srgbClr val="F4EBDC"/>
                 </a:solidFill>
@@ -9743,27 +9743,27 @@
         </p:nvSpPr>
         <p:spPr>
           <a:xfrm>
-            <a:off x="548640" y="6446520"/>
-            <a:ext cx="7315200" cy="274320"/>
-          </a:xfrm>
-          <a:prstGeom prst="rect">
-            <a:avLst/>
-          </a:prstGeom>
-          <a:noFill/>
-        </p:spPr>
-        <p:txBody>
-          <a:bodyPr wrap="square" lIns="0" rIns="0" tIns="0" bIns="0" anchor="t">
-            <a:spAutoFit/>
-          </a:bodyPr>
-          <a:lstStyle/>
-          <a:p>
-            <a:pPr algn="l">
-              <a:lnSpc>
-                <a:spcPct val="120000"/>
-              </a:lnSpc>
-            </a:pPr>
-            <a:r>
-              <a:rPr sz="1000" b="0" i="1">
+            <a:off x="548640" y="6355080"/>
+            <a:ext cx="7315200" cy="365760"/>
+          </a:xfrm>
+          <a:prstGeom prst="rect">
+            <a:avLst/>
+          </a:prstGeom>
+          <a:noFill/>
+        </p:spPr>
+        <p:txBody>
+          <a:bodyPr wrap="square" lIns="0" rIns="0" tIns="0" bIns="0" anchor="t">
+            <a:spAutoFit/>
+          </a:bodyPr>
+          <a:lstStyle/>
+          <a:p>
+            <a:pPr algn="l">
+              <a:lnSpc>
+                <a:spcPct val="120000"/>
+              </a:lnSpc>
+            </a:pPr>
+            <a:r>
+              <a:rPr sz="1300" b="0" i="1">
                 <a:solidFill>
                   <a:srgbClr val="5A6478"/>
                 </a:solidFill>
@@ -9782,8 +9782,8 @@
         </p:nvSpPr>
         <p:spPr>
           <a:xfrm>
-            <a:off x="7315200" y="6446520"/>
-            <a:ext cx="4389120" cy="274320"/>
+            <a:off x="6858000" y="6355080"/>
+            <a:ext cx="4846320" cy="365760"/>
           </a:xfrm>
           <a:prstGeom prst="rect">
             <a:avLst/>
@@ -9802,7 +9802,7 @@
               </a:lnSpc>
             </a:pPr>
             <a:r>
-              <a:rPr sz="900" b="1" i="0" spc="200">
+              <a:rPr sz="1200" b="1" i="0" spc="200">
                 <a:solidFill>
                   <a:srgbClr val="5A6478"/>
                 </a:solidFill>
@@ -9883,27 +9883,27 @@
         </p:nvSpPr>
         <p:spPr>
           <a:xfrm>
-            <a:off x="822960" y="548640"/>
-            <a:ext cx="3657600" cy="320040"/>
-          </a:xfrm>
-          <a:prstGeom prst="rect">
-            <a:avLst/>
-          </a:prstGeom>
-          <a:noFill/>
-        </p:spPr>
-        <p:txBody>
-          <a:bodyPr wrap="square" lIns="0" rIns="0" tIns="0" bIns="0" anchor="t">
-            <a:spAutoFit/>
-          </a:bodyPr>
-          <a:lstStyle/>
-          <a:p>
-            <a:pPr algn="l">
-              <a:lnSpc>
-                <a:spcPct val="120000"/>
-              </a:lnSpc>
-            </a:pPr>
-            <a:r>
-              <a:rPr sz="1100" b="1" i="0" spc="240">
+            <a:off x="822960" y="777240"/>
+            <a:ext cx="5486400" cy="457200"/>
+          </a:xfrm>
+          <a:prstGeom prst="rect">
+            <a:avLst/>
+          </a:prstGeom>
+          <a:noFill/>
+        </p:spPr>
+        <p:txBody>
+          <a:bodyPr wrap="square" lIns="0" rIns="0" tIns="0" bIns="0" anchor="t">
+            <a:spAutoFit/>
+          </a:bodyPr>
+          <a:lstStyle/>
+          <a:p>
+            <a:pPr algn="l">
+              <a:lnSpc>
+                <a:spcPct val="120000"/>
+              </a:lnSpc>
+            </a:pPr>
+            <a:r>
+              <a:rPr sz="1600" b="1" i="0" spc="220">
                 <a:solidFill>
                   <a:srgbClr val="D97757"/>
                 </a:solidFill>
@@ -9922,7 +9922,7 @@
         </p:nvSpPr>
         <p:spPr>
           <a:xfrm>
-            <a:off x="822960" y="1005840"/>
+            <a:off x="822960" y="1417320"/>
             <a:ext cx="548640" cy="548640"/>
           </a:xfrm>
           <a:prstGeom prst="rect">
@@ -9961,7 +9961,7 @@
         </p:nvSpPr>
         <p:spPr>
           <a:xfrm>
-            <a:off x="1417320" y="960120"/>
+            <a:off x="1417320" y="1371600"/>
             <a:ext cx="10058400" cy="1188720"/>
           </a:xfrm>
           <a:prstGeom prst="rect">
@@ -10000,7 +10000,7 @@
         </p:nvSpPr>
         <p:spPr>
           <a:xfrm>
-            <a:off x="822960" y="2286000"/>
+            <a:off x="822960" y="2697480"/>
             <a:ext cx="10515600" cy="548640"/>
           </a:xfrm>
           <a:prstGeom prst="rect">
@@ -10020,7 +10020,7 @@
               </a:lnSpc>
             </a:pPr>
             <a:r>
-              <a:rPr sz="2000" b="0" i="1">
+              <a:rPr sz="2200" b="0" i="1">
                 <a:solidFill>
                   <a:srgbClr val="0E2746"/>
                 </a:solidFill>
@@ -10039,7 +10039,7 @@
         </p:nvSpPr>
         <p:spPr>
           <a:xfrm>
-            <a:off x="822960" y="3246120"/>
+            <a:off x="822960" y="3714750"/>
             <a:ext cx="118872" cy="118872"/>
           </a:xfrm>
           <a:prstGeom prst="ellipse">
@@ -10083,7 +10083,7 @@
         </p:nvSpPr>
         <p:spPr>
           <a:xfrm>
-            <a:off x="1133856" y="3154680"/>
+            <a:off x="1133856" y="3611880"/>
             <a:ext cx="10058400" cy="502920"/>
           </a:xfrm>
           <a:prstGeom prst="rect">
@@ -10103,7 +10103,7 @@
               </a:lnSpc>
             </a:pPr>
             <a:r>
-              <a:rPr sz="1600" b="0" i="0">
+              <a:rPr sz="1800" b="0" i="0">
                 <a:solidFill>
                   <a:srgbClr val="0E2746"/>
                 </a:solidFill>
@@ -10122,7 +10122,7 @@
         </p:nvSpPr>
         <p:spPr>
           <a:xfrm>
-            <a:off x="822960" y="3703320"/>
+            <a:off x="822960" y="4171950"/>
             <a:ext cx="118872" cy="118872"/>
           </a:xfrm>
           <a:prstGeom prst="ellipse">
@@ -10166,7 +10166,7 @@
         </p:nvSpPr>
         <p:spPr>
           <a:xfrm>
-            <a:off x="1133856" y="3611880"/>
+            <a:off x="1133856" y="4069080"/>
             <a:ext cx="10058400" cy="502920"/>
           </a:xfrm>
           <a:prstGeom prst="rect">
@@ -10186,7 +10186,7 @@
               </a:lnSpc>
             </a:pPr>
             <a:r>
-              <a:rPr sz="1600" b="0" i="0">
+              <a:rPr sz="1800" b="0" i="0">
                 <a:solidFill>
                   <a:srgbClr val="0E2746"/>
                 </a:solidFill>
@@ -10205,7 +10205,7 @@
         </p:nvSpPr>
         <p:spPr>
           <a:xfrm>
-            <a:off x="822960" y="4160520"/>
+            <a:off x="822960" y="4629150"/>
             <a:ext cx="118872" cy="118872"/>
           </a:xfrm>
           <a:prstGeom prst="ellipse">
@@ -10249,7 +10249,7 @@
         </p:nvSpPr>
         <p:spPr>
           <a:xfrm>
-            <a:off x="1133856" y="4069080"/>
+            <a:off x="1133856" y="4526280"/>
             <a:ext cx="10058400" cy="502920"/>
           </a:xfrm>
           <a:prstGeom prst="rect">
@@ -10269,7 +10269,7 @@
               </a:lnSpc>
             </a:pPr>
             <a:r>
-              <a:rPr sz="1600" b="0" i="0">
+              <a:rPr sz="1800" b="0" i="0">
                 <a:solidFill>
                   <a:srgbClr val="0E2746"/>
                 </a:solidFill>
@@ -10288,7 +10288,7 @@
         </p:nvSpPr>
         <p:spPr>
           <a:xfrm>
-            <a:off x="6400800" y="3246120"/>
+            <a:off x="6400800" y="3714750"/>
             <a:ext cx="118872" cy="118872"/>
           </a:xfrm>
           <a:prstGeom prst="ellipse">
@@ -10332,7 +10332,7 @@
         </p:nvSpPr>
         <p:spPr>
           <a:xfrm>
-            <a:off x="6711696" y="3154680"/>
+            <a:off x="6711696" y="3611880"/>
             <a:ext cx="10058400" cy="502920"/>
           </a:xfrm>
           <a:prstGeom prst="rect">
@@ -10352,7 +10352,7 @@
               </a:lnSpc>
             </a:pPr>
             <a:r>
-              <a:rPr sz="1600" b="0" i="0">
+              <a:rPr sz="1800" b="0" i="0">
                 <a:solidFill>
                   <a:srgbClr val="0E2746"/>
                 </a:solidFill>
@@ -10371,7 +10371,7 @@
         </p:nvSpPr>
         <p:spPr>
           <a:xfrm>
-            <a:off x="6400800" y="3703320"/>
+            <a:off x="6400800" y="4171950"/>
             <a:ext cx="118872" cy="118872"/>
           </a:xfrm>
           <a:prstGeom prst="ellipse">
@@ -10415,7 +10415,7 @@
         </p:nvSpPr>
         <p:spPr>
           <a:xfrm>
-            <a:off x="6711696" y="3611880"/>
+            <a:off x="6711696" y="4069080"/>
             <a:ext cx="10058400" cy="502920"/>
           </a:xfrm>
           <a:prstGeom prst="rect">
@@ -10435,7 +10435,7 @@
               </a:lnSpc>
             </a:pPr>
             <a:r>
-              <a:rPr sz="1600" b="0" i="0">
+              <a:rPr sz="1800" b="0" i="0">
                 <a:solidFill>
                   <a:srgbClr val="0E2746"/>
                 </a:solidFill>
@@ -10454,27 +10454,27 @@
         </p:nvSpPr>
         <p:spPr>
           <a:xfrm>
-            <a:off x="822960" y="5760720"/>
-            <a:ext cx="10515600" cy="457200"/>
-          </a:xfrm>
-          <a:prstGeom prst="rect">
-            <a:avLst/>
-          </a:prstGeom>
-          <a:noFill/>
-        </p:spPr>
-        <p:txBody>
-          <a:bodyPr wrap="square" lIns="0" rIns="0" tIns="0" bIns="0" anchor="t">
-            <a:spAutoFit/>
-          </a:bodyPr>
-          <a:lstStyle/>
-          <a:p>
-            <a:pPr algn="l">
-              <a:lnSpc>
-                <a:spcPct val="120000"/>
-              </a:lnSpc>
-            </a:pPr>
-            <a:r>
-              <a:rPr sz="1600" b="0" i="1">
+            <a:off x="822960" y="5897880"/>
+            <a:ext cx="10515600" cy="365760"/>
+          </a:xfrm>
+          <a:prstGeom prst="rect">
+            <a:avLst/>
+          </a:prstGeom>
+          <a:noFill/>
+        </p:spPr>
+        <p:txBody>
+          <a:bodyPr wrap="square" lIns="0" rIns="0" tIns="0" bIns="0" anchor="t">
+            <a:spAutoFit/>
+          </a:bodyPr>
+          <a:lstStyle/>
+          <a:p>
+            <a:pPr algn="l">
+              <a:lnSpc>
+                <a:spcPct val="120000"/>
+              </a:lnSpc>
+            </a:pPr>
+            <a:r>
+              <a:rPr sz="1700" b="0" i="1">
                 <a:solidFill>
                   <a:srgbClr val="D97757"/>
                 </a:solidFill>
@@ -10493,27 +10493,27 @@
         </p:nvSpPr>
         <p:spPr>
           <a:xfrm>
-            <a:off x="548640" y="6446520"/>
-            <a:ext cx="7315200" cy="274320"/>
-          </a:xfrm>
-          <a:prstGeom prst="rect">
-            <a:avLst/>
-          </a:prstGeom>
-          <a:noFill/>
-        </p:spPr>
-        <p:txBody>
-          <a:bodyPr wrap="square" lIns="0" rIns="0" tIns="0" bIns="0" anchor="t">
-            <a:spAutoFit/>
-          </a:bodyPr>
-          <a:lstStyle/>
-          <a:p>
-            <a:pPr algn="l">
-              <a:lnSpc>
-                <a:spcPct val="120000"/>
-              </a:lnSpc>
-            </a:pPr>
-            <a:r>
-              <a:rPr sz="1000" b="0" i="1">
+            <a:off x="548640" y="6355080"/>
+            <a:ext cx="7315200" cy="365760"/>
+          </a:xfrm>
+          <a:prstGeom prst="rect">
+            <a:avLst/>
+          </a:prstGeom>
+          <a:noFill/>
+        </p:spPr>
+        <p:txBody>
+          <a:bodyPr wrap="square" lIns="0" rIns="0" tIns="0" bIns="0" anchor="t">
+            <a:spAutoFit/>
+          </a:bodyPr>
+          <a:lstStyle/>
+          <a:p>
+            <a:pPr algn="l">
+              <a:lnSpc>
+                <a:spcPct val="120000"/>
+              </a:lnSpc>
+            </a:pPr>
+            <a:r>
+              <a:rPr sz="1300" b="0" i="1">
                 <a:solidFill>
                   <a:srgbClr val="5A6478"/>
                 </a:solidFill>
@@ -10532,8 +10532,8 @@
         </p:nvSpPr>
         <p:spPr>
           <a:xfrm>
-            <a:off x="7315200" y="6446520"/>
-            <a:ext cx="4389120" cy="274320"/>
+            <a:off x="6858000" y="6355080"/>
+            <a:ext cx="4846320" cy="365760"/>
           </a:xfrm>
           <a:prstGeom prst="rect">
             <a:avLst/>
@@ -10552,7 +10552,7 @@
               </a:lnSpc>
             </a:pPr>
             <a:r>
-              <a:rPr sz="900" b="1" i="0" spc="200">
+              <a:rPr sz="1200" b="1" i="0" spc="200">
                 <a:solidFill>
                   <a:srgbClr val="5A6478"/>
                 </a:solidFill>
@@ -10633,27 +10633,27 @@
         </p:nvSpPr>
         <p:spPr>
           <a:xfrm>
-            <a:off x="822960" y="548640"/>
-            <a:ext cx="3657600" cy="320040"/>
-          </a:xfrm>
-          <a:prstGeom prst="rect">
-            <a:avLst/>
-          </a:prstGeom>
-          <a:noFill/>
-        </p:spPr>
-        <p:txBody>
-          <a:bodyPr wrap="square" lIns="0" rIns="0" tIns="0" bIns="0" anchor="t">
-            <a:spAutoFit/>
-          </a:bodyPr>
-          <a:lstStyle/>
-          <a:p>
-            <a:pPr algn="l">
-              <a:lnSpc>
-                <a:spcPct val="120000"/>
-              </a:lnSpc>
-            </a:pPr>
-            <a:r>
-              <a:rPr sz="1100" b="1" i="0" spc="240">
+            <a:off x="822960" y="777240"/>
+            <a:ext cx="5486400" cy="457200"/>
+          </a:xfrm>
+          <a:prstGeom prst="rect">
+            <a:avLst/>
+          </a:prstGeom>
+          <a:noFill/>
+        </p:spPr>
+        <p:txBody>
+          <a:bodyPr wrap="square" lIns="0" rIns="0" tIns="0" bIns="0" anchor="t">
+            <a:spAutoFit/>
+          </a:bodyPr>
+          <a:lstStyle/>
+          <a:p>
+            <a:pPr algn="l">
+              <a:lnSpc>
+                <a:spcPct val="120000"/>
+              </a:lnSpc>
+            </a:pPr>
+            <a:r>
+              <a:rPr sz="1600" b="1" i="0" spc="220">
                 <a:solidFill>
                   <a:srgbClr val="D97757"/>
                 </a:solidFill>
@@ -10672,7 +10672,7 @@
         </p:nvSpPr>
         <p:spPr>
           <a:xfrm>
-            <a:off x="822960" y="1005840"/>
+            <a:off x="822960" y="1417320"/>
             <a:ext cx="548640" cy="548640"/>
           </a:xfrm>
           <a:prstGeom prst="rect">
@@ -10711,7 +10711,7 @@
         </p:nvSpPr>
         <p:spPr>
           <a:xfrm>
-            <a:off x="1417320" y="960120"/>
+            <a:off x="1417320" y="1371600"/>
             <a:ext cx="10058400" cy="1188720"/>
           </a:xfrm>
           <a:prstGeom prst="rect">
@@ -10750,7 +10750,7 @@
         </p:nvSpPr>
         <p:spPr>
           <a:xfrm>
-            <a:off x="822960" y="2286000"/>
+            <a:off x="822960" y="2697480"/>
             <a:ext cx="10515600" cy="548640"/>
           </a:xfrm>
           <a:prstGeom prst="rect">
@@ -10770,7 +10770,7 @@
               </a:lnSpc>
             </a:pPr>
             <a:r>
-              <a:rPr sz="2000" b="0" i="1">
+              <a:rPr sz="2200" b="0" i="1">
                 <a:solidFill>
                   <a:srgbClr val="0E2746"/>
                 </a:solidFill>
@@ -10789,7 +10789,7 @@
         </p:nvSpPr>
         <p:spPr>
           <a:xfrm>
-            <a:off x="822960" y="3246120"/>
+            <a:off x="822960" y="3714750"/>
             <a:ext cx="118872" cy="118872"/>
           </a:xfrm>
           <a:prstGeom prst="ellipse">
@@ -10833,7 +10833,7 @@
         </p:nvSpPr>
         <p:spPr>
           <a:xfrm>
-            <a:off x="1133856" y="3154680"/>
+            <a:off x="1133856" y="3611880"/>
             <a:ext cx="10058400" cy="502920"/>
           </a:xfrm>
           <a:prstGeom prst="rect">
@@ -10853,7 +10853,7 @@
               </a:lnSpc>
             </a:pPr>
             <a:r>
-              <a:rPr sz="1600" b="0" i="0">
+              <a:rPr sz="1800" b="0" i="0">
                 <a:solidFill>
                   <a:srgbClr val="0E2746"/>
                 </a:solidFill>
@@ -10872,7 +10872,7 @@
         </p:nvSpPr>
         <p:spPr>
           <a:xfrm>
-            <a:off x="822960" y="3703320"/>
+            <a:off x="822960" y="4171950"/>
             <a:ext cx="118872" cy="118872"/>
           </a:xfrm>
           <a:prstGeom prst="ellipse">
@@ -10916,7 +10916,7 @@
         </p:nvSpPr>
         <p:spPr>
           <a:xfrm>
-            <a:off x="1133856" y="3611880"/>
+            <a:off x="1133856" y="4069080"/>
             <a:ext cx="10058400" cy="502920"/>
           </a:xfrm>
           <a:prstGeom prst="rect">
@@ -10936,7 +10936,7 @@
               </a:lnSpc>
             </a:pPr>
             <a:r>
-              <a:rPr sz="1600" b="0" i="0">
+              <a:rPr sz="1800" b="0" i="0">
                 <a:solidFill>
                   <a:srgbClr val="0E2746"/>
                 </a:solidFill>
@@ -10955,7 +10955,7 @@
         </p:nvSpPr>
         <p:spPr>
           <a:xfrm>
-            <a:off x="822960" y="4160520"/>
+            <a:off x="822960" y="4629150"/>
             <a:ext cx="118872" cy="118872"/>
           </a:xfrm>
           <a:prstGeom prst="ellipse">
@@ -10999,7 +10999,7 @@
         </p:nvSpPr>
         <p:spPr>
           <a:xfrm>
-            <a:off x="1133856" y="4069080"/>
+            <a:off x="1133856" y="4526280"/>
             <a:ext cx="10058400" cy="502920"/>
           </a:xfrm>
           <a:prstGeom prst="rect">
@@ -11019,7 +11019,7 @@
               </a:lnSpc>
             </a:pPr>
             <a:r>
-              <a:rPr sz="1600" b="0" i="0">
+              <a:rPr sz="1800" b="0" i="0">
                 <a:solidFill>
                   <a:srgbClr val="0E2746"/>
                 </a:solidFill>
@@ -11038,7 +11038,7 @@
         </p:nvSpPr>
         <p:spPr>
           <a:xfrm>
-            <a:off x="6400800" y="3246120"/>
+            <a:off x="6400800" y="3714750"/>
             <a:ext cx="118872" cy="118872"/>
           </a:xfrm>
           <a:prstGeom prst="ellipse">
@@ -11082,7 +11082,7 @@
         </p:nvSpPr>
         <p:spPr>
           <a:xfrm>
-            <a:off x="6711696" y="3154680"/>
+            <a:off x="6711696" y="3611880"/>
             <a:ext cx="10058400" cy="502920"/>
           </a:xfrm>
           <a:prstGeom prst="rect">
@@ -11102,7 +11102,7 @@
               </a:lnSpc>
             </a:pPr>
             <a:r>
-              <a:rPr sz="1600" b="0" i="0">
+              <a:rPr sz="1800" b="0" i="0">
                 <a:solidFill>
                   <a:srgbClr val="0E2746"/>
                 </a:solidFill>
@@ -11121,7 +11121,7 @@
         </p:nvSpPr>
         <p:spPr>
           <a:xfrm>
-            <a:off x="6400800" y="3703320"/>
+            <a:off x="6400800" y="4171950"/>
             <a:ext cx="118872" cy="118872"/>
           </a:xfrm>
           <a:prstGeom prst="ellipse">
@@ -11165,7 +11165,7 @@
         </p:nvSpPr>
         <p:spPr>
           <a:xfrm>
-            <a:off x="6711696" y="3611880"/>
+            <a:off x="6711696" y="4069080"/>
             <a:ext cx="10058400" cy="502920"/>
           </a:xfrm>
           <a:prstGeom prst="rect">
@@ -11185,7 +11185,7 @@
               </a:lnSpc>
             </a:pPr>
             <a:r>
-              <a:rPr sz="1600" b="0" i="0">
+              <a:rPr sz="1800" b="0" i="0">
                 <a:solidFill>
                   <a:srgbClr val="0E2746"/>
                 </a:solidFill>
@@ -11204,27 +11204,27 @@
         </p:nvSpPr>
         <p:spPr>
           <a:xfrm>
-            <a:off x="822960" y="5760720"/>
-            <a:ext cx="10515600" cy="457200"/>
-          </a:xfrm>
-          <a:prstGeom prst="rect">
-            <a:avLst/>
-          </a:prstGeom>
-          <a:noFill/>
-        </p:spPr>
-        <p:txBody>
-          <a:bodyPr wrap="square" lIns="0" rIns="0" tIns="0" bIns="0" anchor="t">
-            <a:spAutoFit/>
-          </a:bodyPr>
-          <a:lstStyle/>
-          <a:p>
-            <a:pPr algn="l">
-              <a:lnSpc>
-                <a:spcPct val="120000"/>
-              </a:lnSpc>
-            </a:pPr>
-            <a:r>
-              <a:rPr sz="1600" b="0" i="1">
+            <a:off x="822960" y="5897880"/>
+            <a:ext cx="10515600" cy="365760"/>
+          </a:xfrm>
+          <a:prstGeom prst="rect">
+            <a:avLst/>
+          </a:prstGeom>
+          <a:noFill/>
+        </p:spPr>
+        <p:txBody>
+          <a:bodyPr wrap="square" lIns="0" rIns="0" tIns="0" bIns="0" anchor="t">
+            <a:spAutoFit/>
+          </a:bodyPr>
+          <a:lstStyle/>
+          <a:p>
+            <a:pPr algn="l">
+              <a:lnSpc>
+                <a:spcPct val="120000"/>
+              </a:lnSpc>
+            </a:pPr>
+            <a:r>
+              <a:rPr sz="1700" b="0" i="1">
                 <a:solidFill>
                   <a:srgbClr val="D97757"/>
                 </a:solidFill>
@@ -11243,27 +11243,27 @@
         </p:nvSpPr>
         <p:spPr>
           <a:xfrm>
-            <a:off x="548640" y="6446520"/>
-            <a:ext cx="7315200" cy="274320"/>
-          </a:xfrm>
-          <a:prstGeom prst="rect">
-            <a:avLst/>
-          </a:prstGeom>
-          <a:noFill/>
-        </p:spPr>
-        <p:txBody>
-          <a:bodyPr wrap="square" lIns="0" rIns="0" tIns="0" bIns="0" anchor="t">
-            <a:spAutoFit/>
-          </a:bodyPr>
-          <a:lstStyle/>
-          <a:p>
-            <a:pPr algn="l">
-              <a:lnSpc>
-                <a:spcPct val="120000"/>
-              </a:lnSpc>
-            </a:pPr>
-            <a:r>
-              <a:rPr sz="1000" b="0" i="1">
+            <a:off x="548640" y="6355080"/>
+            <a:ext cx="7315200" cy="365760"/>
+          </a:xfrm>
+          <a:prstGeom prst="rect">
+            <a:avLst/>
+          </a:prstGeom>
+          <a:noFill/>
+        </p:spPr>
+        <p:txBody>
+          <a:bodyPr wrap="square" lIns="0" rIns="0" tIns="0" bIns="0" anchor="t">
+            <a:spAutoFit/>
+          </a:bodyPr>
+          <a:lstStyle/>
+          <a:p>
+            <a:pPr algn="l">
+              <a:lnSpc>
+                <a:spcPct val="120000"/>
+              </a:lnSpc>
+            </a:pPr>
+            <a:r>
+              <a:rPr sz="1300" b="0" i="1">
                 <a:solidFill>
                   <a:srgbClr val="5A6478"/>
                 </a:solidFill>
@@ -11282,8 +11282,8 @@
         </p:nvSpPr>
         <p:spPr>
           <a:xfrm>
-            <a:off x="7315200" y="6446520"/>
-            <a:ext cx="4389120" cy="274320"/>
+            <a:off x="6858000" y="6355080"/>
+            <a:ext cx="4846320" cy="365760"/>
           </a:xfrm>
           <a:prstGeom prst="rect">
             <a:avLst/>
@@ -11302,7 +11302,7 @@
               </a:lnSpc>
             </a:pPr>
             <a:r>
-              <a:rPr sz="900" b="1" i="0" spc="200">
+              <a:rPr sz="1200" b="1" i="0" spc="200">
                 <a:solidFill>
                   <a:srgbClr val="5A6478"/>
                 </a:solidFill>
@@ -11383,27 +11383,27 @@
         </p:nvSpPr>
         <p:spPr>
           <a:xfrm>
-            <a:off x="822960" y="548640"/>
-            <a:ext cx="3657600" cy="320040"/>
-          </a:xfrm>
-          <a:prstGeom prst="rect">
-            <a:avLst/>
-          </a:prstGeom>
-          <a:noFill/>
-        </p:spPr>
-        <p:txBody>
-          <a:bodyPr wrap="square" lIns="0" rIns="0" tIns="0" bIns="0" anchor="t">
-            <a:spAutoFit/>
-          </a:bodyPr>
-          <a:lstStyle/>
-          <a:p>
-            <a:pPr algn="l">
-              <a:lnSpc>
-                <a:spcPct val="120000"/>
-              </a:lnSpc>
-            </a:pPr>
-            <a:r>
-              <a:rPr sz="1100" b="1" i="0" spc="240">
+            <a:off x="822960" y="777240"/>
+            <a:ext cx="5486400" cy="457200"/>
+          </a:xfrm>
+          <a:prstGeom prst="rect">
+            <a:avLst/>
+          </a:prstGeom>
+          <a:noFill/>
+        </p:spPr>
+        <p:txBody>
+          <a:bodyPr wrap="square" lIns="0" rIns="0" tIns="0" bIns="0" anchor="t">
+            <a:spAutoFit/>
+          </a:bodyPr>
+          <a:lstStyle/>
+          <a:p>
+            <a:pPr algn="l">
+              <a:lnSpc>
+                <a:spcPct val="120000"/>
+              </a:lnSpc>
+            </a:pPr>
+            <a:r>
+              <a:rPr sz="1600" b="1" i="0" spc="220">
                 <a:solidFill>
                   <a:srgbClr val="D97757"/>
                 </a:solidFill>
@@ -11422,7 +11422,7 @@
         </p:nvSpPr>
         <p:spPr>
           <a:xfrm>
-            <a:off x="822960" y="1005840"/>
+            <a:off x="822960" y="1417320"/>
             <a:ext cx="548640" cy="548640"/>
           </a:xfrm>
           <a:prstGeom prst="rect">
@@ -11461,7 +11461,7 @@
         </p:nvSpPr>
         <p:spPr>
           <a:xfrm>
-            <a:off x="1417320" y="960120"/>
+            <a:off x="1417320" y="1371600"/>
             <a:ext cx="10058400" cy="1188720"/>
           </a:xfrm>
           <a:prstGeom prst="rect">
@@ -11500,7 +11500,7 @@
         </p:nvSpPr>
         <p:spPr>
           <a:xfrm>
-            <a:off x="822960" y="2286000"/>
+            <a:off x="822960" y="2697480"/>
             <a:ext cx="10515600" cy="548640"/>
           </a:xfrm>
           <a:prstGeom prst="rect">
@@ -11520,7 +11520,7 @@
               </a:lnSpc>
             </a:pPr>
             <a:r>
-              <a:rPr sz="2000" b="0" i="1">
+              <a:rPr sz="2200" b="0" i="1">
                 <a:solidFill>
                   <a:srgbClr val="0E2746"/>
                 </a:solidFill>
@@ -11539,7 +11539,7 @@
         </p:nvSpPr>
         <p:spPr>
           <a:xfrm>
-            <a:off x="822960" y="3246120"/>
+            <a:off x="822960" y="3714750"/>
             <a:ext cx="118872" cy="118872"/>
           </a:xfrm>
           <a:prstGeom prst="ellipse">
@@ -11583,7 +11583,7 @@
         </p:nvSpPr>
         <p:spPr>
           <a:xfrm>
-            <a:off x="1133856" y="3154680"/>
+            <a:off x="1133856" y="3611880"/>
             <a:ext cx="10058400" cy="502920"/>
           </a:xfrm>
           <a:prstGeom prst="rect">
@@ -11603,7 +11603,7 @@
               </a:lnSpc>
             </a:pPr>
             <a:r>
-              <a:rPr sz="1600" b="0" i="0">
+              <a:rPr sz="1800" b="0" i="0">
                 <a:solidFill>
                   <a:srgbClr val="0E2746"/>
                 </a:solidFill>
@@ -11622,7 +11622,7 @@
         </p:nvSpPr>
         <p:spPr>
           <a:xfrm>
-            <a:off x="822960" y="3703320"/>
+            <a:off x="822960" y="4171950"/>
             <a:ext cx="118872" cy="118872"/>
           </a:xfrm>
           <a:prstGeom prst="ellipse">
@@ -11666,7 +11666,7 @@
         </p:nvSpPr>
         <p:spPr>
           <a:xfrm>
-            <a:off x="1133856" y="3611880"/>
+            <a:off x="1133856" y="4069080"/>
             <a:ext cx="10058400" cy="502920"/>
           </a:xfrm>
           <a:prstGeom prst="rect">
@@ -11686,7 +11686,7 @@
               </a:lnSpc>
             </a:pPr>
             <a:r>
-              <a:rPr sz="1600" b="0" i="0">
+              <a:rPr sz="1800" b="0" i="0">
                 <a:solidFill>
                   <a:srgbClr val="0E2746"/>
                 </a:solidFill>
@@ -11705,7 +11705,7 @@
         </p:nvSpPr>
         <p:spPr>
           <a:xfrm>
-            <a:off x="6400800" y="3246120"/>
+            <a:off x="6400800" y="3714750"/>
             <a:ext cx="118872" cy="118872"/>
           </a:xfrm>
           <a:prstGeom prst="ellipse">
@@ -11749,7 +11749,7 @@
         </p:nvSpPr>
         <p:spPr>
           <a:xfrm>
-            <a:off x="6711696" y="3154680"/>
+            <a:off x="6711696" y="3611880"/>
             <a:ext cx="10058400" cy="502920"/>
           </a:xfrm>
           <a:prstGeom prst="rect">
@@ -11769,7 +11769,7 @@
               </a:lnSpc>
             </a:pPr>
             <a:r>
-              <a:rPr sz="1600" b="0" i="0">
+              <a:rPr sz="1800" b="0" i="0">
                 <a:solidFill>
                   <a:srgbClr val="0E2746"/>
                 </a:solidFill>
@@ -11788,7 +11788,7 @@
         </p:nvSpPr>
         <p:spPr>
           <a:xfrm>
-            <a:off x="6400800" y="3703320"/>
+            <a:off x="6400800" y="4171950"/>
             <a:ext cx="118872" cy="118872"/>
           </a:xfrm>
           <a:prstGeom prst="ellipse">
@@ -11832,7 +11832,7 @@
         </p:nvSpPr>
         <p:spPr>
           <a:xfrm>
-            <a:off x="6711696" y="3611880"/>
+            <a:off x="6711696" y="4069080"/>
             <a:ext cx="10058400" cy="502920"/>
           </a:xfrm>
           <a:prstGeom prst="rect">
@@ -11852,7 +11852,7 @@
               </a:lnSpc>
             </a:pPr>
             <a:r>
-              <a:rPr sz="1600" b="0" i="0">
+              <a:rPr sz="1800" b="0" i="0">
                 <a:solidFill>
                   <a:srgbClr val="0E2746"/>
                 </a:solidFill>
@@ -11871,27 +11871,27 @@
         </p:nvSpPr>
         <p:spPr>
           <a:xfrm>
-            <a:off x="822960" y="5760720"/>
-            <a:ext cx="10515600" cy="457200"/>
-          </a:xfrm>
-          <a:prstGeom prst="rect">
-            <a:avLst/>
-          </a:prstGeom>
-          <a:noFill/>
-        </p:spPr>
-        <p:txBody>
-          <a:bodyPr wrap="square" lIns="0" rIns="0" tIns="0" bIns="0" anchor="t">
-            <a:spAutoFit/>
-          </a:bodyPr>
-          <a:lstStyle/>
-          <a:p>
-            <a:pPr algn="l">
-              <a:lnSpc>
-                <a:spcPct val="120000"/>
-              </a:lnSpc>
-            </a:pPr>
-            <a:r>
-              <a:rPr sz="1600" b="0" i="1">
+            <a:off x="822960" y="5897880"/>
+            <a:ext cx="10515600" cy="365760"/>
+          </a:xfrm>
+          <a:prstGeom prst="rect">
+            <a:avLst/>
+          </a:prstGeom>
+          <a:noFill/>
+        </p:spPr>
+        <p:txBody>
+          <a:bodyPr wrap="square" lIns="0" rIns="0" tIns="0" bIns="0" anchor="t">
+            <a:spAutoFit/>
+          </a:bodyPr>
+          <a:lstStyle/>
+          <a:p>
+            <a:pPr algn="l">
+              <a:lnSpc>
+                <a:spcPct val="120000"/>
+              </a:lnSpc>
+            </a:pPr>
+            <a:r>
+              <a:rPr sz="1700" b="0" i="1">
                 <a:solidFill>
                   <a:srgbClr val="D97757"/>
                 </a:solidFill>
@@ -11910,27 +11910,27 @@
         </p:nvSpPr>
         <p:spPr>
           <a:xfrm>
-            <a:off x="548640" y="6446520"/>
-            <a:ext cx="7315200" cy="274320"/>
-          </a:xfrm>
-          <a:prstGeom prst="rect">
-            <a:avLst/>
-          </a:prstGeom>
-          <a:noFill/>
-        </p:spPr>
-        <p:txBody>
-          <a:bodyPr wrap="square" lIns="0" rIns="0" tIns="0" bIns="0" anchor="t">
-            <a:spAutoFit/>
-          </a:bodyPr>
-          <a:lstStyle/>
-          <a:p>
-            <a:pPr algn="l">
-              <a:lnSpc>
-                <a:spcPct val="120000"/>
-              </a:lnSpc>
-            </a:pPr>
-            <a:r>
-              <a:rPr sz="1000" b="0" i="1">
+            <a:off x="548640" y="6355080"/>
+            <a:ext cx="7315200" cy="365760"/>
+          </a:xfrm>
+          <a:prstGeom prst="rect">
+            <a:avLst/>
+          </a:prstGeom>
+          <a:noFill/>
+        </p:spPr>
+        <p:txBody>
+          <a:bodyPr wrap="square" lIns="0" rIns="0" tIns="0" bIns="0" anchor="t">
+            <a:spAutoFit/>
+          </a:bodyPr>
+          <a:lstStyle/>
+          <a:p>
+            <a:pPr algn="l">
+              <a:lnSpc>
+                <a:spcPct val="120000"/>
+              </a:lnSpc>
+            </a:pPr>
+            <a:r>
+              <a:rPr sz="1300" b="0" i="1">
                 <a:solidFill>
                   <a:srgbClr val="5A6478"/>
                 </a:solidFill>
@@ -11949,8 +11949,8 @@
         </p:nvSpPr>
         <p:spPr>
           <a:xfrm>
-            <a:off x="7315200" y="6446520"/>
-            <a:ext cx="4389120" cy="274320"/>
+            <a:off x="6858000" y="6355080"/>
+            <a:ext cx="4846320" cy="365760"/>
           </a:xfrm>
           <a:prstGeom prst="rect">
             <a:avLst/>
@@ -11969,7 +11969,7 @@
               </a:lnSpc>
             </a:pPr>
             <a:r>
-              <a:rPr sz="900" b="1" i="0" spc="200">
+              <a:rPr sz="1200" b="1" i="0" spc="200">
                 <a:solidFill>
                   <a:srgbClr val="5A6478"/>
                 </a:solidFill>
@@ -12050,27 +12050,27 @@
         </p:nvSpPr>
         <p:spPr>
           <a:xfrm>
-            <a:off x="822960" y="548640"/>
-            <a:ext cx="3657600" cy="320040"/>
-          </a:xfrm>
-          <a:prstGeom prst="rect">
-            <a:avLst/>
-          </a:prstGeom>
-          <a:noFill/>
-        </p:spPr>
-        <p:txBody>
-          <a:bodyPr wrap="square" lIns="0" rIns="0" tIns="0" bIns="0" anchor="t">
-            <a:spAutoFit/>
-          </a:bodyPr>
-          <a:lstStyle/>
-          <a:p>
-            <a:pPr algn="l">
-              <a:lnSpc>
-                <a:spcPct val="120000"/>
-              </a:lnSpc>
-            </a:pPr>
-            <a:r>
-              <a:rPr sz="1100" b="1" i="0" spc="240">
+            <a:off x="822960" y="777240"/>
+            <a:ext cx="5486400" cy="457200"/>
+          </a:xfrm>
+          <a:prstGeom prst="rect">
+            <a:avLst/>
+          </a:prstGeom>
+          <a:noFill/>
+        </p:spPr>
+        <p:txBody>
+          <a:bodyPr wrap="square" lIns="0" rIns="0" tIns="0" bIns="0" anchor="t">
+            <a:spAutoFit/>
+          </a:bodyPr>
+          <a:lstStyle/>
+          <a:p>
+            <a:pPr algn="l">
+              <a:lnSpc>
+                <a:spcPct val="120000"/>
+              </a:lnSpc>
+            </a:pPr>
+            <a:r>
+              <a:rPr sz="1600" b="1" i="0" spc="220">
                 <a:solidFill>
                   <a:srgbClr val="D97757"/>
                 </a:solidFill>
@@ -12089,7 +12089,7 @@
         </p:nvSpPr>
         <p:spPr>
           <a:xfrm>
-            <a:off x="822960" y="1005840"/>
+            <a:off x="822960" y="1417320"/>
             <a:ext cx="548640" cy="548640"/>
           </a:xfrm>
           <a:prstGeom prst="rect">
@@ -12128,7 +12128,7 @@
         </p:nvSpPr>
         <p:spPr>
           <a:xfrm>
-            <a:off x="1417320" y="960120"/>
+            <a:off x="1417320" y="1371600"/>
             <a:ext cx="10058400" cy="1188720"/>
           </a:xfrm>
           <a:prstGeom prst="rect">
@@ -12167,7 +12167,7 @@
         </p:nvSpPr>
         <p:spPr>
           <a:xfrm>
-            <a:off x="822960" y="2286000"/>
+            <a:off x="822960" y="2697480"/>
             <a:ext cx="10515600" cy="548640"/>
           </a:xfrm>
           <a:prstGeom prst="rect">
@@ -12187,7 +12187,7 @@
               </a:lnSpc>
             </a:pPr>
             <a:r>
-              <a:rPr sz="2000" b="0" i="1">
+              <a:rPr sz="2200" b="0" i="1">
                 <a:solidFill>
                   <a:srgbClr val="0E2746"/>
                 </a:solidFill>
@@ -12206,7 +12206,7 @@
         </p:nvSpPr>
         <p:spPr>
           <a:xfrm>
-            <a:off x="822960" y="3246120"/>
+            <a:off x="822960" y="3714750"/>
             <a:ext cx="118872" cy="118872"/>
           </a:xfrm>
           <a:prstGeom prst="ellipse">
@@ -12250,7 +12250,7 @@
         </p:nvSpPr>
         <p:spPr>
           <a:xfrm>
-            <a:off x="1133856" y="3154680"/>
+            <a:off x="1133856" y="3611880"/>
             <a:ext cx="10058400" cy="502920"/>
           </a:xfrm>
           <a:prstGeom prst="rect">
@@ -12270,7 +12270,7 @@
               </a:lnSpc>
             </a:pPr>
             <a:r>
-              <a:rPr sz="1600" b="0" i="0">
+              <a:rPr sz="1800" b="0" i="0">
                 <a:solidFill>
                   <a:srgbClr val="0E2746"/>
                 </a:solidFill>
@@ -12289,7 +12289,7 @@
         </p:nvSpPr>
         <p:spPr>
           <a:xfrm>
-            <a:off x="822960" y="3703320"/>
+            <a:off x="822960" y="4171950"/>
             <a:ext cx="118872" cy="118872"/>
           </a:xfrm>
           <a:prstGeom prst="ellipse">
@@ -12333,7 +12333,7 @@
         </p:nvSpPr>
         <p:spPr>
           <a:xfrm>
-            <a:off x="1133856" y="3611880"/>
+            <a:off x="1133856" y="4069080"/>
             <a:ext cx="10058400" cy="502920"/>
           </a:xfrm>
           <a:prstGeom prst="rect">
@@ -12353,7 +12353,7 @@
               </a:lnSpc>
             </a:pPr>
             <a:r>
-              <a:rPr sz="1600" b="0" i="0">
+              <a:rPr sz="1800" b="0" i="0">
                 <a:solidFill>
                   <a:srgbClr val="0E2746"/>
                 </a:solidFill>
@@ -12372,7 +12372,7 @@
         </p:nvSpPr>
         <p:spPr>
           <a:xfrm>
-            <a:off x="6400800" y="3246120"/>
+            <a:off x="6400800" y="3714750"/>
             <a:ext cx="118872" cy="118872"/>
           </a:xfrm>
           <a:prstGeom prst="ellipse">
@@ -12416,7 +12416,7 @@
         </p:nvSpPr>
         <p:spPr>
           <a:xfrm>
-            <a:off x="6711696" y="3154680"/>
+            <a:off x="6711696" y="3611880"/>
             <a:ext cx="10058400" cy="502920"/>
           </a:xfrm>
           <a:prstGeom prst="rect">
@@ -12436,7 +12436,7 @@
               </a:lnSpc>
             </a:pPr>
             <a:r>
-              <a:rPr sz="1600" b="0" i="0">
+              <a:rPr sz="1800" b="0" i="0">
                 <a:solidFill>
                   <a:srgbClr val="0E2746"/>
                 </a:solidFill>
@@ -12455,27 +12455,27 @@
         </p:nvSpPr>
         <p:spPr>
           <a:xfrm>
-            <a:off x="822960" y="5760720"/>
-            <a:ext cx="10515600" cy="457200"/>
-          </a:xfrm>
-          <a:prstGeom prst="rect">
-            <a:avLst/>
-          </a:prstGeom>
-          <a:noFill/>
-        </p:spPr>
-        <p:txBody>
-          <a:bodyPr wrap="square" lIns="0" rIns="0" tIns="0" bIns="0" anchor="t">
-            <a:spAutoFit/>
-          </a:bodyPr>
-          <a:lstStyle/>
-          <a:p>
-            <a:pPr algn="l">
-              <a:lnSpc>
-                <a:spcPct val="120000"/>
-              </a:lnSpc>
-            </a:pPr>
-            <a:r>
-              <a:rPr sz="1600" b="0" i="1">
+            <a:off x="822960" y="5897880"/>
+            <a:ext cx="10515600" cy="365760"/>
+          </a:xfrm>
+          <a:prstGeom prst="rect">
+            <a:avLst/>
+          </a:prstGeom>
+          <a:noFill/>
+        </p:spPr>
+        <p:txBody>
+          <a:bodyPr wrap="square" lIns="0" rIns="0" tIns="0" bIns="0" anchor="t">
+            <a:spAutoFit/>
+          </a:bodyPr>
+          <a:lstStyle/>
+          <a:p>
+            <a:pPr algn="l">
+              <a:lnSpc>
+                <a:spcPct val="120000"/>
+              </a:lnSpc>
+            </a:pPr>
+            <a:r>
+              <a:rPr sz="1700" b="0" i="1">
                 <a:solidFill>
                   <a:srgbClr val="D97757"/>
                 </a:solidFill>
@@ -12494,27 +12494,27 @@
         </p:nvSpPr>
         <p:spPr>
           <a:xfrm>
-            <a:off x="548640" y="6446520"/>
-            <a:ext cx="7315200" cy="274320"/>
-          </a:xfrm>
-          <a:prstGeom prst="rect">
-            <a:avLst/>
-          </a:prstGeom>
-          <a:noFill/>
-        </p:spPr>
-        <p:txBody>
-          <a:bodyPr wrap="square" lIns="0" rIns="0" tIns="0" bIns="0" anchor="t">
-            <a:spAutoFit/>
-          </a:bodyPr>
-          <a:lstStyle/>
-          <a:p>
-            <a:pPr algn="l">
-              <a:lnSpc>
-                <a:spcPct val="120000"/>
-              </a:lnSpc>
-            </a:pPr>
-            <a:r>
-              <a:rPr sz="1000" b="0" i="1">
+            <a:off x="548640" y="6355080"/>
+            <a:ext cx="7315200" cy="365760"/>
+          </a:xfrm>
+          <a:prstGeom prst="rect">
+            <a:avLst/>
+          </a:prstGeom>
+          <a:noFill/>
+        </p:spPr>
+        <p:txBody>
+          <a:bodyPr wrap="square" lIns="0" rIns="0" tIns="0" bIns="0" anchor="t">
+            <a:spAutoFit/>
+          </a:bodyPr>
+          <a:lstStyle/>
+          <a:p>
+            <a:pPr algn="l">
+              <a:lnSpc>
+                <a:spcPct val="120000"/>
+              </a:lnSpc>
+            </a:pPr>
+            <a:r>
+              <a:rPr sz="1300" b="0" i="1">
                 <a:solidFill>
                   <a:srgbClr val="5A6478"/>
                 </a:solidFill>
@@ -12533,8 +12533,8 @@
         </p:nvSpPr>
         <p:spPr>
           <a:xfrm>
-            <a:off x="7315200" y="6446520"/>
-            <a:ext cx="4389120" cy="274320"/>
+            <a:off x="6858000" y="6355080"/>
+            <a:ext cx="4846320" cy="365760"/>
           </a:xfrm>
           <a:prstGeom prst="rect">
             <a:avLst/>
@@ -12553,7 +12553,7 @@
               </a:lnSpc>
             </a:pPr>
             <a:r>
-              <a:rPr sz="900" b="1" i="0" spc="200">
+              <a:rPr sz="1200" b="1" i="0" spc="200">
                 <a:solidFill>
                   <a:srgbClr val="5A6478"/>
                 </a:solidFill>
@@ -12634,27 +12634,27 @@
         </p:nvSpPr>
         <p:spPr>
           <a:xfrm>
-            <a:off x="822960" y="548640"/>
-            <a:ext cx="3657600" cy="320040"/>
-          </a:xfrm>
-          <a:prstGeom prst="rect">
-            <a:avLst/>
-          </a:prstGeom>
-          <a:noFill/>
-        </p:spPr>
-        <p:txBody>
-          <a:bodyPr wrap="square" lIns="0" rIns="0" tIns="0" bIns="0" anchor="t">
-            <a:spAutoFit/>
-          </a:bodyPr>
-          <a:lstStyle/>
-          <a:p>
-            <a:pPr algn="l">
-              <a:lnSpc>
-                <a:spcPct val="120000"/>
-              </a:lnSpc>
-            </a:pPr>
-            <a:r>
-              <a:rPr sz="1100" b="1" i="0" spc="240">
+            <a:off x="822960" y="777240"/>
+            <a:ext cx="5486400" cy="457200"/>
+          </a:xfrm>
+          <a:prstGeom prst="rect">
+            <a:avLst/>
+          </a:prstGeom>
+          <a:noFill/>
+        </p:spPr>
+        <p:txBody>
+          <a:bodyPr wrap="square" lIns="0" rIns="0" tIns="0" bIns="0" anchor="t">
+            <a:spAutoFit/>
+          </a:bodyPr>
+          <a:lstStyle/>
+          <a:p>
+            <a:pPr algn="l">
+              <a:lnSpc>
+                <a:spcPct val="120000"/>
+              </a:lnSpc>
+            </a:pPr>
+            <a:r>
+              <a:rPr sz="1600" b="1" i="0" spc="220">
                 <a:solidFill>
                   <a:srgbClr val="D97757"/>
                 </a:solidFill>
@@ -12673,7 +12673,7 @@
         </p:nvSpPr>
         <p:spPr>
           <a:xfrm>
-            <a:off x="822960" y="1005840"/>
+            <a:off x="822960" y="1417320"/>
             <a:ext cx="548640" cy="548640"/>
           </a:xfrm>
           <a:prstGeom prst="rect">
@@ -12712,7 +12712,7 @@
         </p:nvSpPr>
         <p:spPr>
           <a:xfrm>
-            <a:off x="1417320" y="960120"/>
+            <a:off x="1417320" y="1371600"/>
             <a:ext cx="10058400" cy="1188720"/>
           </a:xfrm>
           <a:prstGeom prst="rect">
@@ -12751,7 +12751,7 @@
         </p:nvSpPr>
         <p:spPr>
           <a:xfrm>
-            <a:off x="822960" y="2286000"/>
+            <a:off x="822960" y="2697480"/>
             <a:ext cx="10515600" cy="548640"/>
           </a:xfrm>
           <a:prstGeom prst="rect">
@@ -12771,7 +12771,7 @@
               </a:lnSpc>
             </a:pPr>
             <a:r>
-              <a:rPr sz="2000" b="0" i="1">
+              <a:rPr sz="2200" b="0" i="1">
                 <a:solidFill>
                   <a:srgbClr val="0E2746"/>
                 </a:solidFill>
@@ -12790,7 +12790,7 @@
         </p:nvSpPr>
         <p:spPr>
           <a:xfrm>
-            <a:off x="822960" y="3246120"/>
+            <a:off x="822960" y="3714750"/>
             <a:ext cx="118872" cy="118872"/>
           </a:xfrm>
           <a:prstGeom prst="ellipse">
@@ -12834,7 +12834,7 @@
         </p:nvSpPr>
         <p:spPr>
           <a:xfrm>
-            <a:off x="1133856" y="3154680"/>
+            <a:off x="1133856" y="3611880"/>
             <a:ext cx="10058400" cy="502920"/>
           </a:xfrm>
           <a:prstGeom prst="rect">
@@ -12854,7 +12854,7 @@
               </a:lnSpc>
             </a:pPr>
             <a:r>
-              <a:rPr sz="1600" b="0" i="0">
+              <a:rPr sz="1800" b="0" i="0">
                 <a:solidFill>
                   <a:srgbClr val="0E2746"/>
                 </a:solidFill>
@@ -12873,7 +12873,7 @@
         </p:nvSpPr>
         <p:spPr>
           <a:xfrm>
-            <a:off x="822960" y="3703320"/>
+            <a:off x="822960" y="4171950"/>
             <a:ext cx="118872" cy="118872"/>
           </a:xfrm>
           <a:prstGeom prst="ellipse">
@@ -12917,7 +12917,7 @@
         </p:nvSpPr>
         <p:spPr>
           <a:xfrm>
-            <a:off x="1133856" y="3611880"/>
+            <a:off x="1133856" y="4069080"/>
             <a:ext cx="10058400" cy="502920"/>
           </a:xfrm>
           <a:prstGeom prst="rect">
@@ -12937,7 +12937,7 @@
               </a:lnSpc>
             </a:pPr>
             <a:r>
-              <a:rPr sz="1600" b="0" i="0">
+              <a:rPr sz="1800" b="0" i="0">
                 <a:solidFill>
                   <a:srgbClr val="0E2746"/>
                 </a:solidFill>
@@ -12956,7 +12956,7 @@
         </p:nvSpPr>
         <p:spPr>
           <a:xfrm>
-            <a:off x="822960" y="4160520"/>
+            <a:off x="822960" y="4629150"/>
             <a:ext cx="118872" cy="118872"/>
           </a:xfrm>
           <a:prstGeom prst="ellipse">
@@ -13000,7 +13000,7 @@
         </p:nvSpPr>
         <p:spPr>
           <a:xfrm>
-            <a:off x="1133856" y="4069080"/>
+            <a:off x="1133856" y="4526280"/>
             <a:ext cx="10058400" cy="502920"/>
           </a:xfrm>
           <a:prstGeom prst="rect">
@@ -13020,7 +13020,7 @@
               </a:lnSpc>
             </a:pPr>
             <a:r>
-              <a:rPr sz="1600" b="0" i="0">
+              <a:rPr sz="1800" b="0" i="0">
                 <a:solidFill>
                   <a:srgbClr val="0E2746"/>
                 </a:solidFill>
@@ -13039,7 +13039,7 @@
         </p:nvSpPr>
         <p:spPr>
           <a:xfrm>
-            <a:off x="6400800" y="3246120"/>
+            <a:off x="6400800" y="3714750"/>
             <a:ext cx="118872" cy="118872"/>
           </a:xfrm>
           <a:prstGeom prst="ellipse">
@@ -13083,7 +13083,7 @@
         </p:nvSpPr>
         <p:spPr>
           <a:xfrm>
-            <a:off x="6711696" y="3154680"/>
+            <a:off x="6711696" y="3611880"/>
             <a:ext cx="10058400" cy="502920"/>
           </a:xfrm>
           <a:prstGeom prst="rect">
@@ -13103,7 +13103,7 @@
               </a:lnSpc>
             </a:pPr>
             <a:r>
-              <a:rPr sz="1600" b="0" i="0">
+              <a:rPr sz="1800" b="0" i="0">
                 <a:solidFill>
                   <a:srgbClr val="0E2746"/>
                 </a:solidFill>
@@ -13122,7 +13122,7 @@
         </p:nvSpPr>
         <p:spPr>
           <a:xfrm>
-            <a:off x="6400800" y="3703320"/>
+            <a:off x="6400800" y="4171950"/>
             <a:ext cx="118872" cy="118872"/>
           </a:xfrm>
           <a:prstGeom prst="ellipse">
@@ -13166,7 +13166,7 @@
         </p:nvSpPr>
         <p:spPr>
           <a:xfrm>
-            <a:off x="6711696" y="3611880"/>
+            <a:off x="6711696" y="4069080"/>
             <a:ext cx="10058400" cy="502920"/>
           </a:xfrm>
           <a:prstGeom prst="rect">
@@ -13186,7 +13186,7 @@
               </a:lnSpc>
             </a:pPr>
             <a:r>
-              <a:rPr sz="1600" b="0" i="0">
+              <a:rPr sz="1800" b="0" i="0">
                 <a:solidFill>
                   <a:srgbClr val="0E2746"/>
                 </a:solidFill>
@@ -13205,27 +13205,27 @@
         </p:nvSpPr>
         <p:spPr>
           <a:xfrm>
-            <a:off x="822960" y="5760720"/>
-            <a:ext cx="10515600" cy="457200"/>
-          </a:xfrm>
-          <a:prstGeom prst="rect">
-            <a:avLst/>
-          </a:prstGeom>
-          <a:noFill/>
-        </p:spPr>
-        <p:txBody>
-          <a:bodyPr wrap="square" lIns="0" rIns="0" tIns="0" bIns="0" anchor="t">
-            <a:spAutoFit/>
-          </a:bodyPr>
-          <a:lstStyle/>
-          <a:p>
-            <a:pPr algn="l">
-              <a:lnSpc>
-                <a:spcPct val="120000"/>
-              </a:lnSpc>
-            </a:pPr>
-            <a:r>
-              <a:rPr sz="1600" b="0" i="1">
+            <a:off x="822960" y="5897880"/>
+            <a:ext cx="10515600" cy="365760"/>
+          </a:xfrm>
+          <a:prstGeom prst="rect">
+            <a:avLst/>
+          </a:prstGeom>
+          <a:noFill/>
+        </p:spPr>
+        <p:txBody>
+          <a:bodyPr wrap="square" lIns="0" rIns="0" tIns="0" bIns="0" anchor="t">
+            <a:spAutoFit/>
+          </a:bodyPr>
+          <a:lstStyle/>
+          <a:p>
+            <a:pPr algn="l">
+              <a:lnSpc>
+                <a:spcPct val="120000"/>
+              </a:lnSpc>
+            </a:pPr>
+            <a:r>
+              <a:rPr sz="1700" b="0" i="1">
                 <a:solidFill>
                   <a:srgbClr val="D97757"/>
                 </a:solidFill>
@@ -13244,27 +13244,27 @@
         </p:nvSpPr>
         <p:spPr>
           <a:xfrm>
-            <a:off x="548640" y="6446520"/>
-            <a:ext cx="7315200" cy="274320"/>
-          </a:xfrm>
-          <a:prstGeom prst="rect">
-            <a:avLst/>
-          </a:prstGeom>
-          <a:noFill/>
-        </p:spPr>
-        <p:txBody>
-          <a:bodyPr wrap="square" lIns="0" rIns="0" tIns="0" bIns="0" anchor="t">
-            <a:spAutoFit/>
-          </a:bodyPr>
-          <a:lstStyle/>
-          <a:p>
-            <a:pPr algn="l">
-              <a:lnSpc>
-                <a:spcPct val="120000"/>
-              </a:lnSpc>
-            </a:pPr>
-            <a:r>
-              <a:rPr sz="1000" b="0" i="1">
+            <a:off x="548640" y="6355080"/>
+            <a:ext cx="7315200" cy="365760"/>
+          </a:xfrm>
+          <a:prstGeom prst="rect">
+            <a:avLst/>
+          </a:prstGeom>
+          <a:noFill/>
+        </p:spPr>
+        <p:txBody>
+          <a:bodyPr wrap="square" lIns="0" rIns="0" tIns="0" bIns="0" anchor="t">
+            <a:spAutoFit/>
+          </a:bodyPr>
+          <a:lstStyle/>
+          <a:p>
+            <a:pPr algn="l">
+              <a:lnSpc>
+                <a:spcPct val="120000"/>
+              </a:lnSpc>
+            </a:pPr>
+            <a:r>
+              <a:rPr sz="1300" b="0" i="1">
                 <a:solidFill>
                   <a:srgbClr val="5A6478"/>
                 </a:solidFill>
@@ -13283,8 +13283,8 @@
         </p:nvSpPr>
         <p:spPr>
           <a:xfrm>
-            <a:off x="7315200" y="6446520"/>
-            <a:ext cx="4389120" cy="274320"/>
+            <a:off x="6858000" y="6355080"/>
+            <a:ext cx="4846320" cy="365760"/>
           </a:xfrm>
           <a:prstGeom prst="rect">
             <a:avLst/>
@@ -13303,7 +13303,7 @@
               </a:lnSpc>
             </a:pPr>
             <a:r>
-              <a:rPr sz="900" b="1" i="0" spc="200">
+              <a:rPr sz="1200" b="1" i="0" spc="200">
                 <a:solidFill>
                   <a:srgbClr val="5A6478"/>
                 </a:solidFill>
@@ -13384,27 +13384,27 @@
         </p:nvSpPr>
         <p:spPr>
           <a:xfrm>
-            <a:off x="822960" y="548640"/>
-            <a:ext cx="3657600" cy="320040"/>
-          </a:xfrm>
-          <a:prstGeom prst="rect">
-            <a:avLst/>
-          </a:prstGeom>
-          <a:noFill/>
-        </p:spPr>
-        <p:txBody>
-          <a:bodyPr wrap="square" lIns="0" rIns="0" tIns="0" bIns="0" anchor="t">
-            <a:spAutoFit/>
-          </a:bodyPr>
-          <a:lstStyle/>
-          <a:p>
-            <a:pPr algn="l">
-              <a:lnSpc>
-                <a:spcPct val="120000"/>
-              </a:lnSpc>
-            </a:pPr>
-            <a:r>
-              <a:rPr sz="1100" b="1" i="0" spc="240">
+            <a:off x="822960" y="777240"/>
+            <a:ext cx="5486400" cy="457200"/>
+          </a:xfrm>
+          <a:prstGeom prst="rect">
+            <a:avLst/>
+          </a:prstGeom>
+          <a:noFill/>
+        </p:spPr>
+        <p:txBody>
+          <a:bodyPr wrap="square" lIns="0" rIns="0" tIns="0" bIns="0" anchor="t">
+            <a:spAutoFit/>
+          </a:bodyPr>
+          <a:lstStyle/>
+          <a:p>
+            <a:pPr algn="l">
+              <a:lnSpc>
+                <a:spcPct val="120000"/>
+              </a:lnSpc>
+            </a:pPr>
+            <a:r>
+              <a:rPr sz="1600" b="1" i="0" spc="220">
                 <a:solidFill>
                   <a:srgbClr val="D97757"/>
                 </a:solidFill>
@@ -13423,7 +13423,7 @@
         </p:nvSpPr>
         <p:spPr>
           <a:xfrm>
-            <a:off x="822960" y="1005840"/>
+            <a:off x="822960" y="1417320"/>
             <a:ext cx="548640" cy="548640"/>
           </a:xfrm>
           <a:prstGeom prst="rect">
@@ -13462,7 +13462,7 @@
         </p:nvSpPr>
         <p:spPr>
           <a:xfrm>
-            <a:off x="1417320" y="960120"/>
+            <a:off x="1417320" y="1371600"/>
             <a:ext cx="10058400" cy="1188720"/>
           </a:xfrm>
           <a:prstGeom prst="rect">
@@ -13501,7 +13501,7 @@
         </p:nvSpPr>
         <p:spPr>
           <a:xfrm>
-            <a:off x="822960" y="2286000"/>
+            <a:off x="822960" y="2697480"/>
             <a:ext cx="10515600" cy="548640"/>
           </a:xfrm>
           <a:prstGeom prst="rect">
@@ -13521,7 +13521,7 @@
               </a:lnSpc>
             </a:pPr>
             <a:r>
-              <a:rPr sz="2000" b="0" i="1">
+              <a:rPr sz="2200" b="0" i="1">
                 <a:solidFill>
                   <a:srgbClr val="0E2746"/>
                 </a:solidFill>
@@ -13540,7 +13540,7 @@
         </p:nvSpPr>
         <p:spPr>
           <a:xfrm>
-            <a:off x="822960" y="3246120"/>
+            <a:off x="822960" y="3714750"/>
             <a:ext cx="118872" cy="118872"/>
           </a:xfrm>
           <a:prstGeom prst="ellipse">
@@ -13584,7 +13584,7 @@
         </p:nvSpPr>
         <p:spPr>
           <a:xfrm>
-            <a:off x="1133856" y="3154680"/>
+            <a:off x="1133856" y="3611880"/>
             <a:ext cx="10058400" cy="502920"/>
           </a:xfrm>
           <a:prstGeom prst="rect">
@@ -13604,7 +13604,7 @@
               </a:lnSpc>
             </a:pPr>
             <a:r>
-              <a:rPr sz="1600" b="0" i="0">
+              <a:rPr sz="1800" b="0" i="0">
                 <a:solidFill>
                   <a:srgbClr val="0E2746"/>
                 </a:solidFill>
@@ -13623,7 +13623,7 @@
         </p:nvSpPr>
         <p:spPr>
           <a:xfrm>
-            <a:off x="822960" y="3703320"/>
+            <a:off x="822960" y="4171950"/>
             <a:ext cx="118872" cy="118872"/>
           </a:xfrm>
           <a:prstGeom prst="ellipse">
@@ -13667,7 +13667,7 @@
         </p:nvSpPr>
         <p:spPr>
           <a:xfrm>
-            <a:off x="1133856" y="3611880"/>
+            <a:off x="1133856" y="4069080"/>
             <a:ext cx="10058400" cy="502920"/>
           </a:xfrm>
           <a:prstGeom prst="rect">
@@ -13687,7 +13687,7 @@
               </a:lnSpc>
             </a:pPr>
             <a:r>
-              <a:rPr sz="1600" b="0" i="0">
+              <a:rPr sz="1800" b="0" i="0">
                 <a:solidFill>
                   <a:srgbClr val="0E2746"/>
                 </a:solidFill>
@@ -13706,7 +13706,7 @@
         </p:nvSpPr>
         <p:spPr>
           <a:xfrm>
-            <a:off x="6400800" y="3246120"/>
+            <a:off x="6400800" y="3714750"/>
             <a:ext cx="118872" cy="118872"/>
           </a:xfrm>
           <a:prstGeom prst="ellipse">
@@ -13750,7 +13750,7 @@
         </p:nvSpPr>
         <p:spPr>
           <a:xfrm>
-            <a:off x="6711696" y="3154680"/>
+            <a:off x="6711696" y="3611880"/>
             <a:ext cx="10058400" cy="502920"/>
           </a:xfrm>
           <a:prstGeom prst="rect">
@@ -13770,7 +13770,7 @@
               </a:lnSpc>
             </a:pPr>
             <a:r>
-              <a:rPr sz="1600" b="0" i="0">
+              <a:rPr sz="1800" b="0" i="0">
                 <a:solidFill>
                   <a:srgbClr val="0E2746"/>
                 </a:solidFill>
@@ -13789,7 +13789,7 @@
         </p:nvSpPr>
         <p:spPr>
           <a:xfrm>
-            <a:off x="6400800" y="3703320"/>
+            <a:off x="6400800" y="4171950"/>
             <a:ext cx="118872" cy="118872"/>
           </a:xfrm>
           <a:prstGeom prst="ellipse">
@@ -13833,7 +13833,7 @@
         </p:nvSpPr>
         <p:spPr>
           <a:xfrm>
-            <a:off x="6711696" y="3611880"/>
+            <a:off x="6711696" y="4069080"/>
             <a:ext cx="10058400" cy="502920"/>
           </a:xfrm>
           <a:prstGeom prst="rect">
@@ -13853,7 +13853,7 @@
               </a:lnSpc>
             </a:pPr>
             <a:r>
-              <a:rPr sz="1600" b="0" i="0">
+              <a:rPr sz="1800" b="0" i="0">
                 <a:solidFill>
                   <a:srgbClr val="0E2746"/>
                 </a:solidFill>
@@ -13872,27 +13872,27 @@
         </p:nvSpPr>
         <p:spPr>
           <a:xfrm>
-            <a:off x="822960" y="5760720"/>
-            <a:ext cx="10515600" cy="457200"/>
-          </a:xfrm>
-          <a:prstGeom prst="rect">
-            <a:avLst/>
-          </a:prstGeom>
-          <a:noFill/>
-        </p:spPr>
-        <p:txBody>
-          <a:bodyPr wrap="square" lIns="0" rIns="0" tIns="0" bIns="0" anchor="t">
-            <a:spAutoFit/>
-          </a:bodyPr>
-          <a:lstStyle/>
-          <a:p>
-            <a:pPr algn="l">
-              <a:lnSpc>
-                <a:spcPct val="120000"/>
-              </a:lnSpc>
-            </a:pPr>
-            <a:r>
-              <a:rPr sz="1600" b="0" i="1">
+            <a:off x="822960" y="5897880"/>
+            <a:ext cx="10515600" cy="365760"/>
+          </a:xfrm>
+          <a:prstGeom prst="rect">
+            <a:avLst/>
+          </a:prstGeom>
+          <a:noFill/>
+        </p:spPr>
+        <p:txBody>
+          <a:bodyPr wrap="square" lIns="0" rIns="0" tIns="0" bIns="0" anchor="t">
+            <a:spAutoFit/>
+          </a:bodyPr>
+          <a:lstStyle/>
+          <a:p>
+            <a:pPr algn="l">
+              <a:lnSpc>
+                <a:spcPct val="120000"/>
+              </a:lnSpc>
+            </a:pPr>
+            <a:r>
+              <a:rPr sz="1700" b="0" i="1">
                 <a:solidFill>
                   <a:srgbClr val="D97757"/>
                 </a:solidFill>
@@ -13911,27 +13911,27 @@
         </p:nvSpPr>
         <p:spPr>
           <a:xfrm>
-            <a:off x="548640" y="6446520"/>
-            <a:ext cx="7315200" cy="274320"/>
-          </a:xfrm>
-          <a:prstGeom prst="rect">
-            <a:avLst/>
-          </a:prstGeom>
-          <a:noFill/>
-        </p:spPr>
-        <p:txBody>
-          <a:bodyPr wrap="square" lIns="0" rIns="0" tIns="0" bIns="0" anchor="t">
-            <a:spAutoFit/>
-          </a:bodyPr>
-          <a:lstStyle/>
-          <a:p>
-            <a:pPr algn="l">
-              <a:lnSpc>
-                <a:spcPct val="120000"/>
-              </a:lnSpc>
-            </a:pPr>
-            <a:r>
-              <a:rPr sz="1000" b="0" i="1">
+            <a:off x="548640" y="6355080"/>
+            <a:ext cx="7315200" cy="365760"/>
+          </a:xfrm>
+          <a:prstGeom prst="rect">
+            <a:avLst/>
+          </a:prstGeom>
+          <a:noFill/>
+        </p:spPr>
+        <p:txBody>
+          <a:bodyPr wrap="square" lIns="0" rIns="0" tIns="0" bIns="0" anchor="t">
+            <a:spAutoFit/>
+          </a:bodyPr>
+          <a:lstStyle/>
+          <a:p>
+            <a:pPr algn="l">
+              <a:lnSpc>
+                <a:spcPct val="120000"/>
+              </a:lnSpc>
+            </a:pPr>
+            <a:r>
+              <a:rPr sz="1300" b="0" i="1">
                 <a:solidFill>
                   <a:srgbClr val="5A6478"/>
                 </a:solidFill>
@@ -13950,8 +13950,8 @@
         </p:nvSpPr>
         <p:spPr>
           <a:xfrm>
-            <a:off x="7315200" y="6446520"/>
-            <a:ext cx="4389120" cy="274320"/>
+            <a:off x="6858000" y="6355080"/>
+            <a:ext cx="4846320" cy="365760"/>
           </a:xfrm>
           <a:prstGeom prst="rect">
             <a:avLst/>
@@ -13970,7 +13970,7 @@
               </a:lnSpc>
             </a:pPr>
             <a:r>
-              <a:rPr sz="900" b="1" i="0" spc="200">
+              <a:rPr sz="1200" b="1" i="0" spc="200">
                 <a:solidFill>
                   <a:srgbClr val="5A6478"/>
                 </a:solidFill>
@@ -14051,27 +14051,27 @@
         </p:nvSpPr>
         <p:spPr>
           <a:xfrm>
-            <a:off x="822960" y="640080"/>
-            <a:ext cx="10515600" cy="365760"/>
-          </a:xfrm>
-          <a:prstGeom prst="rect">
-            <a:avLst/>
-          </a:prstGeom>
-          <a:noFill/>
-        </p:spPr>
-        <p:txBody>
-          <a:bodyPr wrap="square" lIns="0" rIns="0" tIns="0" bIns="0" anchor="t">
-            <a:spAutoFit/>
-          </a:bodyPr>
-          <a:lstStyle/>
-          <a:p>
-            <a:pPr algn="l">
-              <a:lnSpc>
-                <a:spcPct val="120000"/>
-              </a:lnSpc>
-            </a:pPr>
-            <a:r>
-              <a:rPr sz="1200" b="1" i="0" spc="240">
+            <a:off x="822960" y="777240"/>
+            <a:ext cx="10515600" cy="502920"/>
+          </a:xfrm>
+          <a:prstGeom prst="rect">
+            <a:avLst/>
+          </a:prstGeom>
+          <a:noFill/>
+        </p:spPr>
+        <p:txBody>
+          <a:bodyPr wrap="square" lIns="0" rIns="0" tIns="0" bIns="0" anchor="t">
+            <a:spAutoFit/>
+          </a:bodyPr>
+          <a:lstStyle/>
+          <a:p>
+            <a:pPr algn="l">
+              <a:lnSpc>
+                <a:spcPct val="120000"/>
+              </a:lnSpc>
+            </a:pPr>
+            <a:r>
+              <a:rPr sz="1800" b="1" i="0" spc="220">
                 <a:solidFill>
                   <a:srgbClr val="D97757"/>
                 </a:solidFill>
@@ -14090,7 +14090,7 @@
         </p:nvSpPr>
         <p:spPr>
           <a:xfrm>
-            <a:off x="822960" y="1143000"/>
+            <a:off x="822960" y="1554480"/>
             <a:ext cx="10515600" cy="2286000"/>
           </a:xfrm>
           <a:prstGeom prst="rect">
@@ -14728,27 +14728,27 @@
         </p:nvSpPr>
         <p:spPr>
           <a:xfrm>
-            <a:off x="548640" y="6446520"/>
-            <a:ext cx="7315200" cy="274320"/>
-          </a:xfrm>
-          <a:prstGeom prst="rect">
-            <a:avLst/>
-          </a:prstGeom>
-          <a:noFill/>
-        </p:spPr>
-        <p:txBody>
-          <a:bodyPr wrap="square" lIns="0" rIns="0" tIns="0" bIns="0" anchor="t">
-            <a:spAutoFit/>
-          </a:bodyPr>
-          <a:lstStyle/>
-          <a:p>
-            <a:pPr algn="l">
-              <a:lnSpc>
-                <a:spcPct val="120000"/>
-              </a:lnSpc>
-            </a:pPr>
-            <a:r>
-              <a:rPr sz="1000" b="0" i="1">
+            <a:off x="548640" y="6355080"/>
+            <a:ext cx="7315200" cy="365760"/>
+          </a:xfrm>
+          <a:prstGeom prst="rect">
+            <a:avLst/>
+          </a:prstGeom>
+          <a:noFill/>
+        </p:spPr>
+        <p:txBody>
+          <a:bodyPr wrap="square" lIns="0" rIns="0" tIns="0" bIns="0" anchor="t">
+            <a:spAutoFit/>
+          </a:bodyPr>
+          <a:lstStyle/>
+          <a:p>
+            <a:pPr algn="l">
+              <a:lnSpc>
+                <a:spcPct val="120000"/>
+              </a:lnSpc>
+            </a:pPr>
+            <a:r>
+              <a:rPr sz="1300" b="0" i="1">
                 <a:solidFill>
                   <a:srgbClr val="5A6478"/>
                 </a:solidFill>
@@ -14767,8 +14767,8 @@
         </p:nvSpPr>
         <p:spPr>
           <a:xfrm>
-            <a:off x="7315200" y="6446520"/>
-            <a:ext cx="4389120" cy="274320"/>
+            <a:off x="6858000" y="6355080"/>
+            <a:ext cx="4846320" cy="365760"/>
           </a:xfrm>
           <a:prstGeom prst="rect">
             <a:avLst/>
@@ -14787,7 +14787,7 @@
               </a:lnSpc>
             </a:pPr>
             <a:r>
-              <a:rPr sz="900" b="1" i="0" spc="200">
+              <a:rPr sz="1200" b="1" i="0" spc="200">
                 <a:solidFill>
                   <a:srgbClr val="5A6478"/>
                 </a:solidFill>
@@ -14868,27 +14868,27 @@
         </p:nvSpPr>
         <p:spPr>
           <a:xfrm>
-            <a:off x="822960" y="548640"/>
-            <a:ext cx="3657600" cy="320040"/>
-          </a:xfrm>
-          <a:prstGeom prst="rect">
-            <a:avLst/>
-          </a:prstGeom>
-          <a:noFill/>
-        </p:spPr>
-        <p:txBody>
-          <a:bodyPr wrap="square" lIns="0" rIns="0" tIns="0" bIns="0" anchor="t">
-            <a:spAutoFit/>
-          </a:bodyPr>
-          <a:lstStyle/>
-          <a:p>
-            <a:pPr algn="l">
-              <a:lnSpc>
-                <a:spcPct val="120000"/>
-              </a:lnSpc>
-            </a:pPr>
-            <a:r>
-              <a:rPr sz="1100" b="1" i="0" spc="240">
+            <a:off x="822960" y="777240"/>
+            <a:ext cx="5486400" cy="457200"/>
+          </a:xfrm>
+          <a:prstGeom prst="rect">
+            <a:avLst/>
+          </a:prstGeom>
+          <a:noFill/>
+        </p:spPr>
+        <p:txBody>
+          <a:bodyPr wrap="square" lIns="0" rIns="0" tIns="0" bIns="0" anchor="t">
+            <a:spAutoFit/>
+          </a:bodyPr>
+          <a:lstStyle/>
+          <a:p>
+            <a:pPr algn="l">
+              <a:lnSpc>
+                <a:spcPct val="120000"/>
+              </a:lnSpc>
+            </a:pPr>
+            <a:r>
+              <a:rPr sz="1600" b="1" i="0" spc="220">
                 <a:solidFill>
                   <a:srgbClr val="D97757"/>
                 </a:solidFill>
@@ -14907,7 +14907,7 @@
         </p:nvSpPr>
         <p:spPr>
           <a:xfrm>
-            <a:off x="822960" y="1005840"/>
+            <a:off x="822960" y="1417320"/>
             <a:ext cx="548640" cy="548640"/>
           </a:xfrm>
           <a:prstGeom prst="rect">
@@ -14946,7 +14946,7 @@
         </p:nvSpPr>
         <p:spPr>
           <a:xfrm>
-            <a:off x="1417320" y="960120"/>
+            <a:off x="1417320" y="1371600"/>
             <a:ext cx="10058400" cy="1188720"/>
           </a:xfrm>
           <a:prstGeom prst="rect">
@@ -14985,7 +14985,7 @@
         </p:nvSpPr>
         <p:spPr>
           <a:xfrm>
-            <a:off x="822960" y="2286000"/>
+            <a:off x="822960" y="2697480"/>
             <a:ext cx="10515600" cy="548640"/>
           </a:xfrm>
           <a:prstGeom prst="rect">
@@ -15005,7 +15005,7 @@
               </a:lnSpc>
             </a:pPr>
             <a:r>
-              <a:rPr sz="2000" b="0" i="1">
+              <a:rPr sz="2200" b="0" i="1">
                 <a:solidFill>
                   <a:srgbClr val="0E2746"/>
                 </a:solidFill>
@@ -15024,7 +15024,7 @@
         </p:nvSpPr>
         <p:spPr>
           <a:xfrm>
-            <a:off x="822960" y="3246120"/>
+            <a:off x="822960" y="3714750"/>
             <a:ext cx="118872" cy="118872"/>
           </a:xfrm>
           <a:prstGeom prst="ellipse">
@@ -15068,7 +15068,7 @@
         </p:nvSpPr>
         <p:spPr>
           <a:xfrm>
-            <a:off x="1133856" y="3154680"/>
+            <a:off x="1133856" y="3611880"/>
             <a:ext cx="10058400" cy="502920"/>
           </a:xfrm>
           <a:prstGeom prst="rect">
@@ -15088,7 +15088,7 @@
               </a:lnSpc>
             </a:pPr>
             <a:r>
-              <a:rPr sz="1600" b="0" i="0">
+              <a:rPr sz="1800" b="0" i="0">
                 <a:solidFill>
                   <a:srgbClr val="0E2746"/>
                 </a:solidFill>
@@ -15107,7 +15107,7 @@
         </p:nvSpPr>
         <p:spPr>
           <a:xfrm>
-            <a:off x="822960" y="3703320"/>
+            <a:off x="822960" y="4171950"/>
             <a:ext cx="118872" cy="118872"/>
           </a:xfrm>
           <a:prstGeom prst="ellipse">
@@ -15151,7 +15151,7 @@
         </p:nvSpPr>
         <p:spPr>
           <a:xfrm>
-            <a:off x="1133856" y="3611880"/>
+            <a:off x="1133856" y="4069080"/>
             <a:ext cx="10058400" cy="502920"/>
           </a:xfrm>
           <a:prstGeom prst="rect">
@@ -15171,7 +15171,7 @@
               </a:lnSpc>
             </a:pPr>
             <a:r>
-              <a:rPr sz="1600" b="0" i="0">
+              <a:rPr sz="1800" b="0" i="0">
                 <a:solidFill>
                   <a:srgbClr val="0E2746"/>
                 </a:solidFill>
@@ -15190,7 +15190,7 @@
         </p:nvSpPr>
         <p:spPr>
           <a:xfrm>
-            <a:off x="822960" y="4160520"/>
+            <a:off x="822960" y="4629150"/>
             <a:ext cx="118872" cy="118872"/>
           </a:xfrm>
           <a:prstGeom prst="ellipse">
@@ -15234,7 +15234,7 @@
         </p:nvSpPr>
         <p:spPr>
           <a:xfrm>
-            <a:off x="1133856" y="4069080"/>
+            <a:off x="1133856" y="4526280"/>
             <a:ext cx="10058400" cy="502920"/>
           </a:xfrm>
           <a:prstGeom prst="rect">
@@ -15254,7 +15254,7 @@
               </a:lnSpc>
             </a:pPr>
             <a:r>
-              <a:rPr sz="1600" b="0" i="0">
+              <a:rPr sz="1800" b="0" i="0">
                 <a:solidFill>
                   <a:srgbClr val="0E2746"/>
                 </a:solidFill>
@@ -15273,7 +15273,7 @@
         </p:nvSpPr>
         <p:spPr>
           <a:xfrm>
-            <a:off x="822960" y="4617720"/>
+            <a:off x="822960" y="5086350"/>
             <a:ext cx="118872" cy="118872"/>
           </a:xfrm>
           <a:prstGeom prst="ellipse">
@@ -15317,7 +15317,7 @@
         </p:nvSpPr>
         <p:spPr>
           <a:xfrm>
-            <a:off x="1133856" y="4526280"/>
+            <a:off x="1133856" y="4983480"/>
             <a:ext cx="10058400" cy="502920"/>
           </a:xfrm>
           <a:prstGeom prst="rect">
@@ -15337,7 +15337,7 @@
               </a:lnSpc>
             </a:pPr>
             <a:r>
-              <a:rPr sz="1600" b="0" i="0">
+              <a:rPr sz="1800" b="0" i="0">
                 <a:solidFill>
                   <a:srgbClr val="0E2746"/>
                 </a:solidFill>
@@ -15356,7 +15356,7 @@
         </p:nvSpPr>
         <p:spPr>
           <a:xfrm>
-            <a:off x="6400800" y="3246120"/>
+            <a:off x="6400800" y="3714750"/>
             <a:ext cx="118872" cy="118872"/>
           </a:xfrm>
           <a:prstGeom prst="ellipse">
@@ -15400,7 +15400,7 @@
         </p:nvSpPr>
         <p:spPr>
           <a:xfrm>
-            <a:off x="6711696" y="3154680"/>
+            <a:off x="6711696" y="3611880"/>
             <a:ext cx="10058400" cy="502920"/>
           </a:xfrm>
           <a:prstGeom prst="rect">
@@ -15420,7 +15420,7 @@
               </a:lnSpc>
             </a:pPr>
             <a:r>
-              <a:rPr sz="1600" b="0" i="0">
+              <a:rPr sz="1800" b="0" i="0">
                 <a:solidFill>
                   <a:srgbClr val="0E2746"/>
                 </a:solidFill>
@@ -15439,7 +15439,7 @@
         </p:nvSpPr>
         <p:spPr>
           <a:xfrm>
-            <a:off x="6400800" y="3703320"/>
+            <a:off x="6400800" y="4171950"/>
             <a:ext cx="118872" cy="118872"/>
           </a:xfrm>
           <a:prstGeom prst="ellipse">
@@ -15483,7 +15483,7 @@
         </p:nvSpPr>
         <p:spPr>
           <a:xfrm>
-            <a:off x="6711696" y="3611880"/>
+            <a:off x="6711696" y="4069080"/>
             <a:ext cx="10058400" cy="502920"/>
           </a:xfrm>
           <a:prstGeom prst="rect">
@@ -15503,7 +15503,7 @@
               </a:lnSpc>
             </a:pPr>
             <a:r>
-              <a:rPr sz="1600" b="0" i="0">
+              <a:rPr sz="1800" b="0" i="0">
                 <a:solidFill>
                   <a:srgbClr val="0E2746"/>
                 </a:solidFill>
@@ -15522,7 +15522,7 @@
         </p:nvSpPr>
         <p:spPr>
           <a:xfrm>
-            <a:off x="6400800" y="4160520"/>
+            <a:off x="6400800" y="4629150"/>
             <a:ext cx="118872" cy="118872"/>
           </a:xfrm>
           <a:prstGeom prst="ellipse">
@@ -15566,7 +15566,7 @@
         </p:nvSpPr>
         <p:spPr>
           <a:xfrm>
-            <a:off x="6711696" y="4069080"/>
+            <a:off x="6711696" y="4526280"/>
             <a:ext cx="10058400" cy="502920"/>
           </a:xfrm>
           <a:prstGeom prst="rect">
@@ -15586,7 +15586,7 @@
               </a:lnSpc>
             </a:pPr>
             <a:r>
-              <a:rPr sz="1600" b="0" i="0">
+              <a:rPr sz="1800" b="0" i="0">
                 <a:solidFill>
                   <a:srgbClr val="0E2746"/>
                 </a:solidFill>
@@ -15605,7 +15605,7 @@
         </p:nvSpPr>
         <p:spPr>
           <a:xfrm>
-            <a:off x="6400800" y="4617720"/>
+            <a:off x="6400800" y="5086350"/>
             <a:ext cx="118872" cy="118872"/>
           </a:xfrm>
           <a:prstGeom prst="ellipse">
@@ -15649,7 +15649,7 @@
         </p:nvSpPr>
         <p:spPr>
           <a:xfrm>
-            <a:off x="6711696" y="4526280"/>
+            <a:off x="6711696" y="4983480"/>
             <a:ext cx="10058400" cy="502920"/>
           </a:xfrm>
           <a:prstGeom prst="rect">
@@ -15669,7 +15669,7 @@
               </a:lnSpc>
             </a:pPr>
             <a:r>
-              <a:rPr sz="1600" b="0" i="0">
+              <a:rPr sz="1800" b="0" i="0">
                 <a:solidFill>
                   <a:srgbClr val="0E2746"/>
                 </a:solidFill>
@@ -15688,27 +15688,27 @@
         </p:nvSpPr>
         <p:spPr>
           <a:xfrm>
-            <a:off x="822960" y="5760720"/>
-            <a:ext cx="10515600" cy="457200"/>
-          </a:xfrm>
-          <a:prstGeom prst="rect">
-            <a:avLst/>
-          </a:prstGeom>
-          <a:noFill/>
-        </p:spPr>
-        <p:txBody>
-          <a:bodyPr wrap="square" lIns="0" rIns="0" tIns="0" bIns="0" anchor="t">
-            <a:spAutoFit/>
-          </a:bodyPr>
-          <a:lstStyle/>
-          <a:p>
-            <a:pPr algn="l">
-              <a:lnSpc>
-                <a:spcPct val="120000"/>
-              </a:lnSpc>
-            </a:pPr>
-            <a:r>
-              <a:rPr sz="1600" b="0" i="1">
+            <a:off x="822960" y="5897880"/>
+            <a:ext cx="10515600" cy="365760"/>
+          </a:xfrm>
+          <a:prstGeom prst="rect">
+            <a:avLst/>
+          </a:prstGeom>
+          <a:noFill/>
+        </p:spPr>
+        <p:txBody>
+          <a:bodyPr wrap="square" lIns="0" rIns="0" tIns="0" bIns="0" anchor="t">
+            <a:spAutoFit/>
+          </a:bodyPr>
+          <a:lstStyle/>
+          <a:p>
+            <a:pPr algn="l">
+              <a:lnSpc>
+                <a:spcPct val="120000"/>
+              </a:lnSpc>
+            </a:pPr>
+            <a:r>
+              <a:rPr sz="1700" b="0" i="1">
                 <a:solidFill>
                   <a:srgbClr val="D97757"/>
                 </a:solidFill>
@@ -15727,27 +15727,27 @@
         </p:nvSpPr>
         <p:spPr>
           <a:xfrm>
-            <a:off x="548640" y="6446520"/>
-            <a:ext cx="7315200" cy="274320"/>
-          </a:xfrm>
-          <a:prstGeom prst="rect">
-            <a:avLst/>
-          </a:prstGeom>
-          <a:noFill/>
-        </p:spPr>
-        <p:txBody>
-          <a:bodyPr wrap="square" lIns="0" rIns="0" tIns="0" bIns="0" anchor="t">
-            <a:spAutoFit/>
-          </a:bodyPr>
-          <a:lstStyle/>
-          <a:p>
-            <a:pPr algn="l">
-              <a:lnSpc>
-                <a:spcPct val="120000"/>
-              </a:lnSpc>
-            </a:pPr>
-            <a:r>
-              <a:rPr sz="1000" b="0" i="1">
+            <a:off x="548640" y="6355080"/>
+            <a:ext cx="7315200" cy="365760"/>
+          </a:xfrm>
+          <a:prstGeom prst="rect">
+            <a:avLst/>
+          </a:prstGeom>
+          <a:noFill/>
+        </p:spPr>
+        <p:txBody>
+          <a:bodyPr wrap="square" lIns="0" rIns="0" tIns="0" bIns="0" anchor="t">
+            <a:spAutoFit/>
+          </a:bodyPr>
+          <a:lstStyle/>
+          <a:p>
+            <a:pPr algn="l">
+              <a:lnSpc>
+                <a:spcPct val="120000"/>
+              </a:lnSpc>
+            </a:pPr>
+            <a:r>
+              <a:rPr sz="1300" b="0" i="1">
                 <a:solidFill>
                   <a:srgbClr val="5A6478"/>
                 </a:solidFill>
@@ -15766,8 +15766,8 @@
         </p:nvSpPr>
         <p:spPr>
           <a:xfrm>
-            <a:off x="7315200" y="6446520"/>
-            <a:ext cx="4389120" cy="274320"/>
+            <a:off x="6858000" y="6355080"/>
+            <a:ext cx="4846320" cy="365760"/>
           </a:xfrm>
           <a:prstGeom prst="rect">
             <a:avLst/>
@@ -15786,7 +15786,7 @@
               </a:lnSpc>
             </a:pPr>
             <a:r>
-              <a:rPr sz="900" b="1" i="0" spc="200">
+              <a:rPr sz="1200" b="1" i="0" spc="200">
                 <a:solidFill>
                   <a:srgbClr val="5A6478"/>
                 </a:solidFill>
@@ -15867,27 +15867,27 @@
         </p:nvSpPr>
         <p:spPr>
           <a:xfrm>
-            <a:off x="822960" y="548640"/>
-            <a:ext cx="3657600" cy="320040"/>
-          </a:xfrm>
-          <a:prstGeom prst="rect">
-            <a:avLst/>
-          </a:prstGeom>
-          <a:noFill/>
-        </p:spPr>
-        <p:txBody>
-          <a:bodyPr wrap="square" lIns="0" rIns="0" tIns="0" bIns="0" anchor="t">
-            <a:spAutoFit/>
-          </a:bodyPr>
-          <a:lstStyle/>
-          <a:p>
-            <a:pPr algn="l">
-              <a:lnSpc>
-                <a:spcPct val="120000"/>
-              </a:lnSpc>
-            </a:pPr>
-            <a:r>
-              <a:rPr sz="1100" b="1" i="0" spc="240">
+            <a:off x="822960" y="777240"/>
+            <a:ext cx="5486400" cy="457200"/>
+          </a:xfrm>
+          <a:prstGeom prst="rect">
+            <a:avLst/>
+          </a:prstGeom>
+          <a:noFill/>
+        </p:spPr>
+        <p:txBody>
+          <a:bodyPr wrap="square" lIns="0" rIns="0" tIns="0" bIns="0" anchor="t">
+            <a:spAutoFit/>
+          </a:bodyPr>
+          <a:lstStyle/>
+          <a:p>
+            <a:pPr algn="l">
+              <a:lnSpc>
+                <a:spcPct val="120000"/>
+              </a:lnSpc>
+            </a:pPr>
+            <a:r>
+              <a:rPr sz="1600" b="1" i="0" spc="220">
                 <a:solidFill>
                   <a:srgbClr val="D97757"/>
                 </a:solidFill>
@@ -15906,7 +15906,7 @@
         </p:nvSpPr>
         <p:spPr>
           <a:xfrm>
-            <a:off x="822960" y="1005840"/>
+            <a:off x="822960" y="1417320"/>
             <a:ext cx="548640" cy="548640"/>
           </a:xfrm>
           <a:prstGeom prst="rect">
@@ -15945,7 +15945,7 @@
         </p:nvSpPr>
         <p:spPr>
           <a:xfrm>
-            <a:off x="1417320" y="960120"/>
+            <a:off x="1417320" y="1371600"/>
             <a:ext cx="10058400" cy="1188720"/>
           </a:xfrm>
           <a:prstGeom prst="rect">
@@ -15984,7 +15984,7 @@
         </p:nvSpPr>
         <p:spPr>
           <a:xfrm>
-            <a:off x="822960" y="2286000"/>
+            <a:off x="822960" y="2697480"/>
             <a:ext cx="10515600" cy="548640"/>
           </a:xfrm>
           <a:prstGeom prst="rect">
@@ -16004,7 +16004,7 @@
               </a:lnSpc>
             </a:pPr>
             <a:r>
-              <a:rPr sz="2000" b="0" i="1">
+              <a:rPr sz="2200" b="0" i="1">
                 <a:solidFill>
                   <a:srgbClr val="0E2746"/>
                 </a:solidFill>
@@ -16023,7 +16023,7 @@
         </p:nvSpPr>
         <p:spPr>
           <a:xfrm>
-            <a:off x="822960" y="3246120"/>
+            <a:off x="822960" y="3714750"/>
             <a:ext cx="118872" cy="118872"/>
           </a:xfrm>
           <a:prstGeom prst="ellipse">
@@ -16067,7 +16067,7 @@
         </p:nvSpPr>
         <p:spPr>
           <a:xfrm>
-            <a:off x="1133856" y="3154680"/>
+            <a:off x="1133856" y="3611880"/>
             <a:ext cx="10058400" cy="502920"/>
           </a:xfrm>
           <a:prstGeom prst="rect">
@@ -16087,7 +16087,7 @@
               </a:lnSpc>
             </a:pPr>
             <a:r>
-              <a:rPr sz="1600" b="0" i="0">
+              <a:rPr sz="1800" b="0" i="0">
                 <a:solidFill>
                   <a:srgbClr val="0E2746"/>
                 </a:solidFill>
@@ -16106,7 +16106,7 @@
         </p:nvSpPr>
         <p:spPr>
           <a:xfrm>
-            <a:off x="822960" y="3703320"/>
+            <a:off x="822960" y="4171950"/>
             <a:ext cx="118872" cy="118872"/>
           </a:xfrm>
           <a:prstGeom prst="ellipse">
@@ -16150,7 +16150,7 @@
         </p:nvSpPr>
         <p:spPr>
           <a:xfrm>
-            <a:off x="1133856" y="3611880"/>
+            <a:off x="1133856" y="4069080"/>
             <a:ext cx="10058400" cy="502920"/>
           </a:xfrm>
           <a:prstGeom prst="rect">
@@ -16170,7 +16170,7 @@
               </a:lnSpc>
             </a:pPr>
             <a:r>
-              <a:rPr sz="1600" b="0" i="0">
+              <a:rPr sz="1800" b="0" i="0">
                 <a:solidFill>
                   <a:srgbClr val="0E2746"/>
                 </a:solidFill>
@@ -16189,7 +16189,7 @@
         </p:nvSpPr>
         <p:spPr>
           <a:xfrm>
-            <a:off x="6400800" y="3246120"/>
+            <a:off x="6400800" y="3714750"/>
             <a:ext cx="118872" cy="118872"/>
           </a:xfrm>
           <a:prstGeom prst="ellipse">
@@ -16233,7 +16233,7 @@
         </p:nvSpPr>
         <p:spPr>
           <a:xfrm>
-            <a:off x="6711696" y="3154680"/>
+            <a:off x="6711696" y="3611880"/>
             <a:ext cx="10058400" cy="502920"/>
           </a:xfrm>
           <a:prstGeom prst="rect">
@@ -16253,7 +16253,7 @@
               </a:lnSpc>
             </a:pPr>
             <a:r>
-              <a:rPr sz="1600" b="0" i="0">
+              <a:rPr sz="1800" b="0" i="0">
                 <a:solidFill>
                   <a:srgbClr val="0E2746"/>
                 </a:solidFill>
@@ -16272,7 +16272,7 @@
         </p:nvSpPr>
         <p:spPr>
           <a:xfrm>
-            <a:off x="6400800" y="3703320"/>
+            <a:off x="6400800" y="4171950"/>
             <a:ext cx="118872" cy="118872"/>
           </a:xfrm>
           <a:prstGeom prst="ellipse">
@@ -16316,7 +16316,7 @@
         </p:nvSpPr>
         <p:spPr>
           <a:xfrm>
-            <a:off x="6711696" y="3611880"/>
+            <a:off x="6711696" y="4069080"/>
             <a:ext cx="10058400" cy="502920"/>
           </a:xfrm>
           <a:prstGeom prst="rect">
@@ -16336,7 +16336,7 @@
               </a:lnSpc>
             </a:pPr>
             <a:r>
-              <a:rPr sz="1600" b="0" i="0">
+              <a:rPr sz="1800" b="0" i="0">
                 <a:solidFill>
                   <a:srgbClr val="0E2746"/>
                 </a:solidFill>
@@ -16355,27 +16355,27 @@
         </p:nvSpPr>
         <p:spPr>
           <a:xfrm>
-            <a:off x="822960" y="5760720"/>
-            <a:ext cx="10515600" cy="457200"/>
-          </a:xfrm>
-          <a:prstGeom prst="rect">
-            <a:avLst/>
-          </a:prstGeom>
-          <a:noFill/>
-        </p:spPr>
-        <p:txBody>
-          <a:bodyPr wrap="square" lIns="0" rIns="0" tIns="0" bIns="0" anchor="t">
-            <a:spAutoFit/>
-          </a:bodyPr>
-          <a:lstStyle/>
-          <a:p>
-            <a:pPr algn="l">
-              <a:lnSpc>
-                <a:spcPct val="120000"/>
-              </a:lnSpc>
-            </a:pPr>
-            <a:r>
-              <a:rPr sz="1600" b="0" i="1">
+            <a:off x="822960" y="5897880"/>
+            <a:ext cx="10515600" cy="365760"/>
+          </a:xfrm>
+          <a:prstGeom prst="rect">
+            <a:avLst/>
+          </a:prstGeom>
+          <a:noFill/>
+        </p:spPr>
+        <p:txBody>
+          <a:bodyPr wrap="square" lIns="0" rIns="0" tIns="0" bIns="0" anchor="t">
+            <a:spAutoFit/>
+          </a:bodyPr>
+          <a:lstStyle/>
+          <a:p>
+            <a:pPr algn="l">
+              <a:lnSpc>
+                <a:spcPct val="120000"/>
+              </a:lnSpc>
+            </a:pPr>
+            <a:r>
+              <a:rPr sz="1700" b="0" i="1">
                 <a:solidFill>
                   <a:srgbClr val="D97757"/>
                 </a:solidFill>
@@ -16394,27 +16394,27 @@
         </p:nvSpPr>
         <p:spPr>
           <a:xfrm>
-            <a:off x="548640" y="6446520"/>
-            <a:ext cx="7315200" cy="274320"/>
-          </a:xfrm>
-          <a:prstGeom prst="rect">
-            <a:avLst/>
-          </a:prstGeom>
-          <a:noFill/>
-        </p:spPr>
-        <p:txBody>
-          <a:bodyPr wrap="square" lIns="0" rIns="0" tIns="0" bIns="0" anchor="t">
-            <a:spAutoFit/>
-          </a:bodyPr>
-          <a:lstStyle/>
-          <a:p>
-            <a:pPr algn="l">
-              <a:lnSpc>
-                <a:spcPct val="120000"/>
-              </a:lnSpc>
-            </a:pPr>
-            <a:r>
-              <a:rPr sz="1000" b="0" i="1">
+            <a:off x="548640" y="6355080"/>
+            <a:ext cx="7315200" cy="365760"/>
+          </a:xfrm>
+          <a:prstGeom prst="rect">
+            <a:avLst/>
+          </a:prstGeom>
+          <a:noFill/>
+        </p:spPr>
+        <p:txBody>
+          <a:bodyPr wrap="square" lIns="0" rIns="0" tIns="0" bIns="0" anchor="t">
+            <a:spAutoFit/>
+          </a:bodyPr>
+          <a:lstStyle/>
+          <a:p>
+            <a:pPr algn="l">
+              <a:lnSpc>
+                <a:spcPct val="120000"/>
+              </a:lnSpc>
+            </a:pPr>
+            <a:r>
+              <a:rPr sz="1300" b="0" i="1">
                 <a:solidFill>
                   <a:srgbClr val="5A6478"/>
                 </a:solidFill>
@@ -16433,8 +16433,8 @@
         </p:nvSpPr>
         <p:spPr>
           <a:xfrm>
-            <a:off x="7315200" y="6446520"/>
-            <a:ext cx="4389120" cy="274320"/>
+            <a:off x="6858000" y="6355080"/>
+            <a:ext cx="4846320" cy="365760"/>
           </a:xfrm>
           <a:prstGeom prst="rect">
             <a:avLst/>
@@ -16453,7 +16453,7 @@
               </a:lnSpc>
             </a:pPr>
             <a:r>
-              <a:rPr sz="900" b="1" i="0" spc="200">
+              <a:rPr sz="1200" b="1" i="0" spc="200">
                 <a:solidFill>
                   <a:srgbClr val="5A6478"/>
                 </a:solidFill>
@@ -16534,27 +16534,27 @@
         </p:nvSpPr>
         <p:spPr>
           <a:xfrm>
-            <a:off x="822960" y="548640"/>
-            <a:ext cx="3657600" cy="320040"/>
-          </a:xfrm>
-          <a:prstGeom prst="rect">
-            <a:avLst/>
-          </a:prstGeom>
-          <a:noFill/>
-        </p:spPr>
-        <p:txBody>
-          <a:bodyPr wrap="square" lIns="0" rIns="0" tIns="0" bIns="0" anchor="t">
-            <a:spAutoFit/>
-          </a:bodyPr>
-          <a:lstStyle/>
-          <a:p>
-            <a:pPr algn="l">
-              <a:lnSpc>
-                <a:spcPct val="120000"/>
-              </a:lnSpc>
-            </a:pPr>
-            <a:r>
-              <a:rPr sz="1100" b="1" i="0" spc="240">
+            <a:off x="822960" y="777240"/>
+            <a:ext cx="5486400" cy="457200"/>
+          </a:xfrm>
+          <a:prstGeom prst="rect">
+            <a:avLst/>
+          </a:prstGeom>
+          <a:noFill/>
+        </p:spPr>
+        <p:txBody>
+          <a:bodyPr wrap="square" lIns="0" rIns="0" tIns="0" bIns="0" anchor="t">
+            <a:spAutoFit/>
+          </a:bodyPr>
+          <a:lstStyle/>
+          <a:p>
+            <a:pPr algn="l">
+              <a:lnSpc>
+                <a:spcPct val="120000"/>
+              </a:lnSpc>
+            </a:pPr>
+            <a:r>
+              <a:rPr sz="1600" b="1" i="0" spc="220">
                 <a:solidFill>
                   <a:srgbClr val="D97757"/>
                 </a:solidFill>
@@ -16573,7 +16573,7 @@
         </p:nvSpPr>
         <p:spPr>
           <a:xfrm>
-            <a:off x="822960" y="1005840"/>
+            <a:off x="822960" y="1417320"/>
             <a:ext cx="548640" cy="548640"/>
           </a:xfrm>
           <a:prstGeom prst="rect">
@@ -16612,7 +16612,7 @@
         </p:nvSpPr>
         <p:spPr>
           <a:xfrm>
-            <a:off x="1417320" y="960120"/>
+            <a:off x="1417320" y="1371600"/>
             <a:ext cx="10058400" cy="1188720"/>
           </a:xfrm>
           <a:prstGeom prst="rect">
@@ -16651,7 +16651,7 @@
         </p:nvSpPr>
         <p:spPr>
           <a:xfrm>
-            <a:off x="822960" y="2286000"/>
+            <a:off x="822960" y="2697480"/>
             <a:ext cx="10515600" cy="548640"/>
           </a:xfrm>
           <a:prstGeom prst="rect">
@@ -16671,7 +16671,7 @@
               </a:lnSpc>
             </a:pPr>
             <a:r>
-              <a:rPr sz="2000" b="0" i="1">
+              <a:rPr sz="2200" b="0" i="1">
                 <a:solidFill>
                   <a:srgbClr val="0E2746"/>
                 </a:solidFill>
@@ -16690,7 +16690,7 @@
         </p:nvSpPr>
         <p:spPr>
           <a:xfrm>
-            <a:off x="822960" y="3246120"/>
+            <a:off x="822960" y="3714750"/>
             <a:ext cx="118872" cy="118872"/>
           </a:xfrm>
           <a:prstGeom prst="ellipse">
@@ -16734,7 +16734,7 @@
         </p:nvSpPr>
         <p:spPr>
           <a:xfrm>
-            <a:off x="1133856" y="3154680"/>
+            <a:off x="1133856" y="3611880"/>
             <a:ext cx="10058400" cy="502920"/>
           </a:xfrm>
           <a:prstGeom prst="rect">
@@ -16754,7 +16754,7 @@
               </a:lnSpc>
             </a:pPr>
             <a:r>
-              <a:rPr sz="1600" b="0" i="0">
+              <a:rPr sz="1800" b="0" i="0">
                 <a:solidFill>
                   <a:srgbClr val="0E2746"/>
                 </a:solidFill>
@@ -16773,7 +16773,7 @@
         </p:nvSpPr>
         <p:spPr>
           <a:xfrm>
-            <a:off x="822960" y="3703320"/>
+            <a:off x="822960" y="4171950"/>
             <a:ext cx="118872" cy="118872"/>
           </a:xfrm>
           <a:prstGeom prst="ellipse">
@@ -16817,7 +16817,7 @@
         </p:nvSpPr>
         <p:spPr>
           <a:xfrm>
-            <a:off x="1133856" y="3611880"/>
+            <a:off x="1133856" y="4069080"/>
             <a:ext cx="10058400" cy="502920"/>
           </a:xfrm>
           <a:prstGeom prst="rect">
@@ -16837,7 +16837,7 @@
               </a:lnSpc>
             </a:pPr>
             <a:r>
-              <a:rPr sz="1600" b="0" i="0">
+              <a:rPr sz="1800" b="0" i="0">
                 <a:solidFill>
                   <a:srgbClr val="0E2746"/>
                 </a:solidFill>
@@ -16856,7 +16856,7 @@
         </p:nvSpPr>
         <p:spPr>
           <a:xfrm>
-            <a:off x="822960" y="4160520"/>
+            <a:off x="822960" y="4629150"/>
             <a:ext cx="118872" cy="118872"/>
           </a:xfrm>
           <a:prstGeom prst="ellipse">
@@ -16900,7 +16900,7 @@
         </p:nvSpPr>
         <p:spPr>
           <a:xfrm>
-            <a:off x="1133856" y="4069080"/>
+            <a:off x="1133856" y="4526280"/>
             <a:ext cx="10058400" cy="502920"/>
           </a:xfrm>
           <a:prstGeom prst="rect">
@@ -16920,7 +16920,7 @@
               </a:lnSpc>
             </a:pPr>
             <a:r>
-              <a:rPr sz="1600" b="0" i="0">
+              <a:rPr sz="1800" b="0" i="0">
                 <a:solidFill>
                   <a:srgbClr val="0E2746"/>
                 </a:solidFill>
@@ -16939,7 +16939,7 @@
         </p:nvSpPr>
         <p:spPr>
           <a:xfrm>
-            <a:off x="6400800" y="3246120"/>
+            <a:off x="6400800" y="3714750"/>
             <a:ext cx="118872" cy="118872"/>
           </a:xfrm>
           <a:prstGeom prst="ellipse">
@@ -16983,7 +16983,7 @@
         </p:nvSpPr>
         <p:spPr>
           <a:xfrm>
-            <a:off x="6711696" y="3154680"/>
+            <a:off x="6711696" y="3611880"/>
             <a:ext cx="10058400" cy="502920"/>
           </a:xfrm>
           <a:prstGeom prst="rect">
@@ -17003,7 +17003,7 @@
               </a:lnSpc>
             </a:pPr>
             <a:r>
-              <a:rPr sz="1600" b="0" i="0">
+              <a:rPr sz="1800" b="0" i="0">
                 <a:solidFill>
                   <a:srgbClr val="0E2746"/>
                 </a:solidFill>
@@ -17022,7 +17022,7 @@
         </p:nvSpPr>
         <p:spPr>
           <a:xfrm>
-            <a:off x="6400800" y="3703320"/>
+            <a:off x="6400800" y="4171950"/>
             <a:ext cx="118872" cy="118872"/>
           </a:xfrm>
           <a:prstGeom prst="ellipse">
@@ -17066,7 +17066,7 @@
         </p:nvSpPr>
         <p:spPr>
           <a:xfrm>
-            <a:off x="6711696" y="3611880"/>
+            <a:off x="6711696" y="4069080"/>
             <a:ext cx="10058400" cy="502920"/>
           </a:xfrm>
           <a:prstGeom prst="rect">
@@ -17086,7 +17086,7 @@
               </a:lnSpc>
             </a:pPr>
             <a:r>
-              <a:rPr sz="1600" b="0" i="0">
+              <a:rPr sz="1800" b="0" i="0">
                 <a:solidFill>
                   <a:srgbClr val="0E2746"/>
                 </a:solidFill>
@@ -17105,27 +17105,27 @@
         </p:nvSpPr>
         <p:spPr>
           <a:xfrm>
-            <a:off x="822960" y="5760720"/>
-            <a:ext cx="10515600" cy="457200"/>
-          </a:xfrm>
-          <a:prstGeom prst="rect">
-            <a:avLst/>
-          </a:prstGeom>
-          <a:noFill/>
-        </p:spPr>
-        <p:txBody>
-          <a:bodyPr wrap="square" lIns="0" rIns="0" tIns="0" bIns="0" anchor="t">
-            <a:spAutoFit/>
-          </a:bodyPr>
-          <a:lstStyle/>
-          <a:p>
-            <a:pPr algn="l">
-              <a:lnSpc>
-                <a:spcPct val="120000"/>
-              </a:lnSpc>
-            </a:pPr>
-            <a:r>
-              <a:rPr sz="1600" b="0" i="1">
+            <a:off x="822960" y="5897880"/>
+            <a:ext cx="10515600" cy="365760"/>
+          </a:xfrm>
+          <a:prstGeom prst="rect">
+            <a:avLst/>
+          </a:prstGeom>
+          <a:noFill/>
+        </p:spPr>
+        <p:txBody>
+          <a:bodyPr wrap="square" lIns="0" rIns="0" tIns="0" bIns="0" anchor="t">
+            <a:spAutoFit/>
+          </a:bodyPr>
+          <a:lstStyle/>
+          <a:p>
+            <a:pPr algn="l">
+              <a:lnSpc>
+                <a:spcPct val="120000"/>
+              </a:lnSpc>
+            </a:pPr>
+            <a:r>
+              <a:rPr sz="1700" b="0" i="1">
                 <a:solidFill>
                   <a:srgbClr val="D97757"/>
                 </a:solidFill>
@@ -17144,27 +17144,27 @@
         </p:nvSpPr>
         <p:spPr>
           <a:xfrm>
-            <a:off x="548640" y="6446520"/>
-            <a:ext cx="7315200" cy="274320"/>
-          </a:xfrm>
-          <a:prstGeom prst="rect">
-            <a:avLst/>
-          </a:prstGeom>
-          <a:noFill/>
-        </p:spPr>
-        <p:txBody>
-          <a:bodyPr wrap="square" lIns="0" rIns="0" tIns="0" bIns="0" anchor="t">
-            <a:spAutoFit/>
-          </a:bodyPr>
-          <a:lstStyle/>
-          <a:p>
-            <a:pPr algn="l">
-              <a:lnSpc>
-                <a:spcPct val="120000"/>
-              </a:lnSpc>
-            </a:pPr>
-            <a:r>
-              <a:rPr sz="1000" b="0" i="1">
+            <a:off x="548640" y="6355080"/>
+            <a:ext cx="7315200" cy="365760"/>
+          </a:xfrm>
+          <a:prstGeom prst="rect">
+            <a:avLst/>
+          </a:prstGeom>
+          <a:noFill/>
+        </p:spPr>
+        <p:txBody>
+          <a:bodyPr wrap="square" lIns="0" rIns="0" tIns="0" bIns="0" anchor="t">
+            <a:spAutoFit/>
+          </a:bodyPr>
+          <a:lstStyle/>
+          <a:p>
+            <a:pPr algn="l">
+              <a:lnSpc>
+                <a:spcPct val="120000"/>
+              </a:lnSpc>
+            </a:pPr>
+            <a:r>
+              <a:rPr sz="1300" b="0" i="1">
                 <a:solidFill>
                   <a:srgbClr val="5A6478"/>
                 </a:solidFill>
@@ -17183,8 +17183,8 @@
         </p:nvSpPr>
         <p:spPr>
           <a:xfrm>
-            <a:off x="7315200" y="6446520"/>
-            <a:ext cx="4389120" cy="274320"/>
+            <a:off x="6858000" y="6355080"/>
+            <a:ext cx="4846320" cy="365760"/>
           </a:xfrm>
           <a:prstGeom prst="rect">
             <a:avLst/>
@@ -17203,7 +17203,7 @@
               </a:lnSpc>
             </a:pPr>
             <a:r>
-              <a:rPr sz="900" b="1" i="0" spc="200">
+              <a:rPr sz="1200" b="1" i="0" spc="200">
                 <a:solidFill>
                   <a:srgbClr val="5A6478"/>
                 </a:solidFill>
@@ -17284,27 +17284,27 @@
         </p:nvSpPr>
         <p:spPr>
           <a:xfrm>
-            <a:off x="822960" y="548640"/>
-            <a:ext cx="3657600" cy="320040"/>
-          </a:xfrm>
-          <a:prstGeom prst="rect">
-            <a:avLst/>
-          </a:prstGeom>
-          <a:noFill/>
-        </p:spPr>
-        <p:txBody>
-          <a:bodyPr wrap="square" lIns="0" rIns="0" tIns="0" bIns="0" anchor="t">
-            <a:spAutoFit/>
-          </a:bodyPr>
-          <a:lstStyle/>
-          <a:p>
-            <a:pPr algn="l">
-              <a:lnSpc>
-                <a:spcPct val="120000"/>
-              </a:lnSpc>
-            </a:pPr>
-            <a:r>
-              <a:rPr sz="1100" b="1" i="0" spc="240">
+            <a:off x="822960" y="777240"/>
+            <a:ext cx="5486400" cy="457200"/>
+          </a:xfrm>
+          <a:prstGeom prst="rect">
+            <a:avLst/>
+          </a:prstGeom>
+          <a:noFill/>
+        </p:spPr>
+        <p:txBody>
+          <a:bodyPr wrap="square" lIns="0" rIns="0" tIns="0" bIns="0" anchor="t">
+            <a:spAutoFit/>
+          </a:bodyPr>
+          <a:lstStyle/>
+          <a:p>
+            <a:pPr algn="l">
+              <a:lnSpc>
+                <a:spcPct val="120000"/>
+              </a:lnSpc>
+            </a:pPr>
+            <a:r>
+              <a:rPr sz="1600" b="1" i="0" spc="220">
                 <a:solidFill>
                   <a:srgbClr val="D97757"/>
                 </a:solidFill>
@@ -17323,7 +17323,7 @@
         </p:nvSpPr>
         <p:spPr>
           <a:xfrm>
-            <a:off x="822960" y="1005840"/>
+            <a:off x="822960" y="1417320"/>
             <a:ext cx="548640" cy="548640"/>
           </a:xfrm>
           <a:prstGeom prst="rect">
@@ -17362,7 +17362,7 @@
         </p:nvSpPr>
         <p:spPr>
           <a:xfrm>
-            <a:off x="1417320" y="960120"/>
+            <a:off x="1417320" y="1371600"/>
             <a:ext cx="10058400" cy="1188720"/>
           </a:xfrm>
           <a:prstGeom prst="rect">
@@ -17401,7 +17401,7 @@
         </p:nvSpPr>
         <p:spPr>
           <a:xfrm>
-            <a:off x="822960" y="2286000"/>
+            <a:off x="822960" y="2697480"/>
             <a:ext cx="10515600" cy="548640"/>
           </a:xfrm>
           <a:prstGeom prst="rect">
@@ -17421,7 +17421,7 @@
               </a:lnSpc>
             </a:pPr>
             <a:r>
-              <a:rPr sz="2000" b="0" i="1">
+              <a:rPr sz="2200" b="0" i="1">
                 <a:solidFill>
                   <a:srgbClr val="0E2746"/>
                 </a:solidFill>
@@ -17440,7 +17440,7 @@
         </p:nvSpPr>
         <p:spPr>
           <a:xfrm>
-            <a:off x="822960" y="3246120"/>
+            <a:off x="822960" y="3714750"/>
             <a:ext cx="118872" cy="118872"/>
           </a:xfrm>
           <a:prstGeom prst="ellipse">
@@ -17484,7 +17484,7 @@
         </p:nvSpPr>
         <p:spPr>
           <a:xfrm>
-            <a:off x="1133856" y="3154680"/>
+            <a:off x="1133856" y="3611880"/>
             <a:ext cx="10058400" cy="502920"/>
           </a:xfrm>
           <a:prstGeom prst="rect">
@@ -17504,7 +17504,7 @@
               </a:lnSpc>
             </a:pPr>
             <a:r>
-              <a:rPr sz="1600" b="0" i="0">
+              <a:rPr sz="1800" b="0" i="0">
                 <a:solidFill>
                   <a:srgbClr val="0E2746"/>
                 </a:solidFill>
@@ -17523,7 +17523,7 @@
         </p:nvSpPr>
         <p:spPr>
           <a:xfrm>
-            <a:off x="822960" y="3703320"/>
+            <a:off x="822960" y="4171950"/>
             <a:ext cx="118872" cy="118872"/>
           </a:xfrm>
           <a:prstGeom prst="ellipse">
@@ -17567,7 +17567,7 @@
         </p:nvSpPr>
         <p:spPr>
           <a:xfrm>
-            <a:off x="1133856" y="3611880"/>
+            <a:off x="1133856" y="4069080"/>
             <a:ext cx="10058400" cy="502920"/>
           </a:xfrm>
           <a:prstGeom prst="rect">
@@ -17587,7 +17587,7 @@
               </a:lnSpc>
             </a:pPr>
             <a:r>
-              <a:rPr sz="1600" b="0" i="0">
+              <a:rPr sz="1800" b="0" i="0">
                 <a:solidFill>
                   <a:srgbClr val="0E2746"/>
                 </a:solidFill>
@@ -17606,7 +17606,7 @@
         </p:nvSpPr>
         <p:spPr>
           <a:xfrm>
-            <a:off x="6400800" y="3246120"/>
+            <a:off x="6400800" y="3714750"/>
             <a:ext cx="118872" cy="118872"/>
           </a:xfrm>
           <a:prstGeom prst="ellipse">
@@ -17650,7 +17650,7 @@
         </p:nvSpPr>
         <p:spPr>
           <a:xfrm>
-            <a:off x="6711696" y="3154680"/>
+            <a:off x="6711696" y="3611880"/>
             <a:ext cx="10058400" cy="502920"/>
           </a:xfrm>
           <a:prstGeom prst="rect">
@@ -17670,7 +17670,7 @@
               </a:lnSpc>
             </a:pPr>
             <a:r>
-              <a:rPr sz="1600" b="0" i="0">
+              <a:rPr sz="1800" b="0" i="0">
                 <a:solidFill>
                   <a:srgbClr val="0E2746"/>
                 </a:solidFill>
@@ -17689,7 +17689,7 @@
         </p:nvSpPr>
         <p:spPr>
           <a:xfrm>
-            <a:off x="6400800" y="3703320"/>
+            <a:off x="6400800" y="4171950"/>
             <a:ext cx="118872" cy="118872"/>
           </a:xfrm>
           <a:prstGeom prst="ellipse">
@@ -17733,7 +17733,7 @@
         </p:nvSpPr>
         <p:spPr>
           <a:xfrm>
-            <a:off x="6711696" y="3611880"/>
+            <a:off x="6711696" y="4069080"/>
             <a:ext cx="10058400" cy="502920"/>
           </a:xfrm>
           <a:prstGeom prst="rect">
@@ -17753,7 +17753,7 @@
               </a:lnSpc>
             </a:pPr>
             <a:r>
-              <a:rPr sz="1600" b="0" i="0">
+              <a:rPr sz="1800" b="0" i="0">
                 <a:solidFill>
                   <a:srgbClr val="0E2746"/>
                 </a:solidFill>
@@ -17772,27 +17772,27 @@
         </p:nvSpPr>
         <p:spPr>
           <a:xfrm>
-            <a:off x="822960" y="5760720"/>
-            <a:ext cx="10515600" cy="457200"/>
-          </a:xfrm>
-          <a:prstGeom prst="rect">
-            <a:avLst/>
-          </a:prstGeom>
-          <a:noFill/>
-        </p:spPr>
-        <p:txBody>
-          <a:bodyPr wrap="square" lIns="0" rIns="0" tIns="0" bIns="0" anchor="t">
-            <a:spAutoFit/>
-          </a:bodyPr>
-          <a:lstStyle/>
-          <a:p>
-            <a:pPr algn="l">
-              <a:lnSpc>
-                <a:spcPct val="120000"/>
-              </a:lnSpc>
-            </a:pPr>
-            <a:r>
-              <a:rPr sz="1600" b="0" i="1">
+            <a:off x="822960" y="5897880"/>
+            <a:ext cx="10515600" cy="365760"/>
+          </a:xfrm>
+          <a:prstGeom prst="rect">
+            <a:avLst/>
+          </a:prstGeom>
+          <a:noFill/>
+        </p:spPr>
+        <p:txBody>
+          <a:bodyPr wrap="square" lIns="0" rIns="0" tIns="0" bIns="0" anchor="t">
+            <a:spAutoFit/>
+          </a:bodyPr>
+          <a:lstStyle/>
+          <a:p>
+            <a:pPr algn="l">
+              <a:lnSpc>
+                <a:spcPct val="120000"/>
+              </a:lnSpc>
+            </a:pPr>
+            <a:r>
+              <a:rPr sz="1700" b="0" i="1">
                 <a:solidFill>
                   <a:srgbClr val="D97757"/>
                 </a:solidFill>
@@ -17811,27 +17811,27 @@
         </p:nvSpPr>
         <p:spPr>
           <a:xfrm>
-            <a:off x="548640" y="6446520"/>
-            <a:ext cx="7315200" cy="274320"/>
-          </a:xfrm>
-          <a:prstGeom prst="rect">
-            <a:avLst/>
-          </a:prstGeom>
-          <a:noFill/>
-        </p:spPr>
-        <p:txBody>
-          <a:bodyPr wrap="square" lIns="0" rIns="0" tIns="0" bIns="0" anchor="t">
-            <a:spAutoFit/>
-          </a:bodyPr>
-          <a:lstStyle/>
-          <a:p>
-            <a:pPr algn="l">
-              <a:lnSpc>
-                <a:spcPct val="120000"/>
-              </a:lnSpc>
-            </a:pPr>
-            <a:r>
-              <a:rPr sz="1000" b="0" i="1">
+            <a:off x="548640" y="6355080"/>
+            <a:ext cx="7315200" cy="365760"/>
+          </a:xfrm>
+          <a:prstGeom prst="rect">
+            <a:avLst/>
+          </a:prstGeom>
+          <a:noFill/>
+        </p:spPr>
+        <p:txBody>
+          <a:bodyPr wrap="square" lIns="0" rIns="0" tIns="0" bIns="0" anchor="t">
+            <a:spAutoFit/>
+          </a:bodyPr>
+          <a:lstStyle/>
+          <a:p>
+            <a:pPr algn="l">
+              <a:lnSpc>
+                <a:spcPct val="120000"/>
+              </a:lnSpc>
+            </a:pPr>
+            <a:r>
+              <a:rPr sz="1300" b="0" i="1">
                 <a:solidFill>
                   <a:srgbClr val="5A6478"/>
                 </a:solidFill>
@@ -17850,8 +17850,8 @@
         </p:nvSpPr>
         <p:spPr>
           <a:xfrm>
-            <a:off x="7315200" y="6446520"/>
-            <a:ext cx="4389120" cy="274320"/>
+            <a:off x="6858000" y="6355080"/>
+            <a:ext cx="4846320" cy="365760"/>
           </a:xfrm>
           <a:prstGeom prst="rect">
             <a:avLst/>
@@ -17870,7 +17870,7 @@
               </a:lnSpc>
             </a:pPr>
             <a:r>
-              <a:rPr sz="900" b="1" i="0" spc="200">
+              <a:rPr sz="1200" b="1" i="0" spc="200">
                 <a:solidFill>
                   <a:srgbClr val="5A6478"/>
                 </a:solidFill>
@@ -17987,7 +17987,7 @@
           <a:p>
             <a:pPr algn="ctr"/>
             <a:r>
-              <a:rPr sz="1100" b="1" spc="280">
+              <a:rPr sz="1500" b="1" spc="280">
                 <a:solidFill>
                   <a:srgbClr val="F4EBDC"/>
                 </a:solidFill>
@@ -18118,27 +18118,27 @@
         </p:nvSpPr>
         <p:spPr>
           <a:xfrm>
-            <a:off x="548640" y="6446520"/>
-            <a:ext cx="7315200" cy="274320"/>
-          </a:xfrm>
-          <a:prstGeom prst="rect">
-            <a:avLst/>
-          </a:prstGeom>
-          <a:noFill/>
-        </p:spPr>
-        <p:txBody>
-          <a:bodyPr wrap="square" lIns="0" rIns="0" tIns="0" bIns="0" anchor="t">
-            <a:spAutoFit/>
-          </a:bodyPr>
-          <a:lstStyle/>
-          <a:p>
-            <a:pPr algn="l">
-              <a:lnSpc>
-                <a:spcPct val="120000"/>
-              </a:lnSpc>
-            </a:pPr>
-            <a:r>
-              <a:rPr sz="1000" b="0" i="1">
+            <a:off x="548640" y="6355080"/>
+            <a:ext cx="7315200" cy="365760"/>
+          </a:xfrm>
+          <a:prstGeom prst="rect">
+            <a:avLst/>
+          </a:prstGeom>
+          <a:noFill/>
+        </p:spPr>
+        <p:txBody>
+          <a:bodyPr wrap="square" lIns="0" rIns="0" tIns="0" bIns="0" anchor="t">
+            <a:spAutoFit/>
+          </a:bodyPr>
+          <a:lstStyle/>
+          <a:p>
+            <a:pPr algn="l">
+              <a:lnSpc>
+                <a:spcPct val="120000"/>
+              </a:lnSpc>
+            </a:pPr>
+            <a:r>
+              <a:rPr sz="1300" b="0" i="1">
                 <a:solidFill>
                   <a:srgbClr val="5A6478"/>
                 </a:solidFill>
@@ -18157,8 +18157,8 @@
         </p:nvSpPr>
         <p:spPr>
           <a:xfrm>
-            <a:off x="7315200" y="6446520"/>
-            <a:ext cx="4389120" cy="274320"/>
+            <a:off x="6858000" y="6355080"/>
+            <a:ext cx="4846320" cy="365760"/>
           </a:xfrm>
           <a:prstGeom prst="rect">
             <a:avLst/>
@@ -18177,7 +18177,7 @@
               </a:lnSpc>
             </a:pPr>
             <a:r>
-              <a:rPr sz="900" b="1" i="0" spc="200">
+              <a:rPr sz="1200" b="1" i="0" spc="200">
                 <a:solidFill>
                   <a:srgbClr val="5A6478"/>
                 </a:solidFill>
@@ -18294,7 +18294,7 @@
           <a:p>
             <a:pPr algn="ctr"/>
             <a:r>
-              <a:rPr sz="1100" b="1" spc="280">
+              <a:rPr sz="1500" b="1" spc="280">
                 <a:solidFill>
                   <a:srgbClr val="FFFFFF"/>
                 </a:solidFill>
@@ -18370,27 +18370,27 @@
         </p:nvSpPr>
         <p:spPr>
           <a:xfrm>
-            <a:off x="548640" y="6446520"/>
-            <a:ext cx="7315200" cy="274320"/>
-          </a:xfrm>
-          <a:prstGeom prst="rect">
-            <a:avLst/>
-          </a:prstGeom>
-          <a:noFill/>
-        </p:spPr>
-        <p:txBody>
-          <a:bodyPr wrap="square" lIns="0" rIns="0" tIns="0" bIns="0" anchor="t">
-            <a:spAutoFit/>
-          </a:bodyPr>
-          <a:lstStyle/>
-          <a:p>
-            <a:pPr algn="l">
-              <a:lnSpc>
-                <a:spcPct val="120000"/>
-              </a:lnSpc>
-            </a:pPr>
-            <a:r>
-              <a:rPr sz="1000" b="0" i="1">
+            <a:off x="548640" y="6355080"/>
+            <a:ext cx="7315200" cy="365760"/>
+          </a:xfrm>
+          <a:prstGeom prst="rect">
+            <a:avLst/>
+          </a:prstGeom>
+          <a:noFill/>
+        </p:spPr>
+        <p:txBody>
+          <a:bodyPr wrap="square" lIns="0" rIns="0" tIns="0" bIns="0" anchor="t">
+            <a:spAutoFit/>
+          </a:bodyPr>
+          <a:lstStyle/>
+          <a:p>
+            <a:pPr algn="l">
+              <a:lnSpc>
+                <a:spcPct val="120000"/>
+              </a:lnSpc>
+            </a:pPr>
+            <a:r>
+              <a:rPr sz="1300" b="0" i="1">
                 <a:solidFill>
                   <a:srgbClr val="5A6478"/>
                 </a:solidFill>
@@ -18409,8 +18409,8 @@
         </p:nvSpPr>
         <p:spPr>
           <a:xfrm>
-            <a:off x="7315200" y="6446520"/>
-            <a:ext cx="4389120" cy="274320"/>
+            <a:off x="6858000" y="6355080"/>
+            <a:ext cx="4846320" cy="365760"/>
           </a:xfrm>
           <a:prstGeom prst="rect">
             <a:avLst/>
@@ -18429,7 +18429,7 @@
               </a:lnSpc>
             </a:pPr>
             <a:r>
-              <a:rPr sz="900" b="1" i="0" spc="200">
+              <a:rPr sz="1200" b="1" i="0" spc="200">
                 <a:solidFill>
                   <a:srgbClr val="5A6478"/>
                 </a:solidFill>
@@ -18510,27 +18510,27 @@
         </p:nvSpPr>
         <p:spPr>
           <a:xfrm>
-            <a:off x="822960" y="548640"/>
-            <a:ext cx="3657600" cy="320040"/>
-          </a:xfrm>
-          <a:prstGeom prst="rect">
-            <a:avLst/>
-          </a:prstGeom>
-          <a:noFill/>
-        </p:spPr>
-        <p:txBody>
-          <a:bodyPr wrap="square" lIns="0" rIns="0" tIns="0" bIns="0" anchor="t">
-            <a:spAutoFit/>
-          </a:bodyPr>
-          <a:lstStyle/>
-          <a:p>
-            <a:pPr algn="l">
-              <a:lnSpc>
-                <a:spcPct val="120000"/>
-              </a:lnSpc>
-            </a:pPr>
-            <a:r>
-              <a:rPr sz="1100" b="1" i="0" spc="240">
+            <a:off x="822960" y="777240"/>
+            <a:ext cx="5486400" cy="457200"/>
+          </a:xfrm>
+          <a:prstGeom prst="rect">
+            <a:avLst/>
+          </a:prstGeom>
+          <a:noFill/>
+        </p:spPr>
+        <p:txBody>
+          <a:bodyPr wrap="square" lIns="0" rIns="0" tIns="0" bIns="0" anchor="t">
+            <a:spAutoFit/>
+          </a:bodyPr>
+          <a:lstStyle/>
+          <a:p>
+            <a:pPr algn="l">
+              <a:lnSpc>
+                <a:spcPct val="120000"/>
+              </a:lnSpc>
+            </a:pPr>
+            <a:r>
+              <a:rPr sz="1600" b="1" i="0" spc="220">
                 <a:solidFill>
                   <a:srgbClr val="D97757"/>
                 </a:solidFill>
@@ -18549,7 +18549,7 @@
         </p:nvSpPr>
         <p:spPr>
           <a:xfrm>
-            <a:off x="822960" y="1005840"/>
+            <a:off x="822960" y="1417320"/>
             <a:ext cx="548640" cy="548640"/>
           </a:xfrm>
           <a:prstGeom prst="rect">
@@ -18588,7 +18588,7 @@
         </p:nvSpPr>
         <p:spPr>
           <a:xfrm>
-            <a:off x="1417320" y="960120"/>
+            <a:off x="1417320" y="1371600"/>
             <a:ext cx="10058400" cy="1188720"/>
           </a:xfrm>
           <a:prstGeom prst="rect">
@@ -18627,7 +18627,7 @@
         </p:nvSpPr>
         <p:spPr>
           <a:xfrm>
-            <a:off x="822960" y="2286000"/>
+            <a:off x="822960" y="2697480"/>
             <a:ext cx="10515600" cy="548640"/>
           </a:xfrm>
           <a:prstGeom prst="rect">
@@ -18647,7 +18647,7 @@
               </a:lnSpc>
             </a:pPr>
             <a:r>
-              <a:rPr sz="2000" b="0" i="1">
+              <a:rPr sz="2200" b="0" i="1">
                 <a:solidFill>
                   <a:srgbClr val="0E2746"/>
                 </a:solidFill>
@@ -18666,7 +18666,7 @@
         </p:nvSpPr>
         <p:spPr>
           <a:xfrm>
-            <a:off x="1097280" y="3394710"/>
+            <a:off x="1097280" y="3714750"/>
             <a:ext cx="118872" cy="118872"/>
           </a:xfrm>
           <a:prstGeom prst="ellipse">
@@ -18710,7 +18710,7 @@
         </p:nvSpPr>
         <p:spPr>
           <a:xfrm>
-            <a:off x="1408176" y="3291840"/>
+            <a:off x="1408176" y="3611880"/>
             <a:ext cx="10058400" cy="502920"/>
           </a:xfrm>
           <a:prstGeom prst="rect">
@@ -18749,7 +18749,7 @@
         </p:nvSpPr>
         <p:spPr>
           <a:xfrm>
-            <a:off x="1097280" y="3943350"/>
+            <a:off x="1097280" y="4263390"/>
             <a:ext cx="118872" cy="118872"/>
           </a:xfrm>
           <a:prstGeom prst="ellipse">
@@ -18793,7 +18793,7 @@
         </p:nvSpPr>
         <p:spPr>
           <a:xfrm>
-            <a:off x="1408176" y="3840480"/>
+            <a:off x="1408176" y="4160520"/>
             <a:ext cx="10058400" cy="502920"/>
           </a:xfrm>
           <a:prstGeom prst="rect">
@@ -18832,7 +18832,7 @@
         </p:nvSpPr>
         <p:spPr>
           <a:xfrm>
-            <a:off x="1097280" y="4491990"/>
+            <a:off x="1097280" y="4812030"/>
             <a:ext cx="118872" cy="118872"/>
           </a:xfrm>
           <a:prstGeom prst="ellipse">
@@ -18876,7 +18876,7 @@
         </p:nvSpPr>
         <p:spPr>
           <a:xfrm>
-            <a:off x="1408176" y="4389120"/>
+            <a:off x="1408176" y="4709160"/>
             <a:ext cx="10058400" cy="502920"/>
           </a:xfrm>
           <a:prstGeom prst="rect">
@@ -18915,7 +18915,7 @@
         </p:nvSpPr>
         <p:spPr>
           <a:xfrm>
-            <a:off x="1097280" y="5040629"/>
+            <a:off x="1097280" y="5360669"/>
             <a:ext cx="118872" cy="118872"/>
           </a:xfrm>
           <a:prstGeom prst="ellipse">
@@ -18959,7 +18959,7 @@
         </p:nvSpPr>
         <p:spPr>
           <a:xfrm>
-            <a:off x="1408176" y="4937759"/>
+            <a:off x="1408176" y="5257799"/>
             <a:ext cx="10058400" cy="502920"/>
           </a:xfrm>
           <a:prstGeom prst="rect">
@@ -18998,27 +18998,27 @@
         </p:nvSpPr>
         <p:spPr>
           <a:xfrm>
-            <a:off x="548640" y="6446520"/>
-            <a:ext cx="7315200" cy="274320"/>
-          </a:xfrm>
-          <a:prstGeom prst="rect">
-            <a:avLst/>
-          </a:prstGeom>
-          <a:noFill/>
-        </p:spPr>
-        <p:txBody>
-          <a:bodyPr wrap="square" lIns="0" rIns="0" tIns="0" bIns="0" anchor="t">
-            <a:spAutoFit/>
-          </a:bodyPr>
-          <a:lstStyle/>
-          <a:p>
-            <a:pPr algn="l">
-              <a:lnSpc>
-                <a:spcPct val="120000"/>
-              </a:lnSpc>
-            </a:pPr>
-            <a:r>
-              <a:rPr sz="1000" b="0" i="1">
+            <a:off x="548640" y="6355080"/>
+            <a:ext cx="7315200" cy="365760"/>
+          </a:xfrm>
+          <a:prstGeom prst="rect">
+            <a:avLst/>
+          </a:prstGeom>
+          <a:noFill/>
+        </p:spPr>
+        <p:txBody>
+          <a:bodyPr wrap="square" lIns="0" rIns="0" tIns="0" bIns="0" anchor="t">
+            <a:spAutoFit/>
+          </a:bodyPr>
+          <a:lstStyle/>
+          <a:p>
+            <a:pPr algn="l">
+              <a:lnSpc>
+                <a:spcPct val="120000"/>
+              </a:lnSpc>
+            </a:pPr>
+            <a:r>
+              <a:rPr sz="1300" b="0" i="1">
                 <a:solidFill>
                   <a:srgbClr val="5A6478"/>
                 </a:solidFill>
@@ -19037,8 +19037,8 @@
         </p:nvSpPr>
         <p:spPr>
           <a:xfrm>
-            <a:off x="7315200" y="6446520"/>
-            <a:ext cx="4389120" cy="274320"/>
+            <a:off x="6858000" y="6355080"/>
+            <a:ext cx="4846320" cy="365760"/>
           </a:xfrm>
           <a:prstGeom prst="rect">
             <a:avLst/>
@@ -19057,7 +19057,7 @@
               </a:lnSpc>
             </a:pPr>
             <a:r>
-              <a:rPr sz="900" b="1" i="0" spc="200">
+              <a:rPr sz="1200" b="1" i="0" spc="200">
                 <a:solidFill>
                   <a:srgbClr val="5A6478"/>
                 </a:solidFill>
@@ -19138,27 +19138,27 @@
         </p:nvSpPr>
         <p:spPr>
           <a:xfrm>
-            <a:off x="822960" y="548640"/>
-            <a:ext cx="3657600" cy="320040"/>
-          </a:xfrm>
-          <a:prstGeom prst="rect">
-            <a:avLst/>
-          </a:prstGeom>
-          <a:noFill/>
-        </p:spPr>
-        <p:txBody>
-          <a:bodyPr wrap="square" lIns="0" rIns="0" tIns="0" bIns="0" anchor="t">
-            <a:spAutoFit/>
-          </a:bodyPr>
-          <a:lstStyle/>
-          <a:p>
-            <a:pPr algn="l">
-              <a:lnSpc>
-                <a:spcPct val="120000"/>
-              </a:lnSpc>
-            </a:pPr>
-            <a:r>
-              <a:rPr sz="1100" b="1" i="0" spc="240">
+            <a:off x="822960" y="777240"/>
+            <a:ext cx="5486400" cy="457200"/>
+          </a:xfrm>
+          <a:prstGeom prst="rect">
+            <a:avLst/>
+          </a:prstGeom>
+          <a:noFill/>
+        </p:spPr>
+        <p:txBody>
+          <a:bodyPr wrap="square" lIns="0" rIns="0" tIns="0" bIns="0" anchor="t">
+            <a:spAutoFit/>
+          </a:bodyPr>
+          <a:lstStyle/>
+          <a:p>
+            <a:pPr algn="l">
+              <a:lnSpc>
+                <a:spcPct val="120000"/>
+              </a:lnSpc>
+            </a:pPr>
+            <a:r>
+              <a:rPr sz="1600" b="1" i="0" spc="220">
                 <a:solidFill>
                   <a:srgbClr val="D97757"/>
                 </a:solidFill>
@@ -19177,7 +19177,7 @@
         </p:nvSpPr>
         <p:spPr>
           <a:xfrm>
-            <a:off x="822960" y="1005840"/>
+            <a:off x="822960" y="1417320"/>
             <a:ext cx="548640" cy="548640"/>
           </a:xfrm>
           <a:prstGeom prst="rect">
@@ -19216,7 +19216,7 @@
         </p:nvSpPr>
         <p:spPr>
           <a:xfrm>
-            <a:off x="1417320" y="960120"/>
+            <a:off x="1417320" y="1371600"/>
             <a:ext cx="10058400" cy="1188720"/>
           </a:xfrm>
           <a:prstGeom prst="rect">
@@ -19255,7 +19255,7 @@
         </p:nvSpPr>
         <p:spPr>
           <a:xfrm>
-            <a:off x="822960" y="2286000"/>
+            <a:off x="822960" y="2697480"/>
             <a:ext cx="10515600" cy="548640"/>
           </a:xfrm>
           <a:prstGeom prst="rect">
@@ -19275,7 +19275,7 @@
               </a:lnSpc>
             </a:pPr>
             <a:r>
-              <a:rPr sz="2000" b="0" i="1">
+              <a:rPr sz="2200" b="0" i="1">
                 <a:solidFill>
                   <a:srgbClr val="0E2746"/>
                 </a:solidFill>
@@ -19294,7 +19294,7 @@
         </p:nvSpPr>
         <p:spPr>
           <a:xfrm>
-            <a:off x="1097280" y="3394710"/>
+            <a:off x="1097280" y="3714750"/>
             <a:ext cx="118872" cy="118872"/>
           </a:xfrm>
           <a:prstGeom prst="ellipse">
@@ -19338,7 +19338,7 @@
         </p:nvSpPr>
         <p:spPr>
           <a:xfrm>
-            <a:off x="1408176" y="3291840"/>
+            <a:off x="1408176" y="3611880"/>
             <a:ext cx="10058400" cy="502920"/>
           </a:xfrm>
           <a:prstGeom prst="rect">
@@ -19377,7 +19377,7 @@
         </p:nvSpPr>
         <p:spPr>
           <a:xfrm>
-            <a:off x="1097280" y="3943350"/>
+            <a:off x="1097280" y="4263390"/>
             <a:ext cx="118872" cy="118872"/>
           </a:xfrm>
           <a:prstGeom prst="ellipse">
@@ -19421,7 +19421,7 @@
         </p:nvSpPr>
         <p:spPr>
           <a:xfrm>
-            <a:off x="1408176" y="3840480"/>
+            <a:off x="1408176" y="4160520"/>
             <a:ext cx="10058400" cy="502920"/>
           </a:xfrm>
           <a:prstGeom prst="rect">
@@ -19460,7 +19460,7 @@
         </p:nvSpPr>
         <p:spPr>
           <a:xfrm>
-            <a:off x="1097280" y="4491990"/>
+            <a:off x="1097280" y="4812030"/>
             <a:ext cx="118872" cy="118872"/>
           </a:xfrm>
           <a:prstGeom prst="ellipse">
@@ -19504,7 +19504,7 @@
         </p:nvSpPr>
         <p:spPr>
           <a:xfrm>
-            <a:off x="1408176" y="4389120"/>
+            <a:off x="1408176" y="4709160"/>
             <a:ext cx="10058400" cy="502920"/>
           </a:xfrm>
           <a:prstGeom prst="rect">
@@ -19543,7 +19543,7 @@
         </p:nvSpPr>
         <p:spPr>
           <a:xfrm>
-            <a:off x="1097280" y="5040629"/>
+            <a:off x="1097280" y="5360669"/>
             <a:ext cx="118872" cy="118872"/>
           </a:xfrm>
           <a:prstGeom prst="ellipse">
@@ -19587,7 +19587,7 @@
         </p:nvSpPr>
         <p:spPr>
           <a:xfrm>
-            <a:off x="1408176" y="4937759"/>
+            <a:off x="1408176" y="5257799"/>
             <a:ext cx="10058400" cy="502920"/>
           </a:xfrm>
           <a:prstGeom prst="rect">
@@ -19626,27 +19626,27 @@
         </p:nvSpPr>
         <p:spPr>
           <a:xfrm>
-            <a:off x="548640" y="6446520"/>
-            <a:ext cx="7315200" cy="274320"/>
-          </a:xfrm>
-          <a:prstGeom prst="rect">
-            <a:avLst/>
-          </a:prstGeom>
-          <a:noFill/>
-        </p:spPr>
-        <p:txBody>
-          <a:bodyPr wrap="square" lIns="0" rIns="0" tIns="0" bIns="0" anchor="t">
-            <a:spAutoFit/>
-          </a:bodyPr>
-          <a:lstStyle/>
-          <a:p>
-            <a:pPr algn="l">
-              <a:lnSpc>
-                <a:spcPct val="120000"/>
-              </a:lnSpc>
-            </a:pPr>
-            <a:r>
-              <a:rPr sz="1000" b="0" i="1">
+            <a:off x="548640" y="6355080"/>
+            <a:ext cx="7315200" cy="365760"/>
+          </a:xfrm>
+          <a:prstGeom prst="rect">
+            <a:avLst/>
+          </a:prstGeom>
+          <a:noFill/>
+        </p:spPr>
+        <p:txBody>
+          <a:bodyPr wrap="square" lIns="0" rIns="0" tIns="0" bIns="0" anchor="t">
+            <a:spAutoFit/>
+          </a:bodyPr>
+          <a:lstStyle/>
+          <a:p>
+            <a:pPr algn="l">
+              <a:lnSpc>
+                <a:spcPct val="120000"/>
+              </a:lnSpc>
+            </a:pPr>
+            <a:r>
+              <a:rPr sz="1300" b="0" i="1">
                 <a:solidFill>
                   <a:srgbClr val="5A6478"/>
                 </a:solidFill>
@@ -19665,8 +19665,8 @@
         </p:nvSpPr>
         <p:spPr>
           <a:xfrm>
-            <a:off x="7315200" y="6446520"/>
-            <a:ext cx="4389120" cy="274320"/>
+            <a:off x="6858000" y="6355080"/>
+            <a:ext cx="4846320" cy="365760"/>
           </a:xfrm>
           <a:prstGeom prst="rect">
             <a:avLst/>
@@ -19685,7 +19685,7 @@
               </a:lnSpc>
             </a:pPr>
             <a:r>
-              <a:rPr sz="900" b="1" i="0" spc="200">
+              <a:rPr sz="1200" b="1" i="0" spc="200">
                 <a:solidFill>
                   <a:srgbClr val="5A6478"/>
                 </a:solidFill>
@@ -19766,27 +19766,27 @@
         </p:nvSpPr>
         <p:spPr>
           <a:xfrm>
-            <a:off x="822960" y="548640"/>
-            <a:ext cx="3657600" cy="320040"/>
-          </a:xfrm>
-          <a:prstGeom prst="rect">
-            <a:avLst/>
-          </a:prstGeom>
-          <a:noFill/>
-        </p:spPr>
-        <p:txBody>
-          <a:bodyPr wrap="square" lIns="0" rIns="0" tIns="0" bIns="0" anchor="t">
-            <a:spAutoFit/>
-          </a:bodyPr>
-          <a:lstStyle/>
-          <a:p>
-            <a:pPr algn="l">
-              <a:lnSpc>
-                <a:spcPct val="120000"/>
-              </a:lnSpc>
-            </a:pPr>
-            <a:r>
-              <a:rPr sz="1100" b="1" i="0" spc="240">
+            <a:off x="822960" y="777240"/>
+            <a:ext cx="5486400" cy="457200"/>
+          </a:xfrm>
+          <a:prstGeom prst="rect">
+            <a:avLst/>
+          </a:prstGeom>
+          <a:noFill/>
+        </p:spPr>
+        <p:txBody>
+          <a:bodyPr wrap="square" lIns="0" rIns="0" tIns="0" bIns="0" anchor="t">
+            <a:spAutoFit/>
+          </a:bodyPr>
+          <a:lstStyle/>
+          <a:p>
+            <a:pPr algn="l">
+              <a:lnSpc>
+                <a:spcPct val="120000"/>
+              </a:lnSpc>
+            </a:pPr>
+            <a:r>
+              <a:rPr sz="1600" b="1" i="0" spc="220">
                 <a:solidFill>
                   <a:srgbClr val="D97757"/>
                 </a:solidFill>
@@ -19805,7 +19805,7 @@
         </p:nvSpPr>
         <p:spPr>
           <a:xfrm>
-            <a:off x="822960" y="1005840"/>
+            <a:off x="822960" y="1417320"/>
             <a:ext cx="548640" cy="548640"/>
           </a:xfrm>
           <a:prstGeom prst="rect">
@@ -19844,7 +19844,7 @@
         </p:nvSpPr>
         <p:spPr>
           <a:xfrm>
-            <a:off x="1417320" y="960120"/>
+            <a:off x="1417320" y="1371600"/>
             <a:ext cx="10058400" cy="1188720"/>
           </a:xfrm>
           <a:prstGeom prst="rect">
@@ -19883,7 +19883,7 @@
         </p:nvSpPr>
         <p:spPr>
           <a:xfrm>
-            <a:off x="822960" y="2286000"/>
+            <a:off x="822960" y="2697480"/>
             <a:ext cx="10515600" cy="548640"/>
           </a:xfrm>
           <a:prstGeom prst="rect">
@@ -19903,7 +19903,7 @@
               </a:lnSpc>
             </a:pPr>
             <a:r>
-              <a:rPr sz="2000" b="0" i="1">
+              <a:rPr sz="2200" b="0" i="1">
                 <a:solidFill>
                   <a:srgbClr val="0E2746"/>
                 </a:solidFill>
@@ -19922,7 +19922,7 @@
         </p:nvSpPr>
         <p:spPr>
           <a:xfrm>
-            <a:off x="1097280" y="3394710"/>
+            <a:off x="1097280" y="3714750"/>
             <a:ext cx="118872" cy="118872"/>
           </a:xfrm>
           <a:prstGeom prst="ellipse">
@@ -19966,7 +19966,7 @@
         </p:nvSpPr>
         <p:spPr>
           <a:xfrm>
-            <a:off x="1408176" y="3291840"/>
+            <a:off x="1408176" y="3611880"/>
             <a:ext cx="10058400" cy="502920"/>
           </a:xfrm>
           <a:prstGeom prst="rect">
@@ -20005,7 +20005,7 @@
         </p:nvSpPr>
         <p:spPr>
           <a:xfrm>
-            <a:off x="1097280" y="3943350"/>
+            <a:off x="1097280" y="4263390"/>
             <a:ext cx="118872" cy="118872"/>
           </a:xfrm>
           <a:prstGeom prst="ellipse">
@@ -20049,7 +20049,7 @@
         </p:nvSpPr>
         <p:spPr>
           <a:xfrm>
-            <a:off x="1408176" y="3840480"/>
+            <a:off x="1408176" y="4160520"/>
             <a:ext cx="10058400" cy="502920"/>
           </a:xfrm>
           <a:prstGeom prst="rect">
@@ -20088,7 +20088,7 @@
         </p:nvSpPr>
         <p:spPr>
           <a:xfrm>
-            <a:off x="1097280" y="4491990"/>
+            <a:off x="1097280" y="4812030"/>
             <a:ext cx="118872" cy="118872"/>
           </a:xfrm>
           <a:prstGeom prst="ellipse">
@@ -20132,7 +20132,7 @@
         </p:nvSpPr>
         <p:spPr>
           <a:xfrm>
-            <a:off x="1408176" y="4389120"/>
+            <a:off x="1408176" y="4709160"/>
             <a:ext cx="10058400" cy="502920"/>
           </a:xfrm>
           <a:prstGeom prst="rect">
@@ -20171,27 +20171,27 @@
         </p:nvSpPr>
         <p:spPr>
           <a:xfrm>
-            <a:off x="548640" y="6446520"/>
-            <a:ext cx="7315200" cy="274320"/>
-          </a:xfrm>
-          <a:prstGeom prst="rect">
-            <a:avLst/>
-          </a:prstGeom>
-          <a:noFill/>
-        </p:spPr>
-        <p:txBody>
-          <a:bodyPr wrap="square" lIns="0" rIns="0" tIns="0" bIns="0" anchor="t">
-            <a:spAutoFit/>
-          </a:bodyPr>
-          <a:lstStyle/>
-          <a:p>
-            <a:pPr algn="l">
-              <a:lnSpc>
-                <a:spcPct val="120000"/>
-              </a:lnSpc>
-            </a:pPr>
-            <a:r>
-              <a:rPr sz="1000" b="0" i="1">
+            <a:off x="548640" y="6355080"/>
+            <a:ext cx="7315200" cy="365760"/>
+          </a:xfrm>
+          <a:prstGeom prst="rect">
+            <a:avLst/>
+          </a:prstGeom>
+          <a:noFill/>
+        </p:spPr>
+        <p:txBody>
+          <a:bodyPr wrap="square" lIns="0" rIns="0" tIns="0" bIns="0" anchor="t">
+            <a:spAutoFit/>
+          </a:bodyPr>
+          <a:lstStyle/>
+          <a:p>
+            <a:pPr algn="l">
+              <a:lnSpc>
+                <a:spcPct val="120000"/>
+              </a:lnSpc>
+            </a:pPr>
+            <a:r>
+              <a:rPr sz="1300" b="0" i="1">
                 <a:solidFill>
                   <a:srgbClr val="5A6478"/>
                 </a:solidFill>
@@ -20210,8 +20210,8 @@
         </p:nvSpPr>
         <p:spPr>
           <a:xfrm>
-            <a:off x="7315200" y="6446520"/>
-            <a:ext cx="4389120" cy="274320"/>
+            <a:off x="6858000" y="6355080"/>
+            <a:ext cx="4846320" cy="365760"/>
           </a:xfrm>
           <a:prstGeom prst="rect">
             <a:avLst/>
@@ -20230,7 +20230,7 @@
               </a:lnSpc>
             </a:pPr>
             <a:r>
-              <a:rPr sz="900" b="1" i="0" spc="200">
+              <a:rPr sz="1200" b="1" i="0" spc="200">
                 <a:solidFill>
                   <a:srgbClr val="5A6478"/>
                 </a:solidFill>
@@ -20311,27 +20311,27 @@
         </p:nvSpPr>
         <p:spPr>
           <a:xfrm>
-            <a:off x="822960" y="548640"/>
-            <a:ext cx="3657600" cy="320040"/>
-          </a:xfrm>
-          <a:prstGeom prst="rect">
-            <a:avLst/>
-          </a:prstGeom>
-          <a:noFill/>
-        </p:spPr>
-        <p:txBody>
-          <a:bodyPr wrap="square" lIns="0" rIns="0" tIns="0" bIns="0" anchor="t">
-            <a:spAutoFit/>
-          </a:bodyPr>
-          <a:lstStyle/>
-          <a:p>
-            <a:pPr algn="l">
-              <a:lnSpc>
-                <a:spcPct val="120000"/>
-              </a:lnSpc>
-            </a:pPr>
-            <a:r>
-              <a:rPr sz="1100" b="1" i="0" spc="240">
+            <a:off x="822960" y="777240"/>
+            <a:ext cx="5486400" cy="457200"/>
+          </a:xfrm>
+          <a:prstGeom prst="rect">
+            <a:avLst/>
+          </a:prstGeom>
+          <a:noFill/>
+        </p:spPr>
+        <p:txBody>
+          <a:bodyPr wrap="square" lIns="0" rIns="0" tIns="0" bIns="0" anchor="t">
+            <a:spAutoFit/>
+          </a:bodyPr>
+          <a:lstStyle/>
+          <a:p>
+            <a:pPr algn="l">
+              <a:lnSpc>
+                <a:spcPct val="120000"/>
+              </a:lnSpc>
+            </a:pPr>
+            <a:r>
+              <a:rPr sz="1600" b="1" i="0" spc="220">
                 <a:solidFill>
                   <a:srgbClr val="D97757"/>
                 </a:solidFill>
@@ -20350,7 +20350,7 @@
         </p:nvSpPr>
         <p:spPr>
           <a:xfrm>
-            <a:off x="822960" y="1005840"/>
+            <a:off x="822960" y="1417320"/>
             <a:ext cx="548640" cy="548640"/>
           </a:xfrm>
           <a:prstGeom prst="rect">
@@ -20389,7 +20389,7 @@
         </p:nvSpPr>
         <p:spPr>
           <a:xfrm>
-            <a:off x="1417320" y="960120"/>
+            <a:off x="1417320" y="1371600"/>
             <a:ext cx="10058400" cy="1188720"/>
           </a:xfrm>
           <a:prstGeom prst="rect">
@@ -20428,7 +20428,7 @@
         </p:nvSpPr>
         <p:spPr>
           <a:xfrm>
-            <a:off x="822960" y="2286000"/>
+            <a:off x="822960" y="2697480"/>
             <a:ext cx="10515600" cy="548640"/>
           </a:xfrm>
           <a:prstGeom prst="rect">
@@ -20448,7 +20448,7 @@
               </a:lnSpc>
             </a:pPr>
             <a:r>
-              <a:rPr sz="2000" b="0" i="1">
+              <a:rPr sz="2200" b="0" i="1">
                 <a:solidFill>
                   <a:srgbClr val="0E2746"/>
                 </a:solidFill>
@@ -20467,7 +20467,7 @@
         </p:nvSpPr>
         <p:spPr>
           <a:xfrm>
-            <a:off x="1097280" y="3394710"/>
+            <a:off x="1097280" y="3714750"/>
             <a:ext cx="118872" cy="118872"/>
           </a:xfrm>
           <a:prstGeom prst="ellipse">
@@ -20511,7 +20511,7 @@
         </p:nvSpPr>
         <p:spPr>
           <a:xfrm>
-            <a:off x="1408176" y="3291840"/>
+            <a:off x="1408176" y="3611880"/>
             <a:ext cx="10058400" cy="502920"/>
           </a:xfrm>
           <a:prstGeom prst="rect">
@@ -20550,7 +20550,7 @@
         </p:nvSpPr>
         <p:spPr>
           <a:xfrm>
-            <a:off x="1097280" y="3943350"/>
+            <a:off x="1097280" y="4263390"/>
             <a:ext cx="118872" cy="118872"/>
           </a:xfrm>
           <a:prstGeom prst="ellipse">
@@ -20594,7 +20594,7 @@
         </p:nvSpPr>
         <p:spPr>
           <a:xfrm>
-            <a:off x="1408176" y="3840480"/>
+            <a:off x="1408176" y="4160520"/>
             <a:ext cx="10058400" cy="502920"/>
           </a:xfrm>
           <a:prstGeom prst="rect">
@@ -20633,7 +20633,7 @@
         </p:nvSpPr>
         <p:spPr>
           <a:xfrm>
-            <a:off x="1097280" y="4491990"/>
+            <a:off x="1097280" y="4812030"/>
             <a:ext cx="118872" cy="118872"/>
           </a:xfrm>
           <a:prstGeom prst="ellipse">
@@ -20677,7 +20677,7 @@
         </p:nvSpPr>
         <p:spPr>
           <a:xfrm>
-            <a:off x="1408176" y="4389120"/>
+            <a:off x="1408176" y="4709160"/>
             <a:ext cx="10058400" cy="502920"/>
           </a:xfrm>
           <a:prstGeom prst="rect">
@@ -20716,27 +20716,27 @@
         </p:nvSpPr>
         <p:spPr>
           <a:xfrm>
-            <a:off x="548640" y="6446520"/>
-            <a:ext cx="7315200" cy="274320"/>
-          </a:xfrm>
-          <a:prstGeom prst="rect">
-            <a:avLst/>
-          </a:prstGeom>
-          <a:noFill/>
-        </p:spPr>
-        <p:txBody>
-          <a:bodyPr wrap="square" lIns="0" rIns="0" tIns="0" bIns="0" anchor="t">
-            <a:spAutoFit/>
-          </a:bodyPr>
-          <a:lstStyle/>
-          <a:p>
-            <a:pPr algn="l">
-              <a:lnSpc>
-                <a:spcPct val="120000"/>
-              </a:lnSpc>
-            </a:pPr>
-            <a:r>
-              <a:rPr sz="1000" b="0" i="1">
+            <a:off x="548640" y="6355080"/>
+            <a:ext cx="7315200" cy="365760"/>
+          </a:xfrm>
+          <a:prstGeom prst="rect">
+            <a:avLst/>
+          </a:prstGeom>
+          <a:noFill/>
+        </p:spPr>
+        <p:txBody>
+          <a:bodyPr wrap="square" lIns="0" rIns="0" tIns="0" bIns="0" anchor="t">
+            <a:spAutoFit/>
+          </a:bodyPr>
+          <a:lstStyle/>
+          <a:p>
+            <a:pPr algn="l">
+              <a:lnSpc>
+                <a:spcPct val="120000"/>
+              </a:lnSpc>
+            </a:pPr>
+            <a:r>
+              <a:rPr sz="1300" b="0" i="1">
                 <a:solidFill>
                   <a:srgbClr val="5A6478"/>
                 </a:solidFill>
@@ -20755,8 +20755,8 @@
         </p:nvSpPr>
         <p:spPr>
           <a:xfrm>
-            <a:off x="7315200" y="6446520"/>
-            <a:ext cx="4389120" cy="274320"/>
+            <a:off x="6858000" y="6355080"/>
+            <a:ext cx="4846320" cy="365760"/>
           </a:xfrm>
           <a:prstGeom prst="rect">
             <a:avLst/>
@@ -20775,7 +20775,7 @@
               </a:lnSpc>
             </a:pPr>
             <a:r>
-              <a:rPr sz="900" b="1" i="0" spc="200">
+              <a:rPr sz="1200" b="1" i="0" spc="200">
                 <a:solidFill>
                   <a:srgbClr val="5A6478"/>
                 </a:solidFill>
@@ -20856,27 +20856,27 @@
         </p:nvSpPr>
         <p:spPr>
           <a:xfrm>
-            <a:off x="822960" y="1463040"/>
-            <a:ext cx="10515600" cy="365760"/>
-          </a:xfrm>
-          <a:prstGeom prst="rect">
-            <a:avLst/>
-          </a:prstGeom>
-          <a:noFill/>
-        </p:spPr>
-        <p:txBody>
-          <a:bodyPr wrap="square" lIns="0" rIns="0" tIns="0" bIns="0" anchor="t">
-            <a:spAutoFit/>
-          </a:bodyPr>
-          <a:lstStyle/>
-          <a:p>
-            <a:pPr algn="l">
-              <a:lnSpc>
-                <a:spcPct val="120000"/>
-              </a:lnSpc>
-            </a:pPr>
-            <a:r>
-              <a:rPr sz="1200" b="1" i="0" spc="240">
+            <a:off x="822960" y="777240"/>
+            <a:ext cx="10515600" cy="502920"/>
+          </a:xfrm>
+          <a:prstGeom prst="rect">
+            <a:avLst/>
+          </a:prstGeom>
+          <a:noFill/>
+        </p:spPr>
+        <p:txBody>
+          <a:bodyPr wrap="square" lIns="0" rIns="0" tIns="0" bIns="0" anchor="t">
+            <a:spAutoFit/>
+          </a:bodyPr>
+          <a:lstStyle/>
+          <a:p>
+            <a:pPr algn="l">
+              <a:lnSpc>
+                <a:spcPct val="120000"/>
+              </a:lnSpc>
+            </a:pPr>
+            <a:r>
+              <a:rPr sz="1800" b="1" i="0" spc="220">
                 <a:solidFill>
                   <a:srgbClr val="D97757"/>
                 </a:solidFill>
@@ -20895,7 +20895,7 @@
         </p:nvSpPr>
         <p:spPr>
           <a:xfrm>
-            <a:off x="822960" y="1965960"/>
+            <a:off x="822960" y="1554480"/>
             <a:ext cx="10515600" cy="2286000"/>
           </a:xfrm>
           <a:prstGeom prst="rect">
@@ -20943,7 +20943,7 @@
         </p:nvSpPr>
         <p:spPr>
           <a:xfrm>
-            <a:off x="822960" y="3840480"/>
+            <a:off x="822960" y="3429000"/>
             <a:ext cx="10515600" cy="3200400"/>
           </a:xfrm>
           <a:prstGeom prst="rect">
@@ -21001,27 +21001,27 @@
         </p:nvSpPr>
         <p:spPr>
           <a:xfrm>
-            <a:off x="548640" y="6446520"/>
-            <a:ext cx="7315200" cy="274320"/>
-          </a:xfrm>
-          <a:prstGeom prst="rect">
-            <a:avLst/>
-          </a:prstGeom>
-          <a:noFill/>
-        </p:spPr>
-        <p:txBody>
-          <a:bodyPr wrap="square" lIns="0" rIns="0" tIns="0" bIns="0" anchor="t">
-            <a:spAutoFit/>
-          </a:bodyPr>
-          <a:lstStyle/>
-          <a:p>
-            <a:pPr algn="l">
-              <a:lnSpc>
-                <a:spcPct val="120000"/>
-              </a:lnSpc>
-            </a:pPr>
-            <a:r>
-              <a:rPr sz="1000" b="0" i="1">
+            <a:off x="548640" y="6355080"/>
+            <a:ext cx="7315200" cy="365760"/>
+          </a:xfrm>
+          <a:prstGeom prst="rect">
+            <a:avLst/>
+          </a:prstGeom>
+          <a:noFill/>
+        </p:spPr>
+        <p:txBody>
+          <a:bodyPr wrap="square" lIns="0" rIns="0" tIns="0" bIns="0" anchor="t">
+            <a:spAutoFit/>
+          </a:bodyPr>
+          <a:lstStyle/>
+          <a:p>
+            <a:pPr algn="l">
+              <a:lnSpc>
+                <a:spcPct val="120000"/>
+              </a:lnSpc>
+            </a:pPr>
+            <a:r>
+              <a:rPr sz="1300" b="0" i="1">
                 <a:solidFill>
                   <a:srgbClr val="5A6478"/>
                 </a:solidFill>
@@ -21040,8 +21040,8 @@
         </p:nvSpPr>
         <p:spPr>
           <a:xfrm>
-            <a:off x="7315200" y="6446520"/>
-            <a:ext cx="4389120" cy="274320"/>
+            <a:off x="6858000" y="6355080"/>
+            <a:ext cx="4846320" cy="365760"/>
           </a:xfrm>
           <a:prstGeom prst="rect">
             <a:avLst/>
@@ -21060,7 +21060,7 @@
               </a:lnSpc>
             </a:pPr>
             <a:r>
-              <a:rPr sz="900" b="1" i="0" spc="200">
+              <a:rPr sz="1200" b="1" i="0" spc="200">
                 <a:solidFill>
                   <a:srgbClr val="5A6478"/>
                 </a:solidFill>
@@ -21177,7 +21177,7 @@
           <a:p>
             <a:pPr algn="ctr"/>
             <a:r>
-              <a:rPr sz="1100" b="1" spc="280">
+              <a:rPr sz="1500" b="1" spc="280">
                 <a:solidFill>
                   <a:srgbClr val="FFFFFF"/>
                 </a:solidFill>
@@ -21278,27 +21278,27 @@
         </p:nvSpPr>
         <p:spPr>
           <a:xfrm>
-            <a:off x="548640" y="6446520"/>
-            <a:ext cx="7315200" cy="274320"/>
-          </a:xfrm>
-          <a:prstGeom prst="rect">
-            <a:avLst/>
-          </a:prstGeom>
-          <a:noFill/>
-        </p:spPr>
-        <p:txBody>
-          <a:bodyPr wrap="square" lIns="0" rIns="0" tIns="0" bIns="0" anchor="t">
-            <a:spAutoFit/>
-          </a:bodyPr>
-          <a:lstStyle/>
-          <a:p>
-            <a:pPr algn="l">
-              <a:lnSpc>
-                <a:spcPct val="120000"/>
-              </a:lnSpc>
-            </a:pPr>
-            <a:r>
-              <a:rPr sz="1000" b="0" i="1">
+            <a:off x="548640" y="6355080"/>
+            <a:ext cx="7315200" cy="365760"/>
+          </a:xfrm>
+          <a:prstGeom prst="rect">
+            <a:avLst/>
+          </a:prstGeom>
+          <a:noFill/>
+        </p:spPr>
+        <p:txBody>
+          <a:bodyPr wrap="square" lIns="0" rIns="0" tIns="0" bIns="0" anchor="t">
+            <a:spAutoFit/>
+          </a:bodyPr>
+          <a:lstStyle/>
+          <a:p>
+            <a:pPr algn="l">
+              <a:lnSpc>
+                <a:spcPct val="120000"/>
+              </a:lnSpc>
+            </a:pPr>
+            <a:r>
+              <a:rPr sz="1300" b="0" i="1">
                 <a:solidFill>
                   <a:srgbClr val="FFFFFF"/>
                 </a:solidFill>
@@ -21317,8 +21317,8 @@
         </p:nvSpPr>
         <p:spPr>
           <a:xfrm>
-            <a:off x="7315200" y="6446520"/>
-            <a:ext cx="4389120" cy="274320"/>
+            <a:off x="6858000" y="6355080"/>
+            <a:ext cx="4846320" cy="365760"/>
           </a:xfrm>
           <a:prstGeom prst="rect">
             <a:avLst/>
@@ -21337,7 +21337,7 @@
               </a:lnSpc>
             </a:pPr>
             <a:r>
-              <a:rPr sz="900" b="1" i="0" spc="200">
+              <a:rPr sz="1200" b="1" i="0" spc="200">
                 <a:solidFill>
                   <a:srgbClr val="FFFFFF"/>
                 </a:solidFill>
@@ -21454,7 +21454,7 @@
           <a:p>
             <a:pPr algn="ctr"/>
             <a:r>
-              <a:rPr sz="1200" b="1" spc="260">
+              <a:rPr sz="1600" b="1" spc="260">
                 <a:solidFill>
                   <a:srgbClr val="FFFFFF"/>
                 </a:solidFill>
@@ -21576,27 +21576,27 @@
         </p:nvSpPr>
         <p:spPr>
           <a:xfrm>
-            <a:off x="548640" y="6446520"/>
-            <a:ext cx="7315200" cy="274320"/>
-          </a:xfrm>
-          <a:prstGeom prst="rect">
-            <a:avLst/>
-          </a:prstGeom>
-          <a:noFill/>
-        </p:spPr>
-        <p:txBody>
-          <a:bodyPr wrap="square" lIns="0" rIns="0" tIns="0" bIns="0" anchor="t">
-            <a:spAutoFit/>
-          </a:bodyPr>
-          <a:lstStyle/>
-          <a:p>
-            <a:pPr algn="l">
-              <a:lnSpc>
-                <a:spcPct val="120000"/>
-              </a:lnSpc>
-            </a:pPr>
-            <a:r>
-              <a:rPr sz="1000" b="0" i="1">
+            <a:off x="548640" y="6355080"/>
+            <a:ext cx="7315200" cy="365760"/>
+          </a:xfrm>
+          <a:prstGeom prst="rect">
+            <a:avLst/>
+          </a:prstGeom>
+          <a:noFill/>
+        </p:spPr>
+        <p:txBody>
+          <a:bodyPr wrap="square" lIns="0" rIns="0" tIns="0" bIns="0" anchor="t">
+            <a:spAutoFit/>
+          </a:bodyPr>
+          <a:lstStyle/>
+          <a:p>
+            <a:pPr algn="l">
+              <a:lnSpc>
+                <a:spcPct val="120000"/>
+              </a:lnSpc>
+            </a:pPr>
+            <a:r>
+              <a:rPr sz="1300" b="0" i="1">
                 <a:solidFill>
                   <a:srgbClr val="5A6478"/>
                 </a:solidFill>
@@ -21615,8 +21615,8 @@
         </p:nvSpPr>
         <p:spPr>
           <a:xfrm>
-            <a:off x="7315200" y="6446520"/>
-            <a:ext cx="4389120" cy="274320"/>
+            <a:off x="6858000" y="6355080"/>
+            <a:ext cx="4846320" cy="365760"/>
           </a:xfrm>
           <a:prstGeom prst="rect">
             <a:avLst/>
@@ -21635,7 +21635,7 @@
               </a:lnSpc>
             </a:pPr>
             <a:r>
-              <a:rPr sz="900" b="1" i="0" spc="200">
+              <a:rPr sz="1200" b="1" i="0" spc="200">
                 <a:solidFill>
                   <a:srgbClr val="5A6478"/>
                 </a:solidFill>
@@ -21789,27 +21789,27 @@
         </p:nvSpPr>
         <p:spPr>
           <a:xfrm>
-            <a:off x="548640" y="6446520"/>
-            <a:ext cx="7315200" cy="274320"/>
-          </a:xfrm>
-          <a:prstGeom prst="rect">
-            <a:avLst/>
-          </a:prstGeom>
-          <a:noFill/>
-        </p:spPr>
-        <p:txBody>
-          <a:bodyPr wrap="square" lIns="0" rIns="0" tIns="0" bIns="0" anchor="t">
-            <a:spAutoFit/>
-          </a:bodyPr>
-          <a:lstStyle/>
-          <a:p>
-            <a:pPr algn="l">
-              <a:lnSpc>
-                <a:spcPct val="120000"/>
-              </a:lnSpc>
-            </a:pPr>
-            <a:r>
-              <a:rPr sz="1000" b="0" i="1">
+            <a:off x="548640" y="6355080"/>
+            <a:ext cx="7315200" cy="365760"/>
+          </a:xfrm>
+          <a:prstGeom prst="rect">
+            <a:avLst/>
+          </a:prstGeom>
+          <a:noFill/>
+        </p:spPr>
+        <p:txBody>
+          <a:bodyPr wrap="square" lIns="0" rIns="0" tIns="0" bIns="0" anchor="t">
+            <a:spAutoFit/>
+          </a:bodyPr>
+          <a:lstStyle/>
+          <a:p>
+            <a:pPr algn="l">
+              <a:lnSpc>
+                <a:spcPct val="120000"/>
+              </a:lnSpc>
+            </a:pPr>
+            <a:r>
+              <a:rPr sz="1300" b="0" i="1">
                 <a:solidFill>
                   <a:srgbClr val="FFFFFF"/>
                 </a:solidFill>
@@ -21828,8 +21828,8 @@
         </p:nvSpPr>
         <p:spPr>
           <a:xfrm>
-            <a:off x="7315200" y="6446520"/>
-            <a:ext cx="4389120" cy="274320"/>
+            <a:off x="6858000" y="6355080"/>
+            <a:ext cx="4846320" cy="365760"/>
           </a:xfrm>
           <a:prstGeom prst="rect">
             <a:avLst/>
@@ -21848,7 +21848,7 @@
               </a:lnSpc>
             </a:pPr>
             <a:r>
-              <a:rPr sz="900" b="1" i="0" spc="200">
+              <a:rPr sz="1200" b="1" i="0" spc="200">
                 <a:solidFill>
                   <a:srgbClr val="FFFFFF"/>
                 </a:solidFill>
@@ -21929,27 +21929,27 @@
         </p:nvSpPr>
         <p:spPr>
           <a:xfrm>
-            <a:off x="822960" y="822960"/>
-            <a:ext cx="10515600" cy="365760"/>
-          </a:xfrm>
-          <a:prstGeom prst="rect">
-            <a:avLst/>
-          </a:prstGeom>
-          <a:noFill/>
-        </p:spPr>
-        <p:txBody>
-          <a:bodyPr wrap="square" lIns="0" rIns="0" tIns="0" bIns="0" anchor="t">
-            <a:spAutoFit/>
-          </a:bodyPr>
-          <a:lstStyle/>
-          <a:p>
-            <a:pPr algn="l">
-              <a:lnSpc>
-                <a:spcPct val="120000"/>
-              </a:lnSpc>
-            </a:pPr>
-            <a:r>
-              <a:rPr sz="1200" b="1" i="0" spc="240">
+            <a:off x="822960" y="777240"/>
+            <a:ext cx="10515600" cy="502920"/>
+          </a:xfrm>
+          <a:prstGeom prst="rect">
+            <a:avLst/>
+          </a:prstGeom>
+          <a:noFill/>
+        </p:spPr>
+        <p:txBody>
+          <a:bodyPr wrap="square" lIns="0" rIns="0" tIns="0" bIns="0" anchor="t">
+            <a:spAutoFit/>
+          </a:bodyPr>
+          <a:lstStyle/>
+          <a:p>
+            <a:pPr algn="l">
+              <a:lnSpc>
+                <a:spcPct val="120000"/>
+              </a:lnSpc>
+            </a:pPr>
+            <a:r>
+              <a:rPr sz="1800" b="1" i="0" spc="220">
                 <a:solidFill>
                   <a:srgbClr val="D97757"/>
                 </a:solidFill>
@@ -21968,7 +21968,7 @@
         </p:nvSpPr>
         <p:spPr>
           <a:xfrm>
-            <a:off x="822960" y="1325880"/>
+            <a:off x="822960" y="1554480"/>
             <a:ext cx="10515600" cy="2286000"/>
           </a:xfrm>
           <a:prstGeom prst="rect">
@@ -22826,27 +22826,27 @@
         </p:nvSpPr>
         <p:spPr>
           <a:xfrm>
-            <a:off x="822960" y="822960"/>
-            <a:ext cx="10515600" cy="365760"/>
-          </a:xfrm>
-          <a:prstGeom prst="rect">
-            <a:avLst/>
-          </a:prstGeom>
-          <a:noFill/>
-        </p:spPr>
-        <p:txBody>
-          <a:bodyPr wrap="square" lIns="0" rIns="0" tIns="0" bIns="0" anchor="t">
-            <a:spAutoFit/>
-          </a:bodyPr>
-          <a:lstStyle/>
-          <a:p>
-            <a:pPr algn="l">
-              <a:lnSpc>
-                <a:spcPct val="120000"/>
-              </a:lnSpc>
-            </a:pPr>
-            <a:r>
-              <a:rPr sz="1200" b="1" i="0" spc="240">
+            <a:off x="822960" y="777240"/>
+            <a:ext cx="10515600" cy="502920"/>
+          </a:xfrm>
+          <a:prstGeom prst="rect">
+            <a:avLst/>
+          </a:prstGeom>
+          <a:noFill/>
+        </p:spPr>
+        <p:txBody>
+          <a:bodyPr wrap="square" lIns="0" rIns="0" tIns="0" bIns="0" anchor="t">
+            <a:spAutoFit/>
+          </a:bodyPr>
+          <a:lstStyle/>
+          <a:p>
+            <a:pPr algn="l">
+              <a:lnSpc>
+                <a:spcPct val="120000"/>
+              </a:lnSpc>
+            </a:pPr>
+            <a:r>
+              <a:rPr sz="1800" b="1" i="0" spc="220">
                 <a:solidFill>
                   <a:srgbClr val="D97757"/>
                 </a:solidFill>
@@ -22865,7 +22865,7 @@
         </p:nvSpPr>
         <p:spPr>
           <a:xfrm>
-            <a:off x="822960" y="1325880"/>
+            <a:off x="822960" y="1554480"/>
             <a:ext cx="10515600" cy="2286000"/>
           </a:xfrm>
           <a:prstGeom prst="rect">
@@ -23568,27 +23568,27 @@
         </p:nvSpPr>
         <p:spPr>
           <a:xfrm>
-            <a:off x="548640" y="6446520"/>
-            <a:ext cx="7315200" cy="274320"/>
-          </a:xfrm>
-          <a:prstGeom prst="rect">
-            <a:avLst/>
-          </a:prstGeom>
-          <a:noFill/>
-        </p:spPr>
-        <p:txBody>
-          <a:bodyPr wrap="square" lIns="0" rIns="0" tIns="0" bIns="0" anchor="t">
-            <a:spAutoFit/>
-          </a:bodyPr>
-          <a:lstStyle/>
-          <a:p>
-            <a:pPr algn="l">
-              <a:lnSpc>
-                <a:spcPct val="120000"/>
-              </a:lnSpc>
-            </a:pPr>
-            <a:r>
-              <a:rPr sz="1000" b="0" i="1">
+            <a:off x="548640" y="6355080"/>
+            <a:ext cx="7315200" cy="365760"/>
+          </a:xfrm>
+          <a:prstGeom prst="rect">
+            <a:avLst/>
+          </a:prstGeom>
+          <a:noFill/>
+        </p:spPr>
+        <p:txBody>
+          <a:bodyPr wrap="square" lIns="0" rIns="0" tIns="0" bIns="0" anchor="t">
+            <a:spAutoFit/>
+          </a:bodyPr>
+          <a:lstStyle/>
+          <a:p>
+            <a:pPr algn="l">
+              <a:lnSpc>
+                <a:spcPct val="120000"/>
+              </a:lnSpc>
+            </a:pPr>
+            <a:r>
+              <a:rPr sz="1300" b="0" i="1">
                 <a:solidFill>
                   <a:srgbClr val="5A6478"/>
                 </a:solidFill>
@@ -23607,8 +23607,8 @@
         </p:nvSpPr>
         <p:spPr>
           <a:xfrm>
-            <a:off x="7315200" y="6446520"/>
-            <a:ext cx="4389120" cy="274320"/>
+            <a:off x="6858000" y="6355080"/>
+            <a:ext cx="4846320" cy="365760"/>
           </a:xfrm>
           <a:prstGeom prst="rect">
             <a:avLst/>
@@ -23627,7 +23627,7 @@
               </a:lnSpc>
             </a:pPr>
             <a:r>
-              <a:rPr sz="900" b="1" i="0" spc="200">
+              <a:rPr sz="1200" b="1" i="0" spc="200">
                 <a:solidFill>
                   <a:srgbClr val="5A6478"/>
                 </a:solidFill>
@@ -23744,7 +23744,7 @@
           <a:p>
             <a:pPr algn="ctr"/>
             <a:r>
-              <a:rPr sz="1100" b="1" spc="300">
+              <a:rPr sz="1500" b="1" spc="300">
                 <a:solidFill>
                   <a:srgbClr val="D97757"/>
                 </a:solidFill>
@@ -24015,27 +24015,27 @@
         </p:nvSpPr>
         <p:spPr>
           <a:xfrm>
-            <a:off x="548640" y="6446520"/>
-            <a:ext cx="7315200" cy="274320"/>
-          </a:xfrm>
-          <a:prstGeom prst="rect">
-            <a:avLst/>
-          </a:prstGeom>
-          <a:noFill/>
-        </p:spPr>
-        <p:txBody>
-          <a:bodyPr wrap="square" lIns="0" rIns="0" tIns="0" bIns="0" anchor="t">
-            <a:spAutoFit/>
-          </a:bodyPr>
-          <a:lstStyle/>
-          <a:p>
-            <a:pPr algn="l">
-              <a:lnSpc>
-                <a:spcPct val="120000"/>
-              </a:lnSpc>
-            </a:pPr>
-            <a:r>
-              <a:rPr sz="1000" b="0" i="1">
+            <a:off x="548640" y="6355080"/>
+            <a:ext cx="7315200" cy="365760"/>
+          </a:xfrm>
+          <a:prstGeom prst="rect">
+            <a:avLst/>
+          </a:prstGeom>
+          <a:noFill/>
+        </p:spPr>
+        <p:txBody>
+          <a:bodyPr wrap="square" lIns="0" rIns="0" tIns="0" bIns="0" anchor="t">
+            <a:spAutoFit/>
+          </a:bodyPr>
+          <a:lstStyle/>
+          <a:p>
+            <a:pPr algn="l">
+              <a:lnSpc>
+                <a:spcPct val="120000"/>
+              </a:lnSpc>
+            </a:pPr>
+            <a:r>
+              <a:rPr sz="1300" b="0" i="1">
                 <a:solidFill>
                   <a:srgbClr val="5A6478"/>
                 </a:solidFill>
@@ -24054,8 +24054,8 @@
         </p:nvSpPr>
         <p:spPr>
           <a:xfrm>
-            <a:off x="7315200" y="6446520"/>
-            <a:ext cx="4389120" cy="274320"/>
+            <a:off x="6858000" y="6355080"/>
+            <a:ext cx="4846320" cy="365760"/>
           </a:xfrm>
           <a:prstGeom prst="rect">
             <a:avLst/>
@@ -24074,7 +24074,7 @@
               </a:lnSpc>
             </a:pPr>
             <a:r>
-              <a:rPr sz="900" b="1" i="0" spc="200">
+              <a:rPr sz="1200" b="1" i="0" spc="200">
                 <a:solidFill>
                   <a:srgbClr val="5A6478"/>
                 </a:solidFill>
@@ -24320,27 +24320,27 @@
         </p:nvSpPr>
         <p:spPr>
           <a:xfrm>
-            <a:off x="548640" y="6446520"/>
-            <a:ext cx="7315200" cy="274320"/>
-          </a:xfrm>
-          <a:prstGeom prst="rect">
-            <a:avLst/>
-          </a:prstGeom>
-          <a:noFill/>
-        </p:spPr>
-        <p:txBody>
-          <a:bodyPr wrap="square" lIns="0" rIns="0" tIns="0" bIns="0" anchor="t">
-            <a:spAutoFit/>
-          </a:bodyPr>
-          <a:lstStyle/>
-          <a:p>
-            <a:pPr algn="l">
-              <a:lnSpc>
-                <a:spcPct val="120000"/>
-              </a:lnSpc>
-            </a:pPr>
-            <a:r>
-              <a:rPr sz="1000" b="0" i="1">
+            <a:off x="548640" y="6355080"/>
+            <a:ext cx="7315200" cy="365760"/>
+          </a:xfrm>
+          <a:prstGeom prst="rect">
+            <a:avLst/>
+          </a:prstGeom>
+          <a:noFill/>
+        </p:spPr>
+        <p:txBody>
+          <a:bodyPr wrap="square" lIns="0" rIns="0" tIns="0" bIns="0" anchor="t">
+            <a:spAutoFit/>
+          </a:bodyPr>
+          <a:lstStyle/>
+          <a:p>
+            <a:pPr algn="l">
+              <a:lnSpc>
+                <a:spcPct val="120000"/>
+              </a:lnSpc>
+            </a:pPr>
+            <a:r>
+              <a:rPr sz="1300" b="0" i="1">
                 <a:solidFill>
                   <a:srgbClr val="5A6478"/>
                 </a:solidFill>
@@ -24359,8 +24359,8 @@
         </p:nvSpPr>
         <p:spPr>
           <a:xfrm>
-            <a:off x="7315200" y="6446520"/>
-            <a:ext cx="4389120" cy="274320"/>
+            <a:off x="6858000" y="6355080"/>
+            <a:ext cx="4846320" cy="365760"/>
           </a:xfrm>
           <a:prstGeom prst="rect">
             <a:avLst/>
@@ -24379,7 +24379,7 @@
               </a:lnSpc>
             </a:pPr>
             <a:r>
-              <a:rPr sz="900" b="1" i="0" spc="200">
+              <a:rPr sz="1200" b="1" i="0" spc="200">
                 <a:solidFill>
                   <a:srgbClr val="5A6478"/>
                 </a:solidFill>
@@ -24460,27 +24460,27 @@
         </p:nvSpPr>
         <p:spPr>
           <a:xfrm>
-            <a:off x="822960" y="822960"/>
-            <a:ext cx="10515600" cy="365760"/>
-          </a:xfrm>
-          <a:prstGeom prst="rect">
-            <a:avLst/>
-          </a:prstGeom>
-          <a:noFill/>
-        </p:spPr>
-        <p:txBody>
-          <a:bodyPr wrap="square" lIns="0" rIns="0" tIns="0" bIns="0" anchor="t">
-            <a:spAutoFit/>
-          </a:bodyPr>
-          <a:lstStyle/>
-          <a:p>
-            <a:pPr algn="l">
-              <a:lnSpc>
-                <a:spcPct val="120000"/>
-              </a:lnSpc>
-            </a:pPr>
-            <a:r>
-              <a:rPr sz="1200" b="1" i="0" spc="240">
+            <a:off x="822960" y="777240"/>
+            <a:ext cx="10515600" cy="502920"/>
+          </a:xfrm>
+          <a:prstGeom prst="rect">
+            <a:avLst/>
+          </a:prstGeom>
+          <a:noFill/>
+        </p:spPr>
+        <p:txBody>
+          <a:bodyPr wrap="square" lIns="0" rIns="0" tIns="0" bIns="0" anchor="t">
+            <a:spAutoFit/>
+          </a:bodyPr>
+          <a:lstStyle/>
+          <a:p>
+            <a:pPr algn="l">
+              <a:lnSpc>
+                <a:spcPct val="120000"/>
+              </a:lnSpc>
+            </a:pPr>
+            <a:r>
+              <a:rPr sz="1800" b="1" i="0" spc="220">
                 <a:solidFill>
                   <a:srgbClr val="D97757"/>
                 </a:solidFill>
@@ -24499,7 +24499,7 @@
         </p:nvSpPr>
         <p:spPr>
           <a:xfrm>
-            <a:off x="822960" y="1325880"/>
+            <a:off x="822960" y="1554480"/>
             <a:ext cx="10515600" cy="2286000"/>
           </a:xfrm>
           <a:prstGeom prst="rect">
@@ -25045,27 +25045,27 @@
         </p:nvSpPr>
         <p:spPr>
           <a:xfrm>
-            <a:off x="548640" y="6446520"/>
-            <a:ext cx="7315200" cy="274320"/>
-          </a:xfrm>
-          <a:prstGeom prst="rect">
-            <a:avLst/>
-          </a:prstGeom>
-          <a:noFill/>
-        </p:spPr>
-        <p:txBody>
-          <a:bodyPr wrap="square" lIns="0" rIns="0" tIns="0" bIns="0" anchor="t">
-            <a:spAutoFit/>
-          </a:bodyPr>
-          <a:lstStyle/>
-          <a:p>
-            <a:pPr algn="l">
-              <a:lnSpc>
-                <a:spcPct val="120000"/>
-              </a:lnSpc>
-            </a:pPr>
-            <a:r>
-              <a:rPr sz="1000" b="0" i="1">
+            <a:off x="548640" y="6355080"/>
+            <a:ext cx="7315200" cy="365760"/>
+          </a:xfrm>
+          <a:prstGeom prst="rect">
+            <a:avLst/>
+          </a:prstGeom>
+          <a:noFill/>
+        </p:spPr>
+        <p:txBody>
+          <a:bodyPr wrap="square" lIns="0" rIns="0" tIns="0" bIns="0" anchor="t">
+            <a:spAutoFit/>
+          </a:bodyPr>
+          <a:lstStyle/>
+          <a:p>
+            <a:pPr algn="l">
+              <a:lnSpc>
+                <a:spcPct val="120000"/>
+              </a:lnSpc>
+            </a:pPr>
+            <a:r>
+              <a:rPr sz="1300" b="0" i="1">
                 <a:solidFill>
                   <a:srgbClr val="5A6478"/>
                 </a:solidFill>
@@ -25084,8 +25084,8 @@
         </p:nvSpPr>
         <p:spPr>
           <a:xfrm>
-            <a:off x="7315200" y="6446520"/>
-            <a:ext cx="4389120" cy="274320"/>
+            <a:off x="6858000" y="6355080"/>
+            <a:ext cx="4846320" cy="365760"/>
           </a:xfrm>
           <a:prstGeom prst="rect">
             <a:avLst/>
@@ -25104,7 +25104,7 @@
               </a:lnSpc>
             </a:pPr>
             <a:r>
-              <a:rPr sz="900" b="1" i="0" spc="200">
+              <a:rPr sz="1200" b="1" i="0" spc="200">
                 <a:solidFill>
                   <a:srgbClr val="5A6478"/>
                 </a:solidFill>
@@ -25609,27 +25609,27 @@
         </p:nvSpPr>
         <p:spPr>
           <a:xfrm>
-            <a:off x="548640" y="6446520"/>
-            <a:ext cx="7315200" cy="274320"/>
-          </a:xfrm>
-          <a:prstGeom prst="rect">
-            <a:avLst/>
-          </a:prstGeom>
-          <a:noFill/>
-        </p:spPr>
-        <p:txBody>
-          <a:bodyPr wrap="square" lIns="0" rIns="0" tIns="0" bIns="0" anchor="t">
-            <a:spAutoFit/>
-          </a:bodyPr>
-          <a:lstStyle/>
-          <a:p>
-            <a:pPr algn="l">
-              <a:lnSpc>
-                <a:spcPct val="120000"/>
-              </a:lnSpc>
-            </a:pPr>
-            <a:r>
-              <a:rPr sz="1000" b="0" i="1">
+            <a:off x="548640" y="6355080"/>
+            <a:ext cx="7315200" cy="365760"/>
+          </a:xfrm>
+          <a:prstGeom prst="rect">
+            <a:avLst/>
+          </a:prstGeom>
+          <a:noFill/>
+        </p:spPr>
+        <p:txBody>
+          <a:bodyPr wrap="square" lIns="0" rIns="0" tIns="0" bIns="0" anchor="t">
+            <a:spAutoFit/>
+          </a:bodyPr>
+          <a:lstStyle/>
+          <a:p>
+            <a:pPr algn="l">
+              <a:lnSpc>
+                <a:spcPct val="120000"/>
+              </a:lnSpc>
+            </a:pPr>
+            <a:r>
+              <a:rPr sz="1300" b="0" i="1">
                 <a:solidFill>
                   <a:srgbClr val="5A6478"/>
                 </a:solidFill>
@@ -25648,8 +25648,8 @@
         </p:nvSpPr>
         <p:spPr>
           <a:xfrm>
-            <a:off x="7315200" y="6446520"/>
-            <a:ext cx="4389120" cy="274320"/>
+            <a:off x="6858000" y="6355080"/>
+            <a:ext cx="4846320" cy="365760"/>
           </a:xfrm>
           <a:prstGeom prst="rect">
             <a:avLst/>
@@ -25668,7 +25668,7 @@
               </a:lnSpc>
             </a:pPr>
             <a:r>
-              <a:rPr sz="900" b="1" i="0" spc="200">
+              <a:rPr sz="1200" b="1" i="0" spc="200">
                 <a:solidFill>
                   <a:srgbClr val="5A6478"/>
                 </a:solidFill>
@@ -25785,7 +25785,7 @@
           <a:p>
             <a:pPr algn="ctr"/>
             <a:r>
-              <a:rPr sz="1100" b="1" spc="240">
+              <a:rPr sz="1500" b="1" spc="240">
                 <a:solidFill>
                   <a:srgbClr val="F4EBDC"/>
                 </a:solidFill>
@@ -25939,27 +25939,27 @@
         </p:nvSpPr>
         <p:spPr>
           <a:xfrm>
-            <a:off x="548640" y="6446520"/>
-            <a:ext cx="7315200" cy="274320"/>
-          </a:xfrm>
-          <a:prstGeom prst="rect">
-            <a:avLst/>
-          </a:prstGeom>
-          <a:noFill/>
-        </p:spPr>
-        <p:txBody>
-          <a:bodyPr wrap="square" lIns="0" rIns="0" tIns="0" bIns="0" anchor="t">
-            <a:spAutoFit/>
-          </a:bodyPr>
-          <a:lstStyle/>
-          <a:p>
-            <a:pPr algn="l">
-              <a:lnSpc>
-                <a:spcPct val="120000"/>
-              </a:lnSpc>
-            </a:pPr>
-            <a:r>
-              <a:rPr sz="1000" b="0" i="1">
+            <a:off x="548640" y="6355080"/>
+            <a:ext cx="7315200" cy="365760"/>
+          </a:xfrm>
+          <a:prstGeom prst="rect">
+            <a:avLst/>
+          </a:prstGeom>
+          <a:noFill/>
+        </p:spPr>
+        <p:txBody>
+          <a:bodyPr wrap="square" lIns="0" rIns="0" tIns="0" bIns="0" anchor="t">
+            <a:spAutoFit/>
+          </a:bodyPr>
+          <a:lstStyle/>
+          <a:p>
+            <a:pPr algn="l">
+              <a:lnSpc>
+                <a:spcPct val="120000"/>
+              </a:lnSpc>
+            </a:pPr>
+            <a:r>
+              <a:rPr sz="1300" b="0" i="1">
                 <a:solidFill>
                   <a:srgbClr val="5A6478"/>
                 </a:solidFill>
@@ -25978,8 +25978,8 @@
         </p:nvSpPr>
         <p:spPr>
           <a:xfrm>
-            <a:off x="7315200" y="6446520"/>
-            <a:ext cx="4389120" cy="274320"/>
+            <a:off x="6858000" y="6355080"/>
+            <a:ext cx="4846320" cy="365760"/>
           </a:xfrm>
           <a:prstGeom prst="rect">
             <a:avLst/>
@@ -25998,7 +25998,7 @@
               </a:lnSpc>
             </a:pPr>
             <a:r>
-              <a:rPr sz="900" b="1" i="0" spc="200">
+              <a:rPr sz="1200" b="1" i="0" spc="200">
                 <a:solidFill>
                   <a:srgbClr val="5A6478"/>
                 </a:solidFill>
@@ -26115,7 +26115,7 @@
           <a:p>
             <a:pPr algn="ctr"/>
             <a:r>
-              <a:rPr sz="1100" b="1" spc="300">
+              <a:rPr sz="1500" b="1" spc="300">
                 <a:solidFill>
                   <a:srgbClr val="FFFFFF"/>
                 </a:solidFill>
@@ -26230,27 +26230,27 @@
         </p:nvSpPr>
         <p:spPr>
           <a:xfrm>
-            <a:off x="548640" y="6446520"/>
-            <a:ext cx="7315200" cy="274320"/>
-          </a:xfrm>
-          <a:prstGeom prst="rect">
-            <a:avLst/>
-          </a:prstGeom>
-          <a:noFill/>
-        </p:spPr>
-        <p:txBody>
-          <a:bodyPr wrap="square" lIns="0" rIns="0" tIns="0" bIns="0" anchor="t">
-            <a:spAutoFit/>
-          </a:bodyPr>
-          <a:lstStyle/>
-          <a:p>
-            <a:pPr algn="l">
-              <a:lnSpc>
-                <a:spcPct val="120000"/>
-              </a:lnSpc>
-            </a:pPr>
-            <a:r>
-              <a:rPr sz="1000" b="0" i="1">
+            <a:off x="548640" y="6355080"/>
+            <a:ext cx="7315200" cy="365760"/>
+          </a:xfrm>
+          <a:prstGeom prst="rect">
+            <a:avLst/>
+          </a:prstGeom>
+          <a:noFill/>
+        </p:spPr>
+        <p:txBody>
+          <a:bodyPr wrap="square" lIns="0" rIns="0" tIns="0" bIns="0" anchor="t">
+            <a:spAutoFit/>
+          </a:bodyPr>
+          <a:lstStyle/>
+          <a:p>
+            <a:pPr algn="l">
+              <a:lnSpc>
+                <a:spcPct val="120000"/>
+              </a:lnSpc>
+            </a:pPr>
+            <a:r>
+              <a:rPr sz="1300" b="0" i="1">
                 <a:solidFill>
                   <a:srgbClr val="FFFFFF"/>
                 </a:solidFill>
@@ -26269,8 +26269,8 @@
         </p:nvSpPr>
         <p:spPr>
           <a:xfrm>
-            <a:off x="7315200" y="6446520"/>
-            <a:ext cx="4389120" cy="274320"/>
+            <a:off x="6858000" y="6355080"/>
+            <a:ext cx="4846320" cy="365760"/>
           </a:xfrm>
           <a:prstGeom prst="rect">
             <a:avLst/>
@@ -26289,7 +26289,7 @@
               </a:lnSpc>
             </a:pPr>
             <a:r>
-              <a:rPr sz="900" b="1" i="0" spc="200">
+              <a:rPr sz="1200" b="1" i="0" spc="200">
                 <a:solidFill>
                   <a:srgbClr val="FFFFFF"/>
                 </a:solidFill>
@@ -26406,7 +26406,7 @@
           <a:p>
             <a:pPr algn="ctr"/>
             <a:r>
-              <a:rPr sz="1100" b="1" spc="260">
+              <a:rPr sz="1500" b="1" spc="260">
                 <a:solidFill>
                   <a:srgbClr val="FFFFFF"/>
                 </a:solidFill>
@@ -26613,27 +26613,27 @@
         </p:nvSpPr>
         <p:spPr>
           <a:xfrm>
-            <a:off x="548640" y="6446520"/>
-            <a:ext cx="7315200" cy="274320"/>
-          </a:xfrm>
-          <a:prstGeom prst="rect">
-            <a:avLst/>
-          </a:prstGeom>
-          <a:noFill/>
-        </p:spPr>
-        <p:txBody>
-          <a:bodyPr wrap="square" lIns="0" rIns="0" tIns="0" bIns="0" anchor="t">
-            <a:spAutoFit/>
-          </a:bodyPr>
-          <a:lstStyle/>
-          <a:p>
-            <a:pPr algn="l">
-              <a:lnSpc>
-                <a:spcPct val="120000"/>
-              </a:lnSpc>
-            </a:pPr>
-            <a:r>
-              <a:rPr sz="1000" b="0" i="1">
+            <a:off x="548640" y="6355080"/>
+            <a:ext cx="7315200" cy="365760"/>
+          </a:xfrm>
+          <a:prstGeom prst="rect">
+            <a:avLst/>
+          </a:prstGeom>
+          <a:noFill/>
+        </p:spPr>
+        <p:txBody>
+          <a:bodyPr wrap="square" lIns="0" rIns="0" tIns="0" bIns="0" anchor="t">
+            <a:spAutoFit/>
+          </a:bodyPr>
+          <a:lstStyle/>
+          <a:p>
+            <a:pPr algn="l">
+              <a:lnSpc>
+                <a:spcPct val="120000"/>
+              </a:lnSpc>
+            </a:pPr>
+            <a:r>
+              <a:rPr sz="1300" b="0" i="1">
                 <a:solidFill>
                   <a:srgbClr val="FFFFFF"/>
                 </a:solidFill>
@@ -26652,8 +26652,8 @@
         </p:nvSpPr>
         <p:spPr>
           <a:xfrm>
-            <a:off x="7315200" y="6446520"/>
-            <a:ext cx="4389120" cy="274320"/>
+            <a:off x="6858000" y="6355080"/>
+            <a:ext cx="4846320" cy="365760"/>
           </a:xfrm>
           <a:prstGeom prst="rect">
             <a:avLst/>
@@ -26672,7 +26672,7 @@
               </a:lnSpc>
             </a:pPr>
             <a:r>
-              <a:rPr sz="900" b="1" i="0" spc="200">
+              <a:rPr sz="1200" b="1" i="0" spc="200">
                 <a:solidFill>
                   <a:srgbClr val="FFFFFF"/>
                 </a:solidFill>
@@ -26753,27 +26753,27 @@
         </p:nvSpPr>
         <p:spPr>
           <a:xfrm>
-            <a:off x="822960" y="2011680"/>
-            <a:ext cx="10515600" cy="365760"/>
-          </a:xfrm>
-          <a:prstGeom prst="rect">
-            <a:avLst/>
-          </a:prstGeom>
-          <a:noFill/>
-        </p:spPr>
-        <p:txBody>
-          <a:bodyPr wrap="square" lIns="0" rIns="0" tIns="0" bIns="0" anchor="t">
-            <a:spAutoFit/>
-          </a:bodyPr>
-          <a:lstStyle/>
-          <a:p>
-            <a:pPr algn="l">
-              <a:lnSpc>
-                <a:spcPct val="120000"/>
-              </a:lnSpc>
-            </a:pPr>
-            <a:r>
-              <a:rPr sz="1200" b="1" i="0" spc="240">
+            <a:off x="822960" y="777240"/>
+            <a:ext cx="10515600" cy="502920"/>
+          </a:xfrm>
+          <a:prstGeom prst="rect">
+            <a:avLst/>
+          </a:prstGeom>
+          <a:noFill/>
+        </p:spPr>
+        <p:txBody>
+          <a:bodyPr wrap="square" lIns="0" rIns="0" tIns="0" bIns="0" anchor="t">
+            <a:spAutoFit/>
+          </a:bodyPr>
+          <a:lstStyle/>
+          <a:p>
+            <a:pPr algn="l">
+              <a:lnSpc>
+                <a:spcPct val="120000"/>
+              </a:lnSpc>
+            </a:pPr>
+            <a:r>
+              <a:rPr sz="1800" b="1" i="0" spc="220">
                 <a:solidFill>
                   <a:srgbClr val="D97757"/>
                 </a:solidFill>
@@ -26792,7 +26792,7 @@
         </p:nvSpPr>
         <p:spPr>
           <a:xfrm>
-            <a:off x="822960" y="2514600"/>
+            <a:off x="822960" y="1554480"/>
             <a:ext cx="10515600" cy="2286000"/>
           </a:xfrm>
           <a:prstGeom prst="rect">
@@ -26849,7 +26849,7 @@
         </p:nvSpPr>
         <p:spPr>
           <a:xfrm>
-            <a:off x="822960" y="4389120"/>
+            <a:off x="822960" y="3429000"/>
             <a:ext cx="10515600" cy="3200400"/>
           </a:xfrm>
           <a:prstGeom prst="rect">
@@ -26907,27 +26907,27 @@
         </p:nvSpPr>
         <p:spPr>
           <a:xfrm>
-            <a:off x="548640" y="6446520"/>
-            <a:ext cx="7315200" cy="274320"/>
-          </a:xfrm>
-          <a:prstGeom prst="rect">
-            <a:avLst/>
-          </a:prstGeom>
-          <a:noFill/>
-        </p:spPr>
-        <p:txBody>
-          <a:bodyPr wrap="square" lIns="0" rIns="0" tIns="0" bIns="0" anchor="t">
-            <a:spAutoFit/>
-          </a:bodyPr>
-          <a:lstStyle/>
-          <a:p>
-            <a:pPr algn="l">
-              <a:lnSpc>
-                <a:spcPct val="120000"/>
-              </a:lnSpc>
-            </a:pPr>
-            <a:r>
-              <a:rPr sz="1000" b="0" i="1">
+            <a:off x="548640" y="6355080"/>
+            <a:ext cx="7315200" cy="365760"/>
+          </a:xfrm>
+          <a:prstGeom prst="rect">
+            <a:avLst/>
+          </a:prstGeom>
+          <a:noFill/>
+        </p:spPr>
+        <p:txBody>
+          <a:bodyPr wrap="square" lIns="0" rIns="0" tIns="0" bIns="0" anchor="t">
+            <a:spAutoFit/>
+          </a:bodyPr>
+          <a:lstStyle/>
+          <a:p>
+            <a:pPr algn="l">
+              <a:lnSpc>
+                <a:spcPct val="120000"/>
+              </a:lnSpc>
+            </a:pPr>
+            <a:r>
+              <a:rPr sz="1300" b="0" i="1">
                 <a:solidFill>
                   <a:srgbClr val="5A6478"/>
                 </a:solidFill>
@@ -26946,8 +26946,8 @@
         </p:nvSpPr>
         <p:spPr>
           <a:xfrm>
-            <a:off x="7315200" y="6446520"/>
-            <a:ext cx="4389120" cy="274320"/>
+            <a:off x="6858000" y="6355080"/>
+            <a:ext cx="4846320" cy="365760"/>
           </a:xfrm>
           <a:prstGeom prst="rect">
             <a:avLst/>
@@ -26966,7 +26966,7 @@
               </a:lnSpc>
             </a:pPr>
             <a:r>
-              <a:rPr sz="900" b="1" i="0" spc="200">
+              <a:rPr sz="1200" b="1" i="0" spc="200">
                 <a:solidFill>
                   <a:srgbClr val="5A6478"/>
                 </a:solidFill>
@@ -27929,27 +27929,27 @@
         </p:nvSpPr>
         <p:spPr>
           <a:xfrm>
-            <a:off x="548640" y="6446520"/>
-            <a:ext cx="7315200" cy="274320"/>
-          </a:xfrm>
-          <a:prstGeom prst="rect">
-            <a:avLst/>
-          </a:prstGeom>
-          <a:noFill/>
-        </p:spPr>
-        <p:txBody>
-          <a:bodyPr wrap="square" lIns="0" rIns="0" tIns="0" bIns="0" anchor="t">
-            <a:spAutoFit/>
-          </a:bodyPr>
-          <a:lstStyle/>
-          <a:p>
-            <a:pPr algn="l">
-              <a:lnSpc>
-                <a:spcPct val="120000"/>
-              </a:lnSpc>
-            </a:pPr>
-            <a:r>
-              <a:rPr sz="1000" b="0" i="1">
+            <a:off x="548640" y="6355080"/>
+            <a:ext cx="7315200" cy="365760"/>
+          </a:xfrm>
+          <a:prstGeom prst="rect">
+            <a:avLst/>
+          </a:prstGeom>
+          <a:noFill/>
+        </p:spPr>
+        <p:txBody>
+          <a:bodyPr wrap="square" lIns="0" rIns="0" tIns="0" bIns="0" anchor="t">
+            <a:spAutoFit/>
+          </a:bodyPr>
+          <a:lstStyle/>
+          <a:p>
+            <a:pPr algn="l">
+              <a:lnSpc>
+                <a:spcPct val="120000"/>
+              </a:lnSpc>
+            </a:pPr>
+            <a:r>
+              <a:rPr sz="1300" b="0" i="1">
                 <a:solidFill>
                   <a:srgbClr val="5A6478"/>
                 </a:solidFill>
@@ -27968,8 +27968,8 @@
         </p:nvSpPr>
         <p:spPr>
           <a:xfrm>
-            <a:off x="7315200" y="6446520"/>
-            <a:ext cx="4389120" cy="274320"/>
+            <a:off x="6858000" y="6355080"/>
+            <a:ext cx="4846320" cy="365760"/>
           </a:xfrm>
           <a:prstGeom prst="rect">
             <a:avLst/>
@@ -27988,7 +27988,7 @@
               </a:lnSpc>
             </a:pPr>
             <a:r>
-              <a:rPr sz="900" b="1" i="0" spc="200">
+              <a:rPr sz="1200" b="1" i="0" spc="200">
                 <a:solidFill>
                   <a:srgbClr val="5A6478"/>
                 </a:solidFill>
@@ -28069,27 +28069,27 @@
         </p:nvSpPr>
         <p:spPr>
           <a:xfrm>
-            <a:off x="822960" y="1463040"/>
-            <a:ext cx="10515600" cy="365760"/>
-          </a:xfrm>
-          <a:prstGeom prst="rect">
-            <a:avLst/>
-          </a:prstGeom>
-          <a:noFill/>
-        </p:spPr>
-        <p:txBody>
-          <a:bodyPr wrap="square" lIns="0" rIns="0" tIns="0" bIns="0" anchor="t">
-            <a:spAutoFit/>
-          </a:bodyPr>
-          <a:lstStyle/>
-          <a:p>
-            <a:pPr algn="l">
-              <a:lnSpc>
-                <a:spcPct val="120000"/>
-              </a:lnSpc>
-            </a:pPr>
-            <a:r>
-              <a:rPr sz="1200" b="1" i="0" spc="240">
+            <a:off x="822960" y="777240"/>
+            <a:ext cx="10515600" cy="502920"/>
+          </a:xfrm>
+          <a:prstGeom prst="rect">
+            <a:avLst/>
+          </a:prstGeom>
+          <a:noFill/>
+        </p:spPr>
+        <p:txBody>
+          <a:bodyPr wrap="square" lIns="0" rIns="0" tIns="0" bIns="0" anchor="t">
+            <a:spAutoFit/>
+          </a:bodyPr>
+          <a:lstStyle/>
+          <a:p>
+            <a:pPr algn="l">
+              <a:lnSpc>
+                <a:spcPct val="120000"/>
+              </a:lnSpc>
+            </a:pPr>
+            <a:r>
+              <a:rPr sz="1800" b="1" i="0" spc="220">
                 <a:solidFill>
                   <a:srgbClr val="D97757"/>
                 </a:solidFill>
@@ -28108,7 +28108,7 @@
         </p:nvSpPr>
         <p:spPr>
           <a:xfrm>
-            <a:off x="822960" y="1965960"/>
+            <a:off x="822960" y="1554480"/>
             <a:ext cx="10515600" cy="2286000"/>
           </a:xfrm>
           <a:prstGeom prst="rect">
@@ -28156,7 +28156,7 @@
         </p:nvSpPr>
         <p:spPr>
           <a:xfrm>
-            <a:off x="822960" y="3840480"/>
+            <a:off x="822960" y="3429000"/>
             <a:ext cx="10515600" cy="3200400"/>
           </a:xfrm>
           <a:prstGeom prst="rect">
@@ -28214,27 +28214,27 @@
         </p:nvSpPr>
         <p:spPr>
           <a:xfrm>
-            <a:off x="548640" y="6446520"/>
-            <a:ext cx="7315200" cy="274320"/>
-          </a:xfrm>
-          <a:prstGeom prst="rect">
-            <a:avLst/>
-          </a:prstGeom>
-          <a:noFill/>
-        </p:spPr>
-        <p:txBody>
-          <a:bodyPr wrap="square" lIns="0" rIns="0" tIns="0" bIns="0" anchor="t">
-            <a:spAutoFit/>
-          </a:bodyPr>
-          <a:lstStyle/>
-          <a:p>
-            <a:pPr algn="l">
-              <a:lnSpc>
-                <a:spcPct val="120000"/>
-              </a:lnSpc>
-            </a:pPr>
-            <a:r>
-              <a:rPr sz="1000" b="0" i="1">
+            <a:off x="548640" y="6355080"/>
+            <a:ext cx="7315200" cy="365760"/>
+          </a:xfrm>
+          <a:prstGeom prst="rect">
+            <a:avLst/>
+          </a:prstGeom>
+          <a:noFill/>
+        </p:spPr>
+        <p:txBody>
+          <a:bodyPr wrap="square" lIns="0" rIns="0" tIns="0" bIns="0" anchor="t">
+            <a:spAutoFit/>
+          </a:bodyPr>
+          <a:lstStyle/>
+          <a:p>
+            <a:pPr algn="l">
+              <a:lnSpc>
+                <a:spcPct val="120000"/>
+              </a:lnSpc>
+            </a:pPr>
+            <a:r>
+              <a:rPr sz="1300" b="0" i="1">
                 <a:solidFill>
                   <a:srgbClr val="5A6478"/>
                 </a:solidFill>
@@ -28253,8 +28253,8 @@
         </p:nvSpPr>
         <p:spPr>
           <a:xfrm>
-            <a:off x="7315200" y="6446520"/>
-            <a:ext cx="4389120" cy="274320"/>
+            <a:off x="6858000" y="6355080"/>
+            <a:ext cx="4846320" cy="365760"/>
           </a:xfrm>
           <a:prstGeom prst="rect">
             <a:avLst/>
@@ -28273,7 +28273,7 @@
               </a:lnSpc>
             </a:pPr>
             <a:r>
-              <a:rPr sz="900" b="1" i="0" spc="200">
+              <a:rPr sz="1200" b="1" i="0" spc="200">
                 <a:solidFill>
                   <a:srgbClr val="5A6478"/>
                 </a:solidFill>
@@ -28390,7 +28390,7 @@
           <a:p>
             <a:pPr algn="ctr"/>
             <a:r>
-              <a:rPr sz="1100" b="1" spc="300">
+              <a:rPr sz="1500" b="1" spc="300">
                 <a:solidFill>
                   <a:srgbClr val="FFFFFF"/>
                 </a:solidFill>
@@ -28500,27 +28500,27 @@
         </p:nvSpPr>
         <p:spPr>
           <a:xfrm>
-            <a:off x="548640" y="6446520"/>
-            <a:ext cx="7315200" cy="274320"/>
-          </a:xfrm>
-          <a:prstGeom prst="rect">
-            <a:avLst/>
-          </a:prstGeom>
-          <a:noFill/>
-        </p:spPr>
-        <p:txBody>
-          <a:bodyPr wrap="square" lIns="0" rIns="0" tIns="0" bIns="0" anchor="t">
-            <a:spAutoFit/>
-          </a:bodyPr>
-          <a:lstStyle/>
-          <a:p>
-            <a:pPr algn="l">
-              <a:lnSpc>
-                <a:spcPct val="120000"/>
-              </a:lnSpc>
-            </a:pPr>
-            <a:r>
-              <a:rPr sz="1000" b="0" i="1">
+            <a:off x="548640" y="6355080"/>
+            <a:ext cx="7315200" cy="365760"/>
+          </a:xfrm>
+          <a:prstGeom prst="rect">
+            <a:avLst/>
+          </a:prstGeom>
+          <a:noFill/>
+        </p:spPr>
+        <p:txBody>
+          <a:bodyPr wrap="square" lIns="0" rIns="0" tIns="0" bIns="0" anchor="t">
+            <a:spAutoFit/>
+          </a:bodyPr>
+          <a:lstStyle/>
+          <a:p>
+            <a:pPr algn="l">
+              <a:lnSpc>
+                <a:spcPct val="120000"/>
+              </a:lnSpc>
+            </a:pPr>
+            <a:r>
+              <a:rPr sz="1300" b="0" i="1">
                 <a:solidFill>
                   <a:srgbClr val="FFFFFF"/>
                 </a:solidFill>
@@ -28539,8 +28539,8 @@
         </p:nvSpPr>
         <p:spPr>
           <a:xfrm>
-            <a:off x="7315200" y="6446520"/>
-            <a:ext cx="4389120" cy="274320"/>
+            <a:off x="6858000" y="6355080"/>
+            <a:ext cx="4846320" cy="365760"/>
           </a:xfrm>
           <a:prstGeom prst="rect">
             <a:avLst/>
@@ -28559,7 +28559,7 @@
               </a:lnSpc>
             </a:pPr>
             <a:r>
-              <a:rPr sz="900" b="1" i="0" spc="200">
+              <a:rPr sz="1200" b="1" i="0" spc="200">
                 <a:solidFill>
                   <a:srgbClr val="FFFFFF"/>
                 </a:solidFill>

--- a/wla-summer-challenge-launch.pptx
+++ b/wla-summer-challenge-launch.pptx
@@ -3559,7 +3559,7 @@
               </a:lnSpc>
             </a:pPr>
             <a:r>
-              <a:rPr sz="1200" b="1" i="0" spc="260">
+              <a:rPr sz="1800" b="1" i="0" spc="240">
                 <a:solidFill>
                   <a:srgbClr val="D97757"/>
                 </a:solidFill>
@@ -3671,7 +3671,7 @@
               </a:lnSpc>
             </a:pPr>
             <a:r>
-              <a:rPr sz="1300" b="1" i="0" spc="200">
+              <a:rPr sz="1600" b="1" i="0" spc="200">
                 <a:solidFill>
                   <a:srgbClr val="5A6478"/>
                 </a:solidFill>
@@ -3850,7 +3850,7 @@
               </a:lnSpc>
             </a:pPr>
             <a:r>
-              <a:rPr sz="1200" b="1" i="0" spc="260">
+              <a:rPr sz="1800" b="1" i="0" spc="240">
                 <a:solidFill>
                   <a:srgbClr val="D97757"/>
                 </a:solidFill>
@@ -22285,7 +22285,7 @@
               </a:lnSpc>
             </a:pPr>
             <a:r>
-              <a:rPr sz="1200" b="1" i="0" spc="240">
+              <a:rPr sz="1700" b="1" i="0" spc="220">
                 <a:solidFill>
                   <a:srgbClr val="D97757"/>
                 </a:solidFill>
@@ -22304,8 +22304,8 @@
         </p:nvSpPr>
         <p:spPr>
           <a:xfrm>
-            <a:off x="822960" y="5486400"/>
-            <a:ext cx="164592" cy="164592"/>
+            <a:off x="822960" y="5513832"/>
+            <a:ext cx="219456" cy="219456"/>
           </a:xfrm>
           <a:prstGeom prst="ellipse">
             <a:avLst/>
@@ -22357,27 +22357,27 @@
         </p:nvSpPr>
         <p:spPr>
           <a:xfrm>
-            <a:off x="1115568" y="5440680"/>
-            <a:ext cx="5303520" cy="365760"/>
-          </a:xfrm>
-          <a:prstGeom prst="rect">
-            <a:avLst/>
-          </a:prstGeom>
-          <a:noFill/>
-        </p:spPr>
-        <p:txBody>
-          <a:bodyPr wrap="square" lIns="0" rIns="0" tIns="0" bIns="0" anchor="t">
-            <a:spAutoFit/>
-          </a:bodyPr>
-          <a:lstStyle/>
-          <a:p>
-            <a:pPr algn="l">
-              <a:lnSpc>
-                <a:spcPct val="120000"/>
-              </a:lnSpc>
-            </a:pPr>
-            <a:r>
-              <a:rPr sz="1400" b="1" i="0">
+            <a:off x="1188720" y="5440680"/>
+            <a:ext cx="5303520" cy="457200"/>
+          </a:xfrm>
+          <a:prstGeom prst="rect">
+            <a:avLst/>
+          </a:prstGeom>
+          <a:noFill/>
+        </p:spPr>
+        <p:txBody>
+          <a:bodyPr wrap="square" lIns="0" rIns="0" tIns="0" bIns="0" anchor="t">
+            <a:spAutoFit/>
+          </a:bodyPr>
+          <a:lstStyle/>
+          <a:p>
+            <a:pPr algn="l">
+              <a:lnSpc>
+                <a:spcPct val="120000"/>
+              </a:lnSpc>
+            </a:pPr>
+            <a:r>
+              <a:rPr sz="1700" b="1" i="0">
                 <a:solidFill>
                   <a:srgbClr val="0E2746"/>
                 </a:solidFill>
@@ -22396,8 +22396,8 @@
         </p:nvSpPr>
         <p:spPr>
           <a:xfrm>
-            <a:off x="6400800" y="5486400"/>
-            <a:ext cx="164592" cy="164592"/>
+            <a:off x="6400800" y="5513832"/>
+            <a:ext cx="219456" cy="219456"/>
           </a:xfrm>
           <a:prstGeom prst="ellipse">
             <a:avLst/>
@@ -22449,27 +22449,27 @@
         </p:nvSpPr>
         <p:spPr>
           <a:xfrm>
-            <a:off x="6693408" y="5440680"/>
-            <a:ext cx="5303520" cy="365760"/>
-          </a:xfrm>
-          <a:prstGeom prst="rect">
-            <a:avLst/>
-          </a:prstGeom>
-          <a:noFill/>
-        </p:spPr>
-        <p:txBody>
-          <a:bodyPr wrap="square" lIns="0" rIns="0" tIns="0" bIns="0" anchor="t">
-            <a:spAutoFit/>
-          </a:bodyPr>
-          <a:lstStyle/>
-          <a:p>
-            <a:pPr algn="l">
-              <a:lnSpc>
-                <a:spcPct val="120000"/>
-              </a:lnSpc>
-            </a:pPr>
-            <a:r>
-              <a:rPr sz="1400" b="1" i="0">
+            <a:off x="6766560" y="5440680"/>
+            <a:ext cx="5303520" cy="457200"/>
+          </a:xfrm>
+          <a:prstGeom prst="rect">
+            <a:avLst/>
+          </a:prstGeom>
+          <a:noFill/>
+        </p:spPr>
+        <p:txBody>
+          <a:bodyPr wrap="square" lIns="0" rIns="0" tIns="0" bIns="0" anchor="t">
+            <a:spAutoFit/>
+          </a:bodyPr>
+          <a:lstStyle/>
+          <a:p>
+            <a:pPr algn="l">
+              <a:lnSpc>
+                <a:spcPct val="120000"/>
+              </a:lnSpc>
+            </a:pPr>
+            <a:r>
+              <a:rPr sz="1700" b="1" i="0">
                 <a:solidFill>
                   <a:srgbClr val="0E2746"/>
                 </a:solidFill>
@@ -22488,8 +22488,8 @@
         </p:nvSpPr>
         <p:spPr>
           <a:xfrm>
-            <a:off x="822960" y="5897880"/>
-            <a:ext cx="164592" cy="164592"/>
+            <a:off x="822960" y="5925312"/>
+            <a:ext cx="219456" cy="219456"/>
           </a:xfrm>
           <a:prstGeom prst="ellipse">
             <a:avLst/>
@@ -22541,27 +22541,27 @@
         </p:nvSpPr>
         <p:spPr>
           <a:xfrm>
-            <a:off x="1115568" y="5852160"/>
-            <a:ext cx="5303520" cy="365760"/>
-          </a:xfrm>
-          <a:prstGeom prst="rect">
-            <a:avLst/>
-          </a:prstGeom>
-          <a:noFill/>
-        </p:spPr>
-        <p:txBody>
-          <a:bodyPr wrap="square" lIns="0" rIns="0" tIns="0" bIns="0" anchor="t">
-            <a:spAutoFit/>
-          </a:bodyPr>
-          <a:lstStyle/>
-          <a:p>
-            <a:pPr algn="l">
-              <a:lnSpc>
-                <a:spcPct val="120000"/>
-              </a:lnSpc>
-            </a:pPr>
-            <a:r>
-              <a:rPr sz="1400" b="1" i="0">
+            <a:off x="1188720" y="5852160"/>
+            <a:ext cx="5303520" cy="457200"/>
+          </a:xfrm>
+          <a:prstGeom prst="rect">
+            <a:avLst/>
+          </a:prstGeom>
+          <a:noFill/>
+        </p:spPr>
+        <p:txBody>
+          <a:bodyPr wrap="square" lIns="0" rIns="0" tIns="0" bIns="0" anchor="t">
+            <a:spAutoFit/>
+          </a:bodyPr>
+          <a:lstStyle/>
+          <a:p>
+            <a:pPr algn="l">
+              <a:lnSpc>
+                <a:spcPct val="120000"/>
+              </a:lnSpc>
+            </a:pPr>
+            <a:r>
+              <a:rPr sz="1700" b="1" i="0">
                 <a:solidFill>
                   <a:srgbClr val="0E2746"/>
                 </a:solidFill>
@@ -22580,8 +22580,8 @@
         </p:nvSpPr>
         <p:spPr>
           <a:xfrm>
-            <a:off x="6400800" y="5897880"/>
-            <a:ext cx="164592" cy="164592"/>
+            <a:off x="6400800" y="5925312"/>
+            <a:ext cx="219456" cy="219456"/>
           </a:xfrm>
           <a:prstGeom prst="ellipse">
             <a:avLst/>
@@ -22633,27 +22633,27 @@
         </p:nvSpPr>
         <p:spPr>
           <a:xfrm>
-            <a:off x="6693408" y="5852160"/>
-            <a:ext cx="5303520" cy="365760"/>
-          </a:xfrm>
-          <a:prstGeom prst="rect">
-            <a:avLst/>
-          </a:prstGeom>
-          <a:noFill/>
-        </p:spPr>
-        <p:txBody>
-          <a:bodyPr wrap="square" lIns="0" rIns="0" tIns="0" bIns="0" anchor="t">
-            <a:spAutoFit/>
-          </a:bodyPr>
-          <a:lstStyle/>
-          <a:p>
-            <a:pPr algn="l">
-              <a:lnSpc>
-                <a:spcPct val="120000"/>
-              </a:lnSpc>
-            </a:pPr>
-            <a:r>
-              <a:rPr sz="1400" b="1" i="0">
+            <a:off x="6766560" y="5852160"/>
+            <a:ext cx="5303520" cy="457200"/>
+          </a:xfrm>
+          <a:prstGeom prst="rect">
+            <a:avLst/>
+          </a:prstGeom>
+          <a:noFill/>
+        </p:spPr>
+        <p:txBody>
+          <a:bodyPr wrap="square" lIns="0" rIns="0" tIns="0" bIns="0" anchor="t">
+            <a:spAutoFit/>
+          </a:bodyPr>
+          <a:lstStyle/>
+          <a:p>
+            <a:pPr algn="l">
+              <a:lnSpc>
+                <a:spcPct val="120000"/>
+              </a:lnSpc>
+            </a:pPr>
+            <a:r>
+              <a:rPr sz="1700" b="1" i="0">
                 <a:solidFill>
                   <a:srgbClr val="0E2746"/>
                 </a:solidFill>
@@ -22672,8 +22672,8 @@
         </p:nvSpPr>
         <p:spPr>
           <a:xfrm>
-            <a:off x="822960" y="6309360"/>
-            <a:ext cx="164592" cy="164592"/>
+            <a:off x="822960" y="6336792"/>
+            <a:ext cx="219456" cy="219456"/>
           </a:xfrm>
           <a:prstGeom prst="ellipse">
             <a:avLst/>
@@ -22725,27 +22725,27 @@
         </p:nvSpPr>
         <p:spPr>
           <a:xfrm>
-            <a:off x="1115568" y="6263640"/>
-            <a:ext cx="5303520" cy="365760"/>
-          </a:xfrm>
-          <a:prstGeom prst="rect">
-            <a:avLst/>
-          </a:prstGeom>
-          <a:noFill/>
-        </p:spPr>
-        <p:txBody>
-          <a:bodyPr wrap="square" lIns="0" rIns="0" tIns="0" bIns="0" anchor="t">
-            <a:spAutoFit/>
-          </a:bodyPr>
-          <a:lstStyle/>
-          <a:p>
-            <a:pPr algn="l">
-              <a:lnSpc>
-                <a:spcPct val="120000"/>
-              </a:lnSpc>
-            </a:pPr>
-            <a:r>
-              <a:rPr sz="1400" b="1" i="0">
+            <a:off x="1188720" y="6263640"/>
+            <a:ext cx="5303520" cy="457200"/>
+          </a:xfrm>
+          <a:prstGeom prst="rect">
+            <a:avLst/>
+          </a:prstGeom>
+          <a:noFill/>
+        </p:spPr>
+        <p:txBody>
+          <a:bodyPr wrap="square" lIns="0" rIns="0" tIns="0" bIns="0" anchor="t">
+            <a:spAutoFit/>
+          </a:bodyPr>
+          <a:lstStyle/>
+          <a:p>
+            <a:pPr algn="l">
+              <a:lnSpc>
+                <a:spcPct val="120000"/>
+              </a:lnSpc>
+            </a:pPr>
+            <a:r>
+              <a:rPr sz="1700" b="1" i="0">
                 <a:solidFill>
                   <a:srgbClr val="0E2746"/>
                 </a:solidFill>
@@ -23025,7 +23025,7 @@
               </a:lnSpc>
             </a:pPr>
             <a:r>
-              <a:rPr sz="1400" b="0" i="0">
+              <a:rPr sz="1600" b="0" i="0">
                 <a:solidFill>
                   <a:srgbClr val="333333"/>
                 </a:solidFill>
@@ -23156,7 +23156,7 @@
               </a:lnSpc>
             </a:pPr>
             <a:r>
-              <a:rPr sz="1400" b="0" i="0">
+              <a:rPr sz="1600" b="0" i="0">
                 <a:solidFill>
                   <a:srgbClr val="333333"/>
                 </a:solidFill>
@@ -23287,7 +23287,7 @@
               </a:lnSpc>
             </a:pPr>
             <a:r>
-              <a:rPr sz="1400" b="0" i="0">
+              <a:rPr sz="1600" b="0" i="0">
                 <a:solidFill>
                   <a:srgbClr val="333333"/>
                 </a:solidFill>
@@ -23418,7 +23418,7 @@
               </a:lnSpc>
             </a:pPr>
             <a:r>
-              <a:rPr sz="1400" b="0" i="0">
+              <a:rPr sz="1600" b="0" i="0">
                 <a:solidFill>
                   <a:srgbClr val="333333"/>
                 </a:solidFill>
@@ -23549,7 +23549,7 @@
               </a:lnSpc>
             </a:pPr>
             <a:r>
-              <a:rPr sz="1400" b="0" i="0">
+              <a:rPr sz="1600" b="0" i="0">
                 <a:solidFill>
                   <a:srgbClr val="333333"/>
                 </a:solidFill>
@@ -23831,7 +23831,7 @@
               </a:lnSpc>
             </a:pPr>
             <a:r>
-              <a:rPr sz="1400" b="1" i="0" spc="280">
+              <a:rPr sz="1800" b="1" i="0" spc="240">
                 <a:solidFill>
                   <a:srgbClr val="5A6478"/>
                 </a:solidFill>
@@ -23918,7 +23918,7 @@
               </a:lnSpc>
             </a:pPr>
             <a:r>
-              <a:rPr sz="1400" b="1" i="0" spc="220">
+              <a:rPr sz="1700" b="1" i="0" spc="200">
                 <a:solidFill>
                   <a:srgbClr val="5A6478"/>
                 </a:solidFill>
@@ -24175,7 +24175,7 @@
               </a:lnSpc>
             </a:pPr>
             <a:r>
-              <a:rPr sz="1200" b="1" i="0" spc="280">
+              <a:rPr sz="1800" b="1" i="0" spc="240">
                 <a:solidFill>
                   <a:srgbClr val="D97757"/>
                 </a:solidFill>
@@ -26555,7 +26555,7 @@
               </a:lnSpc>
             </a:pPr>
             <a:r>
-              <a:rPr sz="1400" b="1" i="0" spc="260">
+              <a:rPr sz="1800" b="1" i="0" spc="240">
                 <a:solidFill>
                   <a:srgbClr val="FFFFFF"/>
                 </a:solidFill>
@@ -26594,7 +26594,7 @@
               </a:lnSpc>
             </a:pPr>
             <a:r>
-              <a:rPr sz="1200" b="0" i="0" spc="150">
+              <a:rPr sz="1600" b="0" i="0" spc="150">
                 <a:solidFill>
                   <a:srgbClr val="F4EBDC"/>
                 </a:solidFill>
@@ -27067,7 +27067,7 @@
               </a:lnSpc>
             </a:pPr>
             <a:r>
-              <a:rPr sz="1200" b="1" i="0" spc="240">
+              <a:rPr sz="1800" b="1" i="0" spc="220">
                 <a:solidFill>
                   <a:srgbClr val="D97757"/>
                 </a:solidFill>

--- a/wla-summer-challenge-launch.pptx
+++ b/wla-summer-challenge-launch.pptx
@@ -9903,7 +9903,7 @@
               </a:lnSpc>
             </a:pPr>
             <a:r>
-              <a:rPr sz="1600" b="1" i="0" spc="220">
+              <a:rPr sz="2000" b="1" i="0" spc="200">
                 <a:solidFill>
                   <a:srgbClr val="D97757"/>
                 </a:solidFill>
@@ -10653,7 +10653,7 @@
               </a:lnSpc>
             </a:pPr>
             <a:r>
-              <a:rPr sz="1600" b="1" i="0" spc="220">
+              <a:rPr sz="2000" b="1" i="0" spc="200">
                 <a:solidFill>
                   <a:srgbClr val="D97757"/>
                 </a:solidFill>
@@ -11403,7 +11403,7 @@
               </a:lnSpc>
             </a:pPr>
             <a:r>
-              <a:rPr sz="1600" b="1" i="0" spc="220">
+              <a:rPr sz="2000" b="1" i="0" spc="200">
                 <a:solidFill>
                   <a:srgbClr val="D97757"/>
                 </a:solidFill>
@@ -12070,7 +12070,7 @@
               </a:lnSpc>
             </a:pPr>
             <a:r>
-              <a:rPr sz="1600" b="1" i="0" spc="220">
+              <a:rPr sz="2000" b="1" i="0" spc="200">
                 <a:solidFill>
                   <a:srgbClr val="D97757"/>
                 </a:solidFill>
@@ -12654,7 +12654,7 @@
               </a:lnSpc>
             </a:pPr>
             <a:r>
-              <a:rPr sz="1600" b="1" i="0" spc="220">
+              <a:rPr sz="2000" b="1" i="0" spc="200">
                 <a:solidFill>
                   <a:srgbClr val="D97757"/>
                 </a:solidFill>
@@ -13404,7 +13404,7 @@
               </a:lnSpc>
             </a:pPr>
             <a:r>
-              <a:rPr sz="1600" b="1" i="0" spc="220">
+              <a:rPr sz="2000" b="1" i="0" spc="200">
                 <a:solidFill>
                   <a:srgbClr val="D97757"/>
                 </a:solidFill>
@@ -14888,7 +14888,7 @@
               </a:lnSpc>
             </a:pPr>
             <a:r>
-              <a:rPr sz="1600" b="1" i="0" spc="220">
+              <a:rPr sz="2000" b="1" i="0" spc="200">
                 <a:solidFill>
                   <a:srgbClr val="D97757"/>
                 </a:solidFill>
@@ -15887,7 +15887,7 @@
               </a:lnSpc>
             </a:pPr>
             <a:r>
-              <a:rPr sz="1600" b="1" i="0" spc="220">
+              <a:rPr sz="2000" b="1" i="0" spc="200">
                 <a:solidFill>
                   <a:srgbClr val="D97757"/>
                 </a:solidFill>
@@ -16554,7 +16554,7 @@
               </a:lnSpc>
             </a:pPr>
             <a:r>
-              <a:rPr sz="1600" b="1" i="0" spc="220">
+              <a:rPr sz="2000" b="1" i="0" spc="200">
                 <a:solidFill>
                   <a:srgbClr val="D97757"/>
                 </a:solidFill>
@@ -17304,7 +17304,7 @@
               </a:lnSpc>
             </a:pPr>
             <a:r>
-              <a:rPr sz="1600" b="1" i="0" spc="220">
+              <a:rPr sz="2000" b="1" i="0" spc="200">
                 <a:solidFill>
                   <a:srgbClr val="D97757"/>
                 </a:solidFill>
@@ -18530,7 +18530,7 @@
               </a:lnSpc>
             </a:pPr>
             <a:r>
-              <a:rPr sz="1600" b="1" i="0" spc="220">
+              <a:rPr sz="2000" b="1" i="0" spc="200">
                 <a:solidFill>
                   <a:srgbClr val="D97757"/>
                 </a:solidFill>
@@ -19158,7 +19158,7 @@
               </a:lnSpc>
             </a:pPr>
             <a:r>
-              <a:rPr sz="1600" b="1" i="0" spc="220">
+              <a:rPr sz="2000" b="1" i="0" spc="200">
                 <a:solidFill>
                   <a:srgbClr val="D97757"/>
                 </a:solidFill>
@@ -19786,7 +19786,7 @@
               </a:lnSpc>
             </a:pPr>
             <a:r>
-              <a:rPr sz="1600" b="1" i="0" spc="220">
+              <a:rPr sz="2000" b="1" i="0" spc="200">
                 <a:solidFill>
                   <a:srgbClr val="D97757"/>
                 </a:solidFill>
@@ -20331,7 +20331,7 @@
               </a:lnSpc>
             </a:pPr>
             <a:r>
-              <a:rPr sz="1600" b="1" i="0" spc="220">
+              <a:rPr sz="2000" b="1" i="0" spc="200">
                 <a:solidFill>
                   <a:srgbClr val="D97757"/>
                 </a:solidFill>

--- a/wla-summer-challenge-launch.pptx
+++ b/wla-summer-challenge-launch.pptx
@@ -3539,21 +3539,21 @@
         </p:nvSpPr>
         <p:spPr>
           <a:xfrm>
-            <a:off x="822960" y="731520"/>
-            <a:ext cx="10515600" cy="365760"/>
-          </a:xfrm>
-          <a:prstGeom prst="rect">
-            <a:avLst/>
-          </a:prstGeom>
-          <a:noFill/>
-        </p:spPr>
-        <p:txBody>
-          <a:bodyPr wrap="square" lIns="0" rIns="0" tIns="0" bIns="0" anchor="t">
-            <a:spAutoFit/>
-          </a:bodyPr>
-          <a:lstStyle/>
-          <a:p>
-            <a:pPr algn="l">
+            <a:off x="822960" y="777240"/>
+            <a:ext cx="10515600" cy="457200"/>
+          </a:xfrm>
+          <a:prstGeom prst="rect">
+            <a:avLst/>
+          </a:prstGeom>
+          <a:noFill/>
+        </p:spPr>
+        <p:txBody>
+          <a:bodyPr wrap="square" lIns="0" rIns="0" tIns="0" bIns="0" anchor="t">
+            <a:spAutoFit/>
+          </a:bodyPr>
+          <a:lstStyle/>
+          <a:p>
+            <a:pPr algn="ctr">
               <a:lnSpc>
                 <a:spcPct val="120000"/>
               </a:lnSpc>
@@ -3579,7 +3579,7 @@
         <p:spPr>
           <a:xfrm>
             <a:off x="1097280" y="1920240"/>
-            <a:ext cx="9966960" cy="3657600"/>
+            <a:ext cx="9966960" cy="4572000"/>
           </a:xfrm>
           <a:prstGeom prst="rect">
             <a:avLst/>
@@ -3594,11 +3594,11 @@
           <a:p>
             <a:pPr algn="ctr">
               <a:lnSpc>
-                <a:spcPct val="115000"/>
-              </a:lnSpc>
-            </a:pPr>
-            <a:r>
-              <a:rPr sz="4800" b="0" i="1">
+                <a:spcPct val="118000"/>
+              </a:lnSpc>
+            </a:pPr>
+            <a:r>
+              <a:rPr sz="4400" b="0" i="1">
                 <a:solidFill>
                   <a:srgbClr val="0E2746"/>
                 </a:solidFill>
@@ -3610,11 +3610,14 @@
           <a:p>
             <a:pPr algn="ctr">
               <a:lnSpc>
-                <a:spcPct val="115000"/>
-              </a:lnSpc>
-            </a:pPr>
-            <a:r>
-              <a:rPr sz="4800" b="0" i="1">
+                <a:spcPct val="118000"/>
+              </a:lnSpc>
+              <a:spcAft>
+                <a:spcPts val="2800"/>
+              </a:spcAft>
+            </a:pPr>
+            <a:r>
+              <a:rPr sz="4400" b="0" i="1">
                 <a:solidFill>
                   <a:srgbClr val="0E2746"/>
                 </a:solidFill>
@@ -3623,7 +3626,7 @@
               <a:t>usually </a:t>
             </a:r>
             <a:r>
-              <a:rPr sz="4800" b="1" i="1">
+              <a:rPr sz="4400" b="1" i="1">
                 <a:solidFill>
                   <a:srgbClr val="D97757"/>
                 </a:solidFill>
@@ -3632,7 +3635,7 @@
               <a:t>continue the lifestyle</a:t>
             </a:r>
             <a:r>
-              <a:rPr sz="4800" b="0" i="1">
+              <a:rPr sz="4400" b="0" i="1">
                 <a:solidFill>
                   <a:srgbClr val="0E2746"/>
                 </a:solidFill>
@@ -3641,50 +3644,27 @@
               <a:t>.”</a:t>
             </a:r>
           </a:p>
+          <a:p>
+            <a:pPr algn="ctr">
+              <a:lnSpc>
+                <a:spcPct val="130000"/>
+              </a:lnSpc>
+            </a:pPr>
+            <a:r>
+              <a:rPr sz="1600" b="1" i="0">
+                <a:solidFill>
+                  <a:srgbClr val="5A6478"/>
+                </a:solidFill>
+                <a:latin typeface="Alegreya Sans"/>
+              </a:rPr>
+              <a:t>— Anna Wallace, Founder of WLA</a:t>
+            </a:r>
+          </a:p>
         </p:txBody>
       </p:sp>
       <p:sp>
         <p:nvSpPr>
           <p:cNvPr id="5" name="TextBox 4"/>
-          <p:cNvSpPr txBox="1"/>
-          <p:nvPr/>
-        </p:nvSpPr>
-        <p:spPr>
-          <a:xfrm>
-            <a:off x="1371600" y="5120640"/>
-            <a:ext cx="9418320" cy="457200"/>
-          </a:xfrm>
-          <a:prstGeom prst="rect">
-            <a:avLst/>
-          </a:prstGeom>
-          <a:noFill/>
-        </p:spPr>
-        <p:txBody>
-          <a:bodyPr wrap="square" lIns="0" rIns="0" tIns="0" bIns="0" anchor="t">
-            <a:spAutoFit/>
-          </a:bodyPr>
-          <a:lstStyle/>
-          <a:p>
-            <a:pPr algn="ctr">
-              <a:lnSpc>
-                <a:spcPct val="120000"/>
-              </a:lnSpc>
-            </a:pPr>
-            <a:r>
-              <a:rPr sz="1600" b="1" i="0" spc="200">
-                <a:solidFill>
-                  <a:srgbClr val="5A6478"/>
-                </a:solidFill>
-                <a:latin typeface="Alegreya Sans"/>
-              </a:rPr>
-              <a:t>— Anna Wallace, Founder of WLA</a:t>
-            </a:r>
-          </a:p>
-        </p:txBody>
-      </p:sp>
-      <p:sp>
-        <p:nvSpPr>
-          <p:cNvPr id="6" name="TextBox 5"/>
           <p:cNvSpPr txBox="1"/>
           <p:nvPr/>
         </p:nvSpPr>
@@ -3723,7 +3703,7 @@
       </p:sp>
       <p:sp>
         <p:nvSpPr>
-          <p:cNvPr id="7" name="TextBox 6"/>
+          <p:cNvPr id="6" name="TextBox 5"/>
           <p:cNvSpPr txBox="1"/>
           <p:nvPr/>
         </p:nvSpPr>
@@ -7805,8 +7785,8 @@
         </p:nvSpPr>
         <p:spPr>
           <a:xfrm>
-            <a:off x="4206240" y="1097280"/>
-            <a:ext cx="3749039" cy="365760"/>
+            <a:off x="4206240" y="1280160"/>
+            <a:ext cx="3749039" cy="457200"/>
           </a:xfrm>
           <a:prstGeom prst="roundRect">
             <a:avLst>
@@ -7861,7 +7841,7 @@
         <p:spPr>
           <a:xfrm>
             <a:off x="457200" y="2286000"/>
-            <a:ext cx="11338560" cy="3200400"/>
+            <a:ext cx="11338560" cy="4114800"/>
           </a:xfrm>
           <a:prstGeom prst="rect">
             <a:avLst/>
@@ -7880,7 +7860,7 @@
               </a:lnSpc>
             </a:pPr>
             <a:r>
-              <a:rPr sz="7000" b="1" i="0">
+              <a:rPr sz="6400" b="1" i="0">
                 <a:solidFill>
                   <a:srgbClr val="FFFFFF"/>
                 </a:solidFill>
@@ -7894,9 +7874,12 @@
               <a:lnSpc>
                 <a:spcPct val="105000"/>
               </a:lnSpc>
-            </a:pPr>
-            <a:r>
-              <a:rPr sz="9000" b="1" i="1">
+              <a:spcAft>
+                <a:spcPts val="2000"/>
+              </a:spcAft>
+            </a:pPr>
+            <a:r>
+              <a:rPr sz="8800" b="1" i="1">
                 <a:solidFill>
                   <a:srgbClr val="E5917A"/>
                 </a:solidFill>
@@ -7905,50 +7888,27 @@
               <a:t>WLA App</a:t>
             </a:r>
           </a:p>
+          <a:p>
+            <a:pPr algn="ctr">
+              <a:lnSpc>
+                <a:spcPct val="130000"/>
+              </a:lnSpc>
+            </a:pPr>
+            <a:r>
+              <a:rPr sz="2400" b="0" i="1">
+                <a:solidFill>
+                  <a:srgbClr val="F4EBDC"/>
+                </a:solidFill>
+                <a:latin typeface="Libre Baskerville"/>
+              </a:rPr>
+              <a:t>Support in your pocket. Every single day.</a:t>
+            </a:r>
+          </a:p>
         </p:txBody>
       </p:sp>
       <p:sp>
         <p:nvSpPr>
           <p:cNvPr id="5" name="TextBox 4"/>
-          <p:cNvSpPr txBox="1"/>
-          <p:nvPr/>
-        </p:nvSpPr>
-        <p:spPr>
-          <a:xfrm>
-            <a:off x="822960" y="5760720"/>
-            <a:ext cx="10515600" cy="457200"/>
-          </a:xfrm>
-          <a:prstGeom prst="rect">
-            <a:avLst/>
-          </a:prstGeom>
-          <a:noFill/>
-        </p:spPr>
-        <p:txBody>
-          <a:bodyPr wrap="square" lIns="0" rIns="0" tIns="0" bIns="0" anchor="t">
-            <a:spAutoFit/>
-          </a:bodyPr>
-          <a:lstStyle/>
-          <a:p>
-            <a:pPr algn="ctr">
-              <a:lnSpc>
-                <a:spcPct val="120000"/>
-              </a:lnSpc>
-            </a:pPr>
-            <a:r>
-              <a:rPr sz="2200" b="0" i="1">
-                <a:solidFill>
-                  <a:srgbClr val="F4EBDC"/>
-                </a:solidFill>
-                <a:latin typeface="Libre Baskerville"/>
-              </a:rPr>
-              <a:t>Support in your pocket. Every single day.</a:t>
-            </a:r>
-          </a:p>
-        </p:txBody>
-      </p:sp>
-      <p:sp>
-        <p:nvSpPr>
-          <p:cNvPr id="6" name="TextBox 5"/>
           <p:cNvSpPr txBox="1"/>
           <p:nvPr/>
         </p:nvSpPr>
@@ -7987,7 +7947,7 @@
       </p:sp>
       <p:sp>
         <p:nvSpPr>
-          <p:cNvPr id="7" name="TextBox 6"/>
+          <p:cNvPr id="6" name="TextBox 5"/>
           <p:cNvSpPr txBox="1"/>
           <p:nvPr/>
         </p:nvSpPr>
@@ -21418,8 +21378,8 @@
         </p:nvSpPr>
         <p:spPr>
           <a:xfrm>
-            <a:off x="3566160" y="914400"/>
-            <a:ext cx="5029200" cy="411480"/>
+            <a:off x="3383280" y="914400"/>
+            <a:ext cx="5394960" cy="502920"/>
           </a:xfrm>
           <a:prstGeom prst="roundRect">
             <a:avLst>
@@ -21454,7 +21414,7 @@
           <a:p>
             <a:pPr algn="ctr"/>
             <a:r>
-              <a:rPr sz="1600" b="1" spc="260">
+              <a:rPr sz="1600" b="1" spc="240">
                 <a:solidFill>
                   <a:srgbClr val="FFFFFF"/>
                 </a:solidFill>
@@ -21473,8 +21433,8 @@
         </p:nvSpPr>
         <p:spPr>
           <a:xfrm>
-            <a:off x="457200" y="2194560"/>
-            <a:ext cx="11338560" cy="3200400"/>
+            <a:off x="457200" y="2103120"/>
+            <a:ext cx="11338560" cy="4114800"/>
           </a:xfrm>
           <a:prstGeom prst="rect">
             <a:avLst/>
@@ -21516,6 +21476,9 @@
               <a:lnSpc>
                 <a:spcPct val="110000"/>
               </a:lnSpc>
+              <a:spcAft>
+                <a:spcPts val="2800"/>
+              </a:spcAft>
             </a:pPr>
             <a:r>
               <a:rPr sz="6000" b="1" i="0">
@@ -21527,50 +21490,27 @@
               <a:t>before public launch.</a:t>
             </a:r>
           </a:p>
+          <a:p>
+            <a:pPr algn="ctr">
+              <a:lnSpc>
+                <a:spcPct val="135000"/>
+              </a:lnSpc>
+            </a:pPr>
+            <a:r>
+              <a:rPr sz="2000" b="0" i="1">
+                <a:solidFill>
+                  <a:srgbClr val="0E2746"/>
+                </a:solidFill>
+                <a:latin typeface="Libre Baskerville"/>
+              </a:rPr>
+              <a:t>Because you’re already part of WLA, YOU get first access before anyone else.</a:t>
+            </a:r>
+          </a:p>
         </p:txBody>
       </p:sp>
       <p:sp>
         <p:nvSpPr>
           <p:cNvPr id="5" name="TextBox 4"/>
-          <p:cNvSpPr txBox="1"/>
-          <p:nvPr/>
-        </p:nvSpPr>
-        <p:spPr>
-          <a:xfrm>
-            <a:off x="822960" y="5486400"/>
-            <a:ext cx="10515600" cy="548640"/>
-          </a:xfrm>
-          <a:prstGeom prst="rect">
-            <a:avLst/>
-          </a:prstGeom>
-          <a:noFill/>
-        </p:spPr>
-        <p:txBody>
-          <a:bodyPr wrap="square" lIns="0" rIns="0" tIns="0" bIns="0" anchor="t">
-            <a:spAutoFit/>
-          </a:bodyPr>
-          <a:lstStyle/>
-          <a:p>
-            <a:pPr algn="ctr">
-              <a:lnSpc>
-                <a:spcPct val="120000"/>
-              </a:lnSpc>
-            </a:pPr>
-            <a:r>
-              <a:rPr sz="1900" b="0" i="1">
-                <a:solidFill>
-                  <a:srgbClr val="0E2746"/>
-                </a:solidFill>
-                <a:latin typeface="Libre Baskerville"/>
-              </a:rPr>
-              <a:t>Because you’re already part of WLA, YOU get first access before anyone else.</a:t>
-            </a:r>
-          </a:p>
-        </p:txBody>
-      </p:sp>
-      <p:sp>
-        <p:nvSpPr>
-          <p:cNvPr id="6" name="TextBox 5"/>
           <p:cNvSpPr txBox="1"/>
           <p:nvPr/>
         </p:nvSpPr>
@@ -21609,7 +21549,7 @@
       </p:sp>
       <p:sp>
         <p:nvSpPr>
-          <p:cNvPr id="7" name="TextBox 6"/>
+          <p:cNvPr id="6" name="TextBox 5"/>
           <p:cNvSpPr txBox="1"/>
           <p:nvPr/>
         </p:nvSpPr>
@@ -24155,8 +24095,8 @@
         </p:nvSpPr>
         <p:spPr>
           <a:xfrm>
-            <a:off x="822960" y="1097280"/>
-            <a:ext cx="10515600" cy="365760"/>
+            <a:off x="822960" y="777240"/>
+            <a:ext cx="10515600" cy="457200"/>
           </a:xfrm>
           <a:prstGeom prst="rect">
             <a:avLst/>
@@ -24194,8 +24134,8 @@
         </p:nvSpPr>
         <p:spPr>
           <a:xfrm>
-            <a:off x="822960" y="1920240"/>
-            <a:ext cx="10515600" cy="3200400"/>
+            <a:off x="822960" y="1737360"/>
+            <a:ext cx="10515600" cy="4572000"/>
           </a:xfrm>
           <a:prstGeom prst="rect">
             <a:avLst/>
@@ -24210,8 +24150,11 @@
           <a:p>
             <a:pPr algn="ctr">
               <a:lnSpc>
-                <a:spcPct val="120000"/>
-              </a:lnSpc>
+                <a:spcPct val="118000"/>
+              </a:lnSpc>
+              <a:spcAft>
+                <a:spcPts val="2800"/>
+              </a:spcAft>
             </a:pPr>
             <a:r>
               <a:rPr sz="4400" b="1" i="0">
@@ -24232,89 +24175,46 @@
               <a:t>another diet.</a:t>
             </a:r>
           </a:p>
+          <a:p>
+            <a:pPr algn="ctr">
+              <a:lnSpc>
+                <a:spcPct val="140000"/>
+              </a:lnSpc>
+              <a:spcAft>
+                <a:spcPts val="2000"/>
+              </a:spcAft>
+            </a:pPr>
+            <a:r>
+              <a:rPr sz="1900" b="0" i="0">
+                <a:solidFill>
+                  <a:srgbClr val="333333"/>
+                </a:solidFill>
+                <a:latin typeface="Alegreya Sans"/>
+              </a:rPr>
+              <a:t>It’s about continuing the habits, support and momentum you’ve already worked so hard to build.</a:t>
+            </a:r>
+          </a:p>
+          <a:p>
+            <a:pPr algn="ctr">
+              <a:lnSpc>
+                <a:spcPct val="140000"/>
+              </a:lnSpc>
+            </a:pPr>
+            <a:r>
+              <a:rPr sz="2000" b="0" i="1">
+                <a:solidFill>
+                  <a:srgbClr val="0E2746"/>
+                </a:solidFill>
+                <a:latin typeface="Libre Baskerville"/>
+              </a:rPr>
+              <a:t>The women who maintain their results long term are usually the women who continue living the WLA lifestyle.</a:t>
+            </a:r>
+          </a:p>
         </p:txBody>
       </p:sp>
       <p:sp>
         <p:nvSpPr>
           <p:cNvPr id="5" name="TextBox 4"/>
-          <p:cNvSpPr txBox="1"/>
-          <p:nvPr/>
-        </p:nvSpPr>
-        <p:spPr>
-          <a:xfrm>
-            <a:off x="822960" y="4023360"/>
-            <a:ext cx="10515600" cy="548640"/>
-          </a:xfrm>
-          <a:prstGeom prst="rect">
-            <a:avLst/>
-          </a:prstGeom>
-          <a:noFill/>
-        </p:spPr>
-        <p:txBody>
-          <a:bodyPr wrap="square" lIns="0" rIns="0" tIns="0" bIns="0" anchor="t">
-            <a:spAutoFit/>
-          </a:bodyPr>
-          <a:lstStyle/>
-          <a:p>
-            <a:pPr algn="ctr">
-              <a:lnSpc>
-                <a:spcPct val="120000"/>
-              </a:lnSpc>
-            </a:pPr>
-            <a:r>
-              <a:rPr sz="1800" b="0" i="0">
-                <a:solidFill>
-                  <a:srgbClr val="333333"/>
-                </a:solidFill>
-                <a:latin typeface="Alegreya Sans"/>
-              </a:rPr>
-              <a:t>It’s about continuing the habits, support and momentum you’ve already worked so hard to build.</a:t>
-            </a:r>
-          </a:p>
-        </p:txBody>
-      </p:sp>
-      <p:sp>
-        <p:nvSpPr>
-          <p:cNvPr id="6" name="TextBox 5"/>
-          <p:cNvSpPr txBox="1"/>
-          <p:nvPr/>
-        </p:nvSpPr>
-        <p:spPr>
-          <a:xfrm>
-            <a:off x="822960" y="4937760"/>
-            <a:ext cx="10515600" cy="548640"/>
-          </a:xfrm>
-          <a:prstGeom prst="rect">
-            <a:avLst/>
-          </a:prstGeom>
-          <a:noFill/>
-        </p:spPr>
-        <p:txBody>
-          <a:bodyPr wrap="square" lIns="0" rIns="0" tIns="0" bIns="0" anchor="t">
-            <a:spAutoFit/>
-          </a:bodyPr>
-          <a:lstStyle/>
-          <a:p>
-            <a:pPr algn="ctr">
-              <a:lnSpc>
-                <a:spcPct val="120000"/>
-              </a:lnSpc>
-            </a:pPr>
-            <a:r>
-              <a:rPr sz="1900" b="0" i="1">
-                <a:solidFill>
-                  <a:srgbClr val="0E2746"/>
-                </a:solidFill>
-                <a:latin typeface="Libre Baskerville"/>
-              </a:rPr>
-              <a:t>The women who maintain their results long term are usually the women who continue living the WLA lifestyle.</a:t>
-            </a:r>
-          </a:p>
-        </p:txBody>
-      </p:sp>
-      <p:sp>
-        <p:nvSpPr>
-          <p:cNvPr id="7" name="TextBox 6"/>
           <p:cNvSpPr txBox="1"/>
           <p:nvPr/>
         </p:nvSpPr>
@@ -24353,7 +24253,7 @@
       </p:sp>
       <p:sp>
         <p:nvSpPr>
-          <p:cNvPr id="8" name="TextBox 7"/>
+          <p:cNvPr id="6" name="TextBox 5"/>
           <p:cNvSpPr txBox="1"/>
           <p:nvPr/>
         </p:nvSpPr>
@@ -25749,8 +25649,8 @@
         </p:nvSpPr>
         <p:spPr>
           <a:xfrm>
-            <a:off x="3383280" y="914400"/>
-            <a:ext cx="5394960" cy="411480"/>
+            <a:off x="3200400" y="914400"/>
+            <a:ext cx="5760720" cy="502920"/>
           </a:xfrm>
           <a:prstGeom prst="roundRect">
             <a:avLst>
@@ -25804,8 +25704,8 @@
         </p:nvSpPr>
         <p:spPr>
           <a:xfrm>
-            <a:off x="457200" y="2103120"/>
-            <a:ext cx="11338560" cy="3200400"/>
+            <a:off x="457200" y="2011680"/>
+            <a:ext cx="11338560" cy="4572000"/>
           </a:xfrm>
           <a:prstGeom prst="rect">
             <a:avLst/>
@@ -25822,6 +25722,9 @@
               <a:lnSpc>
                 <a:spcPct val="115000"/>
               </a:lnSpc>
+              <a:spcAft>
+                <a:spcPts val="2800"/>
+              </a:spcAft>
             </a:pPr>
             <a:r>
               <a:rPr sz="5000" b="1" i="0">
@@ -25851,89 +25754,46 @@
               <a:t>.</a:t>
             </a:r>
           </a:p>
+          <a:p>
+            <a:pPr algn="ctr">
+              <a:lnSpc>
+                <a:spcPct val="135000"/>
+              </a:lnSpc>
+              <a:spcAft>
+                <a:spcPts val="2000"/>
+              </a:spcAft>
+            </a:pPr>
+            <a:r>
+              <a:rPr sz="2200" b="0" i="1">
+                <a:solidFill>
+                  <a:srgbClr val="0E2746"/>
+                </a:solidFill>
+                <a:latin typeface="Libre Baskerville"/>
+              </a:rPr>
+              <a:t>Not just losing weight. Building a lifestyle that helps you KEEP the results too.</a:t>
+            </a:r>
+          </a:p>
+          <a:p>
+            <a:pPr algn="ctr">
+              <a:lnSpc>
+                <a:spcPct val="140000"/>
+              </a:lnSpc>
+            </a:pPr>
+            <a:r>
+              <a:rPr sz="1800" b="0" i="0">
+                <a:solidFill>
+                  <a:srgbClr val="333333"/>
+                </a:solidFill>
+                <a:latin typeface="Alegreya Sans"/>
+              </a:rPr>
+              <a:t>I truly believe this next phase of WLA is going to change everything for so many women.</a:t>
+            </a:r>
+          </a:p>
         </p:txBody>
       </p:sp>
       <p:sp>
         <p:nvSpPr>
           <p:cNvPr id="5" name="TextBox 4"/>
-          <p:cNvSpPr txBox="1"/>
-          <p:nvPr/>
-        </p:nvSpPr>
-        <p:spPr>
-          <a:xfrm>
-            <a:off x="822960" y="4206240"/>
-            <a:ext cx="10515600" cy="548640"/>
-          </a:xfrm>
-          <a:prstGeom prst="rect">
-            <a:avLst/>
-          </a:prstGeom>
-          <a:noFill/>
-        </p:spPr>
-        <p:txBody>
-          <a:bodyPr wrap="square" lIns="0" rIns="0" tIns="0" bIns="0" anchor="t">
-            <a:spAutoFit/>
-          </a:bodyPr>
-          <a:lstStyle/>
-          <a:p>
-            <a:pPr algn="ctr">
-              <a:lnSpc>
-                <a:spcPct val="120000"/>
-              </a:lnSpc>
-            </a:pPr>
-            <a:r>
-              <a:rPr sz="2100" b="0" i="1">
-                <a:solidFill>
-                  <a:srgbClr val="0E2746"/>
-                </a:solidFill>
-                <a:latin typeface="Libre Baskerville"/>
-              </a:rPr>
-              <a:t>Not just losing weight. Building a lifestyle that helps you KEEP the results too.</a:t>
-            </a:r>
-          </a:p>
-        </p:txBody>
-      </p:sp>
-      <p:sp>
-        <p:nvSpPr>
-          <p:cNvPr id="6" name="TextBox 5"/>
-          <p:cNvSpPr txBox="1"/>
-          <p:nvPr/>
-        </p:nvSpPr>
-        <p:spPr>
-          <a:xfrm>
-            <a:off x="822960" y="5212080"/>
-            <a:ext cx="10515600" cy="457200"/>
-          </a:xfrm>
-          <a:prstGeom prst="rect">
-            <a:avLst/>
-          </a:prstGeom>
-          <a:noFill/>
-        </p:spPr>
-        <p:txBody>
-          <a:bodyPr wrap="square" lIns="0" rIns="0" tIns="0" bIns="0" anchor="t">
-            <a:spAutoFit/>
-          </a:bodyPr>
-          <a:lstStyle/>
-          <a:p>
-            <a:pPr algn="ctr">
-              <a:lnSpc>
-                <a:spcPct val="120000"/>
-              </a:lnSpc>
-            </a:pPr>
-            <a:r>
-              <a:rPr sz="1700" b="0" i="0">
-                <a:solidFill>
-                  <a:srgbClr val="333333"/>
-                </a:solidFill>
-                <a:latin typeface="Alegreya Sans"/>
-              </a:rPr>
-              <a:t>I truly believe this next phase of WLA is going to change everything for so many women.</a:t>
-            </a:r>
-          </a:p>
-        </p:txBody>
-      </p:sp>
-      <p:sp>
-        <p:nvSpPr>
-          <p:cNvPr id="7" name="TextBox 6"/>
           <p:cNvSpPr txBox="1"/>
           <p:nvPr/>
         </p:nvSpPr>
@@ -25972,7 +25832,7 @@
       </p:sp>
       <p:sp>
         <p:nvSpPr>
-          <p:cNvPr id="8" name="TextBox 7"/>
+          <p:cNvPr id="6" name="TextBox 5"/>
           <p:cNvSpPr txBox="1"/>
           <p:nvPr/>
         </p:nvSpPr>
@@ -26079,8 +25939,8 @@
         </p:nvSpPr>
         <p:spPr>
           <a:xfrm>
-            <a:off x="4754880" y="1280160"/>
-            <a:ext cx="2651760" cy="365760"/>
+            <a:off x="4754880" y="1554480"/>
+            <a:ext cx="2651760" cy="457200"/>
           </a:xfrm>
           <a:prstGeom prst="roundRect">
             <a:avLst>
@@ -26134,8 +25994,8 @@
         </p:nvSpPr>
         <p:spPr>
           <a:xfrm>
-            <a:off x="1097280" y="2194560"/>
-            <a:ext cx="9966960" cy="3200400"/>
+            <a:off x="1097280" y="2651760"/>
+            <a:ext cx="9966960" cy="3657600"/>
           </a:xfrm>
           <a:prstGeom prst="rect">
             <a:avLst/>
@@ -26152,6 +26012,9 @@
               <a:lnSpc>
                 <a:spcPct val="115000"/>
               </a:lnSpc>
+              <a:spcAft>
+                <a:spcPts val="2400"/>
+              </a:spcAft>
             </a:pPr>
             <a:r>
               <a:rPr sz="6400" b="0" i="1">
@@ -26181,50 +26044,27 @@
               <a:t>.”</a:t>
             </a:r>
           </a:p>
+          <a:p>
+            <a:pPr algn="ctr">
+              <a:lnSpc>
+                <a:spcPct val="135000"/>
+              </a:lnSpc>
+            </a:pPr>
+            <a:r>
+              <a:rPr sz="2000" b="0" i="0">
+                <a:solidFill>
+                  <a:srgbClr val="F4EBDC"/>
+                </a:solidFill>
+                <a:latin typeface="Alegreya Sans"/>
+              </a:rPr>
+              <a:t>And THAT is the cycle we want to help women finally break for good.</a:t>
+            </a:r>
+          </a:p>
         </p:txBody>
       </p:sp>
       <p:sp>
         <p:nvSpPr>
           <p:cNvPr id="5" name="TextBox 4"/>
-          <p:cNvSpPr txBox="1"/>
-          <p:nvPr/>
-        </p:nvSpPr>
-        <p:spPr>
-          <a:xfrm>
-            <a:off x="1371600" y="4846320"/>
-            <a:ext cx="9418320" cy="548640"/>
-          </a:xfrm>
-          <a:prstGeom prst="rect">
-            <a:avLst/>
-          </a:prstGeom>
-          <a:noFill/>
-        </p:spPr>
-        <p:txBody>
-          <a:bodyPr wrap="square" lIns="0" rIns="0" tIns="0" bIns="0" anchor="t">
-            <a:spAutoFit/>
-          </a:bodyPr>
-          <a:lstStyle/>
-          <a:p>
-            <a:pPr algn="ctr">
-              <a:lnSpc>
-                <a:spcPct val="120000"/>
-              </a:lnSpc>
-            </a:pPr>
-            <a:r>
-              <a:rPr sz="1800" b="0" i="0">
-                <a:solidFill>
-                  <a:srgbClr val="F4EBDC"/>
-                </a:solidFill>
-                <a:latin typeface="Alegreya Sans"/>
-              </a:rPr>
-              <a:t>And THAT is the cycle we want to help women finally break for good.</a:t>
-            </a:r>
-          </a:p>
-        </p:txBody>
-      </p:sp>
-      <p:sp>
-        <p:nvSpPr>
-          <p:cNvPr id="6" name="TextBox 5"/>
           <p:cNvSpPr txBox="1"/>
           <p:nvPr/>
         </p:nvSpPr>
@@ -26263,7 +26103,7 @@
       </p:sp>
       <p:sp>
         <p:nvSpPr>
-          <p:cNvPr id="7" name="TextBox 6"/>
+          <p:cNvPr id="6" name="TextBox 5"/>
           <p:cNvSpPr txBox="1"/>
           <p:nvPr/>
         </p:nvSpPr>
@@ -26370,8 +26210,8 @@
         </p:nvSpPr>
         <p:spPr>
           <a:xfrm>
-            <a:off x="4114800" y="1097280"/>
-            <a:ext cx="3931920" cy="411480"/>
+            <a:off x="3931920" y="868680"/>
+            <a:ext cx="4297680" cy="502920"/>
           </a:xfrm>
           <a:prstGeom prst="roundRect">
             <a:avLst>
@@ -26406,7 +26246,7 @@
           <a:p>
             <a:pPr algn="ctr"/>
             <a:r>
-              <a:rPr sz="1500" b="1" spc="260">
+              <a:rPr sz="1500" b="1" spc="240">
                 <a:solidFill>
                   <a:srgbClr val="FFFFFF"/>
                 </a:solidFill>
@@ -26425,8 +26265,8 @@
         </p:nvSpPr>
         <p:spPr>
           <a:xfrm>
-            <a:off x="457200" y="2286000"/>
-            <a:ext cx="11338560" cy="3200400"/>
+            <a:off x="457200" y="1828800"/>
+            <a:ext cx="11338560" cy="2743200"/>
           </a:xfrm>
           <a:prstGeom prst="rect">
             <a:avLst/>
@@ -26489,8 +26329,8 @@
         </p:nvSpPr>
         <p:spPr>
           <a:xfrm>
-            <a:off x="4023360" y="5120640"/>
-            <a:ext cx="4114800" cy="685800"/>
+            <a:off x="3840480" y="4663440"/>
+            <a:ext cx="4480560" cy="777240"/>
           </a:xfrm>
           <a:prstGeom prst="roundRect">
             <a:avLst>
@@ -26535,8 +26375,8 @@
         </p:nvSpPr>
         <p:spPr>
           <a:xfrm>
-            <a:off x="4023360" y="5120640"/>
-            <a:ext cx="4114800" cy="685800"/>
+            <a:off x="3840480" y="4663440"/>
+            <a:ext cx="4480560" cy="777240"/>
           </a:xfrm>
           <a:prstGeom prst="rect">
             <a:avLst/>
@@ -26574,7 +26414,7 @@
         </p:nvSpPr>
         <p:spPr>
           <a:xfrm>
-            <a:off x="457200" y="6035040"/>
+            <a:off x="457200" y="5623560"/>
             <a:ext cx="11338560" cy="365760"/>
           </a:xfrm>
           <a:prstGeom prst="rect">
